--- a/presentaciones/Clase6-Vulnerabilidades-y-Superficie-de-Ataque.pptx
+++ b/presentaciones/Clase6-Vulnerabilidades-y-Superficie-de-Ataque.pptx
@@ -9,16 +9,24 @@
     <p:sldId id="257" r:id="rId9"/>
     <p:sldId id="258" r:id="rId10"/>
     <p:sldId id="259" r:id="rId11"/>
+    <p:sldId id="273" r:id="rId25"/>
     <p:sldId id="260" r:id="rId12"/>
     <p:sldId id="261" r:id="rId13"/>
+    <p:sldId id="274" r:id="rId26"/>
     <p:sldId id="262" r:id="rId14"/>
     <p:sldId id="263" r:id="rId15"/>
     <p:sldId id="264" r:id="rId16"/>
+    <p:sldId id="275" r:id="rId27"/>
     <p:sldId id="265" r:id="rId17"/>
+    <p:sldId id="276" r:id="rId28"/>
     <p:sldId id="266" r:id="rId18"/>
+    <p:sldId id="277" r:id="rId29"/>
     <p:sldId id="267" r:id="rId19"/>
+    <p:sldId id="278" r:id="rId30"/>
     <p:sldId id="268" r:id="rId20"/>
+    <p:sldId id="279" r:id="rId31"/>
     <p:sldId id="269" r:id="rId21"/>
+    <p:sldId id="280" r:id="rId32"/>
     <p:sldId id="270" r:id="rId22"/>
     <p:sldId id="271" r:id="rId23"/>
     <p:sldId id="272" r:id="rId24"/>
@@ -1103,6 +1111,146 @@
 </p:notes>
 </file>
 
+<file path=ppt/notesSlides/notesSlide18.xml><?xml version="1.0" encoding="utf-8"?>
+<p:notes xmlns:a="http://schemas.openxmlformats.org/drawingml/2006/main" xmlns:p="http://schemas.openxmlformats.org/presentationml/2006/main" xmlns:r="http://schemas.openxmlformats.org/officeDocument/2006/relationships">
+  <p:cSld>
+    <p:spTree>
+      <p:nvGrpSpPr>
+        <p:cNvPr id="1" name=""/>
+        <p:cNvGrpSpPr/>
+        <p:nvPr/>
+      </p:nvGrpSpPr>
+      <p:grpSpPr>
+        <a:xfrm>
+          <a:off x="0" y="0"/>
+          <a:ext cx="0" cy="0"/>
+          <a:chOff x="0" y="0"/>
+          <a:chExt cx="0" cy="0"/>
+        </a:xfrm>
+      </p:grpSpPr>
+      <p:sp>
+        <p:nvSpPr>
+          <p:cNvPr id="2" name="Slide Image Placeholder 1"/>
+          <p:cNvSpPr>
+            <a:spLocks noGrp="1"/>
+          </p:cNvSpPr>
+          <p:nvPr>
+            <p:ph type="sldImg" idx="2"/>
+          </p:nvPr>
+        </p:nvSpPr>
+        <p:spPr/>
+      </p:sp>
+      <p:sp>
+        <p:nvSpPr>
+          <p:cNvPr id="3" name="Notes Placeholder 2"/>
+          <p:cNvSpPr>
+            <a:spLocks noGrp="1"/>
+          </p:cNvSpPr>
+          <p:nvPr>
+            <p:ph type="body" idx="3" sz="quarter"/>
+          </p:nvPr>
+        </p:nvSpPr>
+        <p:spPr/>
+        <p:txBody>
+          <a:bodyPr/>
+          <a:lstStyle/>
+          <a:p>
+            <a:r>
+              <a:t>Ejemplo sin código para quien no programa. La casa permite separar las tres palabras antes de verlas en una aplicación. Preguntar al grupo: ¿sobre cuál de las tres puede actuar el dueño? Solo sobre la ventana.</a:t>
+            </a:r>
+          </a:p>
+        </p:txBody>
+      </p:sp>
+      <p:sp>
+        <p:nvSpPr>
+          <p:cNvPr id="4" name="Slide Number Placeholder 3"/>
+          <p:cNvSpPr>
+            <a:spLocks noGrp="1"/>
+          </p:cNvSpPr>
+          <p:nvPr>
+            <p:ph type="sldNum" idx="5" sz="quarter"/>
+          </p:nvPr>
+        </p:nvSpPr>
+        <p:spPr/>
+      </p:sp>
+    </p:spTree>
+  </p:cSld>
+  <p:clrMapOvr>
+    <a:masterClrMapping/>
+  </p:clrMapOvr>
+</p:notes>
+</file>
+
+<file path=ppt/notesSlides/notesSlide19.xml><?xml version="1.0" encoding="utf-8"?>
+<p:notes xmlns:a="http://schemas.openxmlformats.org/drawingml/2006/main" xmlns:p="http://schemas.openxmlformats.org/presentationml/2006/main" xmlns:r="http://schemas.openxmlformats.org/officeDocument/2006/relationships">
+  <p:cSld>
+    <p:spTree>
+      <p:nvGrpSpPr>
+        <p:cNvPr id="1" name=""/>
+        <p:cNvGrpSpPr/>
+        <p:nvPr/>
+      </p:nvGrpSpPr>
+      <p:grpSpPr>
+        <a:xfrm>
+          <a:off x="0" y="0"/>
+          <a:ext cx="0" cy="0"/>
+          <a:chOff x="0" y="0"/>
+          <a:chExt cx="0" cy="0"/>
+        </a:xfrm>
+      </p:grpSpPr>
+      <p:sp>
+        <p:nvSpPr>
+          <p:cNvPr id="2" name="Slide Image Placeholder 1"/>
+          <p:cNvSpPr>
+            <a:spLocks noGrp="1"/>
+          </p:cNvSpPr>
+          <p:nvPr>
+            <p:ph type="sldImg" idx="2"/>
+          </p:nvPr>
+        </p:nvSpPr>
+        <p:spPr/>
+      </p:sp>
+      <p:sp>
+        <p:nvSpPr>
+          <p:cNvPr id="3" name="Notes Placeholder 2"/>
+          <p:cNvSpPr>
+            <a:spLocks noGrp="1"/>
+          </p:cNvSpPr>
+          <p:nvPr>
+            <p:ph type="body" idx="3" sz="quarter"/>
+          </p:nvPr>
+        </p:nvSpPr>
+        <p:spPr/>
+        <p:txBody>
+          <a:bodyPr/>
+          <a:lstStyle/>
+          <a:p>
+            <a:r>
+              <a:t>Cada entrada del liceo corresponde a una entrada de la aplicación del laboratorio. Las cuatro filas adelantan las fallas que siguen: login (inyección SQL), carpetas numeradas (IDOR), buzón (XSS), fotocopiadora (salto de directorio).</a:t>
+            </a:r>
+          </a:p>
+        </p:txBody>
+      </p:sp>
+      <p:sp>
+        <p:nvSpPr>
+          <p:cNvPr id="4" name="Slide Number Placeholder 3"/>
+          <p:cNvSpPr>
+            <a:spLocks noGrp="1"/>
+          </p:cNvSpPr>
+          <p:nvPr>
+            <p:ph type="sldNum" idx="5" sz="quarter"/>
+          </p:nvPr>
+        </p:nvSpPr>
+        <p:spPr/>
+      </p:sp>
+    </p:spTree>
+  </p:cSld>
+  <p:clrMapOvr>
+    <a:masterClrMapping/>
+  </p:clrMapOvr>
+</p:notes>
+</file>
+
 <file path=ppt/notesSlides/notesSlide2.xml><?xml version="1.0" encoding="utf-8"?>
 <p:notes xmlns:a="http://schemas.openxmlformats.org/drawingml/2006/main" xmlns:p="http://schemas.openxmlformats.org/presentationml/2006/main" xmlns:r="http://schemas.openxmlformats.org/officeDocument/2006/relationships">
   <p:cSld>
@@ -1149,6 +1297,426 @@
           <a:p>
             <a:r>
               <a:t>Tres palabras a separar y el error de fondo que comparten las cinco fallas.</a:t>
+            </a:r>
+          </a:p>
+        </p:txBody>
+      </p:sp>
+      <p:sp>
+        <p:nvSpPr>
+          <p:cNvPr id="4" name="Slide Number Placeholder 3"/>
+          <p:cNvSpPr>
+            <a:spLocks noGrp="1"/>
+          </p:cNvSpPr>
+          <p:nvPr>
+            <p:ph type="sldNum" idx="5" sz="quarter"/>
+          </p:nvPr>
+        </p:nvSpPr>
+        <p:spPr/>
+      </p:sp>
+    </p:spTree>
+  </p:cSld>
+  <p:clrMapOvr>
+    <a:masterClrMapping/>
+  </p:clrMapOvr>
+</p:notes>
+</file>
+
+<file path=ppt/notesSlides/notesSlide20.xml><?xml version="1.0" encoding="utf-8"?>
+<p:notes xmlns:a="http://schemas.openxmlformats.org/drawingml/2006/main" xmlns:p="http://schemas.openxmlformats.org/presentationml/2006/main" xmlns:r="http://schemas.openxmlformats.org/officeDocument/2006/relationships">
+  <p:cSld>
+    <p:spTree>
+      <p:nvGrpSpPr>
+        <p:cNvPr id="1" name=""/>
+        <p:cNvGrpSpPr/>
+        <p:nvPr/>
+      </p:nvGrpSpPr>
+      <p:grpSpPr>
+        <a:xfrm>
+          <a:off x="0" y="0"/>
+          <a:ext cx="0" cy="0"/>
+          <a:chOff x="0" y="0"/>
+          <a:chExt cx="0" cy="0"/>
+        </a:xfrm>
+      </p:grpSpPr>
+      <p:sp>
+        <p:nvSpPr>
+          <p:cNvPr id="2" name="Slide Image Placeholder 1"/>
+          <p:cNvSpPr>
+            <a:spLocks noGrp="1"/>
+          </p:cNvSpPr>
+          <p:nvPr>
+            <p:ph type="sldImg" idx="2"/>
+          </p:nvPr>
+        </p:nvSpPr>
+        <p:spPr/>
+      </p:sp>
+      <p:sp>
+        <p:nvSpPr>
+          <p:cNvPr id="3" name="Notes Placeholder 2"/>
+          <p:cNvSpPr>
+            <a:spLocks noGrp="1"/>
+          </p:cNvSpPr>
+          <p:nvPr>
+            <p:ph type="body" idx="3" sz="quarter"/>
+          </p:nvPr>
+        </p:nvSpPr>
+        <p:spPr/>
+        <p:txBody>
+          <a:bodyPr/>
+          <a:lstStyle/>
+          <a:p>
+            <a:r>
+              <a:t>El portero es la base de datos: cumple la orden completa tal como queda escrita. «o dejar pasar a cualquiera» cumple el mismo papel que OR '1'='1': agrega una condición que siempre se cumple. La casilla aparte es el marcador ? de la consulta parametrizada.</a:t>
+            </a:r>
+          </a:p>
+        </p:txBody>
+      </p:sp>
+      <p:sp>
+        <p:nvSpPr>
+          <p:cNvPr id="4" name="Slide Number Placeholder 3"/>
+          <p:cNvSpPr>
+            <a:spLocks noGrp="1"/>
+          </p:cNvSpPr>
+          <p:nvPr>
+            <p:ph type="sldNum" idx="5" sz="quarter"/>
+          </p:nvPr>
+        </p:nvSpPr>
+        <p:spPr/>
+      </p:sp>
+    </p:spTree>
+  </p:cSld>
+  <p:clrMapOvr>
+    <a:masterClrMapping/>
+  </p:clrMapOvr>
+</p:notes>
+</file>
+
+<file path=ppt/notesSlides/notesSlide21.xml><?xml version="1.0" encoding="utf-8"?>
+<p:notes xmlns:a="http://schemas.openxmlformats.org/drawingml/2006/main" xmlns:p="http://schemas.openxmlformats.org/presentationml/2006/main" xmlns:r="http://schemas.openxmlformats.org/officeDocument/2006/relationships">
+  <p:cSld>
+    <p:spTree>
+      <p:nvGrpSpPr>
+        <p:cNvPr id="1" name=""/>
+        <p:cNvGrpSpPr/>
+        <p:nvPr/>
+      </p:nvGrpSpPr>
+      <p:grpSpPr>
+        <a:xfrm>
+          <a:off x="0" y="0"/>
+          <a:ext cx="0" cy="0"/>
+          <a:chOff x="0" y="0"/>
+          <a:chExt cx="0" cy="0"/>
+        </a:xfrm>
+      </p:grpSpPr>
+      <p:sp>
+        <p:nvSpPr>
+          <p:cNvPr id="2" name="Slide Image Placeholder 1"/>
+          <p:cNvSpPr>
+            <a:spLocks noGrp="1"/>
+          </p:cNvSpPr>
+          <p:nvPr>
+            <p:ph type="sldImg" idx="2"/>
+          </p:nvPr>
+        </p:nvSpPr>
+        <p:spPr/>
+      </p:sp>
+      <p:sp>
+        <p:nvSpPr>
+          <p:cNvPr id="3" name="Notes Placeholder 2"/>
+          <p:cNvSpPr>
+            <a:spLocks noGrp="1"/>
+          </p:cNvSpPr>
+          <p:nvPr>
+            <p:ph type="body" idx="3" sz="quarter"/>
+          </p:nvPr>
+        </p:nvSpPr>
+        <p:spPr/>
+        <p:txBody>
+          <a:bodyPr/>
+          <a:lstStyle/>
+          <a:p>
+            <a:r>
+              <a:t>El actor es el navegador: lo que está entre paréntesis lo ejecuta, no lo lee. En HTML, los «paréntesis» son los signos &lt; y &gt; de las etiquetas. htmlspecialchars los convierte en texto que se muestra, no que se ejecuta.</a:t>
+            </a:r>
+          </a:p>
+        </p:txBody>
+      </p:sp>
+      <p:sp>
+        <p:nvSpPr>
+          <p:cNvPr id="4" name="Slide Number Placeholder 3"/>
+          <p:cNvSpPr>
+            <a:spLocks noGrp="1"/>
+          </p:cNvSpPr>
+          <p:nvPr>
+            <p:ph type="sldNum" idx="5" sz="quarter"/>
+          </p:nvPr>
+        </p:nvSpPr>
+        <p:spPr/>
+      </p:sp>
+    </p:spTree>
+  </p:cSld>
+  <p:clrMapOvr>
+    <a:masterClrMapping/>
+  </p:clrMapOvr>
+</p:notes>
+</file>
+
+<file path=ppt/notesSlides/notesSlide22.xml><?xml version="1.0" encoding="utf-8"?>
+<p:notes xmlns:a="http://schemas.openxmlformats.org/drawingml/2006/main" xmlns:p="http://schemas.openxmlformats.org/presentationml/2006/main" xmlns:r="http://schemas.openxmlformats.org/officeDocument/2006/relationships">
+  <p:cSld>
+    <p:spTree>
+      <p:nvGrpSpPr>
+        <p:cNvPr id="1" name=""/>
+        <p:cNvGrpSpPr/>
+        <p:nvPr/>
+      </p:nvGrpSpPr>
+      <p:grpSpPr>
+        <a:xfrm>
+          <a:off x="0" y="0"/>
+          <a:ext cx="0" cy="0"/>
+          <a:chOff x="0" y="0"/>
+          <a:chExt cx="0" cy="0"/>
+        </a:xfrm>
+      </p:grpSpPr>
+      <p:sp>
+        <p:nvSpPr>
+          <p:cNvPr id="2" name="Slide Image Placeholder 1"/>
+          <p:cNvSpPr>
+            <a:spLocks noGrp="1"/>
+          </p:cNvSpPr>
+          <p:nvPr>
+            <p:ph type="sldImg" idx="2"/>
+          </p:nvPr>
+        </p:nvSpPr>
+        <p:spPr/>
+      </p:sp>
+      <p:sp>
+        <p:nvSpPr>
+          <p:cNvPr id="3" name="Notes Placeholder 2"/>
+          <p:cNvSpPr>
+            <a:spLocks noGrp="1"/>
+          </p:cNvSpPr>
+          <p:nvPr>
+            <p:ph type="body" idx="3" sz="quarter"/>
+          </p:nvPr>
+        </p:nvSpPr>
+        <p:spPr/>
+        <p:txBody>
+          <a:bodyPr/>
+          <a:lstStyle/>
+          <a:p>
+            <a:r>
+              <a:t>Mostrar el carné es iniciar sesión. El número de carpeta es el id de la dirección. El error es controlar quién es la persona, pero no qué puede pedir: autenticar no es autorizar.</a:t>
+            </a:r>
+          </a:p>
+        </p:txBody>
+      </p:sp>
+      <p:sp>
+        <p:nvSpPr>
+          <p:cNvPr id="4" name="Slide Number Placeholder 3"/>
+          <p:cNvSpPr>
+            <a:spLocks noGrp="1"/>
+          </p:cNvSpPr>
+          <p:nvPr>
+            <p:ph type="sldNum" idx="5" sz="quarter"/>
+          </p:nvPr>
+        </p:nvSpPr>
+        <p:spPr/>
+      </p:sp>
+    </p:spTree>
+  </p:cSld>
+  <p:clrMapOvr>
+    <a:masterClrMapping/>
+  </p:clrMapOvr>
+</p:notes>
+</file>
+
+<file path=ppt/notesSlides/notesSlide23.xml><?xml version="1.0" encoding="utf-8"?>
+<p:notes xmlns:a="http://schemas.openxmlformats.org/drawingml/2006/main" xmlns:p="http://schemas.openxmlformats.org/presentationml/2006/main" xmlns:r="http://schemas.openxmlformats.org/officeDocument/2006/relationships">
+  <p:cSld>
+    <p:spTree>
+      <p:nvGrpSpPr>
+        <p:cNvPr id="1" name=""/>
+        <p:cNvGrpSpPr/>
+        <p:nvPr/>
+      </p:nvGrpSpPr>
+      <p:grpSpPr>
+        <a:xfrm>
+          <a:off x="0" y="0"/>
+          <a:ext cx="0" cy="0"/>
+          <a:chOff x="0" y="0"/>
+          <a:chExt cx="0" cy="0"/>
+        </a:xfrm>
+      </p:grpSpPr>
+      <p:sp>
+        <p:nvSpPr>
+          <p:cNvPr id="2" name="Slide Image Placeholder 1"/>
+          <p:cNvSpPr>
+            <a:spLocks noGrp="1"/>
+          </p:cNvSpPr>
+          <p:nvPr>
+            <p:ph type="sldImg" idx="2"/>
+          </p:nvPr>
+        </p:nvSpPr>
+        <p:spPr/>
+      </p:sp>
+      <p:sp>
+        <p:nvSpPr>
+          <p:cNvPr id="3" name="Notes Placeholder 2"/>
+          <p:cNvSpPr>
+            <a:spLocks noGrp="1"/>
+          </p:cNvSpPr>
+          <p:nvPr>
+            <p:ph type="body" idx="3" sz="quarter"/>
+          </p:nvPr>
+        </p:nvSpPr>
+        <p:spPr/>
+        <p:txBody>
+          <a:bodyPr/>
+          <a:lstStyle/>
+          <a:p>
+            <a:r>
+              <a:t>El estante público es la carpeta archivos/. «Volver al pasillo» es ../, que en una ruta significa subir una carpeta. La carpeta de claves es conexion.php. La lista impresa es la lista blanca.</a:t>
+            </a:r>
+          </a:p>
+        </p:txBody>
+      </p:sp>
+      <p:sp>
+        <p:nvSpPr>
+          <p:cNvPr id="4" name="Slide Number Placeholder 3"/>
+          <p:cNvSpPr>
+            <a:spLocks noGrp="1"/>
+          </p:cNvSpPr>
+          <p:nvPr>
+            <p:ph type="sldNum" idx="5" sz="quarter"/>
+          </p:nvPr>
+        </p:nvSpPr>
+        <p:spPr/>
+      </p:sp>
+    </p:spTree>
+  </p:cSld>
+  <p:clrMapOvr>
+    <a:masterClrMapping/>
+  </p:clrMapOvr>
+</p:notes>
+</file>
+
+<file path=ppt/notesSlides/notesSlide24.xml><?xml version="1.0" encoding="utf-8"?>
+<p:notes xmlns:a="http://schemas.openxmlformats.org/drawingml/2006/main" xmlns:p="http://schemas.openxmlformats.org/presentationml/2006/main" xmlns:r="http://schemas.openxmlformats.org/officeDocument/2006/relationships">
+  <p:cSld>
+    <p:spTree>
+      <p:nvGrpSpPr>
+        <p:cNvPr id="1" name=""/>
+        <p:cNvGrpSpPr/>
+        <p:nvPr/>
+      </p:nvGrpSpPr>
+      <p:grpSpPr>
+        <a:xfrm>
+          <a:off x="0" y="0"/>
+          <a:ext cx="0" cy="0"/>
+          <a:chOff x="0" y="0"/>
+          <a:chExt cx="0" cy="0"/>
+        </a:xfrm>
+      </p:grpSpPr>
+      <p:sp>
+        <p:nvSpPr>
+          <p:cNvPr id="2" name="Slide Image Placeholder 1"/>
+          <p:cNvSpPr>
+            <a:spLocks noGrp="1"/>
+          </p:cNvSpPr>
+          <p:nvPr>
+            <p:ph type="sldImg" idx="2"/>
+          </p:nvPr>
+        </p:nvSpPr>
+        <p:spPr/>
+      </p:sp>
+      <p:sp>
+        <p:nvSpPr>
+          <p:cNvPr id="3" name="Notes Placeholder 2"/>
+          <p:cNvSpPr>
+            <a:spLocks noGrp="1"/>
+          </p:cNvSpPr>
+          <p:nvPr>
+            <p:ph type="body" idx="3" sz="quarter"/>
+          </p:nvPr>
+        </p:nvSpPr>
+        <p:spPr/>
+        <p:txBody>
+          <a:bodyPr/>
+          <a:lstStyle/>
+          <a:p>
+            <a:r>
+              <a:t>El licuado es el hash: fácil de hacer, imposible de deshacer. MD5 es un licuado instantáneo y siempre igual, por eso existen catálogos (tablas) con millones de resultados ya calculados. password_hash agrega sal (un ingrediente distinto por persona) y es lento a propósito.</a:t>
+            </a:r>
+          </a:p>
+        </p:txBody>
+      </p:sp>
+      <p:sp>
+        <p:nvSpPr>
+          <p:cNvPr id="4" name="Slide Number Placeholder 3"/>
+          <p:cNvSpPr>
+            <a:spLocks noGrp="1"/>
+          </p:cNvSpPr>
+          <p:nvPr>
+            <p:ph type="sldNum" idx="5" sz="quarter"/>
+          </p:nvPr>
+        </p:nvSpPr>
+        <p:spPr/>
+      </p:sp>
+    </p:spTree>
+  </p:cSld>
+  <p:clrMapOvr>
+    <a:masterClrMapping/>
+  </p:clrMapOvr>
+</p:notes>
+</file>
+
+<file path=ppt/notesSlides/notesSlide25.xml><?xml version="1.0" encoding="utf-8"?>
+<p:notes xmlns:a="http://schemas.openxmlformats.org/drawingml/2006/main" xmlns:p="http://schemas.openxmlformats.org/presentationml/2006/main" xmlns:r="http://schemas.openxmlformats.org/officeDocument/2006/relationships">
+  <p:cSld>
+    <p:spTree>
+      <p:nvGrpSpPr>
+        <p:cNvPr id="1" name=""/>
+        <p:cNvGrpSpPr/>
+        <p:nvPr/>
+      </p:nvGrpSpPr>
+      <p:grpSpPr>
+        <a:xfrm>
+          <a:off x="0" y="0"/>
+          <a:ext cx="0" cy="0"/>
+          <a:chOff x="0" y="0"/>
+          <a:chExt cx="0" cy="0"/>
+        </a:xfrm>
+      </p:grpSpPr>
+      <p:sp>
+        <p:nvSpPr>
+          <p:cNvPr id="2" name="Slide Image Placeholder 1"/>
+          <p:cNvSpPr>
+            <a:spLocks noGrp="1"/>
+          </p:cNvSpPr>
+          <p:nvPr>
+            <p:ph type="sldImg" idx="2"/>
+          </p:nvPr>
+        </p:nvSpPr>
+        <p:spPr/>
+      </p:sp>
+      <p:sp>
+        <p:nvSpPr>
+          <p:cNvPr id="3" name="Notes Placeholder 2"/>
+          <p:cNvSpPr>
+            <a:spLocks noGrp="1"/>
+          </p:cNvSpPr>
+          <p:nvPr>
+            <p:ph type="body" idx="3" sz="quarter"/>
+          </p:nvPr>
+        </p:nvSpPr>
+        <p:spPr/>
+        <p:txBody>
+          <a:bodyPr/>
+          <a:lstStyle/>
+          <a:p>
+            <a:r>
+              <a:t>Repaso de las cinco analogías. Sirve como cierre antes de los errores frecuentes o como pregunta oral: se dice el ejemplo y el grupo nombra la falla y el patrón.</a:t>
             </a:r>
           </a:p>
         </p:txBody>
@@ -9215,7 +9783,7 @@
 </p:sld>
 </file>
 
-<file path=ppt/slides/slide2.xml><?xml version="1.0" encoding="utf-8"?>
+<file path=ppt/slides/slide18.xml><?xml version="1.0" encoding="utf-8"?>
 <p:sld xmlns:a="http://schemas.openxmlformats.org/drawingml/2006/main" xmlns:p="http://schemas.openxmlformats.org/presentationml/2006/main" xmlns:r="http://schemas.openxmlformats.org/officeDocument/2006/relationships">
   <p:cSld>
     <p:spTree>
@@ -9234,14 +9802,19 @@
         <p:spPr>
           <a:xfrm>
             <a:off x="0" y="0"/>
-            <a:ext cx="7315200" cy="6858000"/>
+            <a:ext cx="292608" cy="6858000"/>
           </a:xfrm>
           <a:prstGeom prst="rect">
             <a:avLst/>
           </a:prstGeom>
-          <a:solidFill>
-            <a:srgbClr val="2B3A6E"/>
-          </a:solidFill>
+          <a:pattFill prst="ltUpDiag">
+            <a:fgClr>
+              <a:srgbClr val="C2CAD6"/>
+            </a:fgClr>
+            <a:bgClr>
+              <a:srgbClr val="FFFFFF"/>
+            </a:bgClr>
+          </a:pattFill>
           <a:ln>
             <a:noFill/>
           </a:ln>
@@ -9277,8 +9850,8 @@
         </p:nvSpPr>
         <p:spPr>
           <a:xfrm>
-            <a:off x="822960" y="2743200"/>
-            <a:ext cx="5852160" cy="1280160"/>
+            <a:off x="822960" y="420624"/>
+            <a:ext cx="10424160" cy="822960"/>
           </a:xfrm>
           <a:prstGeom prst="rect">
             <a:avLst/>
@@ -9286,7 +9859,7 @@
           <a:noFill/>
         </p:spPr>
         <p:txBody>
-          <a:bodyPr wrap="square" anchor="ctr" lIns="0" rIns="0" tIns="0" bIns="0">
+          <a:bodyPr wrap="square" anchor="t" lIns="0" rIns="0" tIns="0" bIns="0">
             <a:spAutoFit/>
           </a:bodyPr>
           <a:lstStyle/>
@@ -9303,36 +9876,860 @@
               </a:spcAft>
             </a:pPr>
             <a:r>
-              <a:rPr sz="3200" b="0" i="0">
-                <a:solidFill>
-                  <a:srgbClr val="FFFFFF"/>
-                </a:solidFill>
-                <a:latin typeface="Calibri"/>
-                <a:cs typeface="Calibri"/>
-              </a:rPr>
-              <a:t>Conceptos</a:t>
-            </a:r>
-          </a:p>
-        </p:txBody>
-      </p:sp>
-      <p:sp>
-        <p:nvSpPr>
-          <p:cNvPr id="4" name="TextBox 3"/>
-          <p:cNvSpPr txBox="1"/>
-          <p:nvPr/>
-        </p:nvSpPr>
-        <p:spPr>
-          <a:xfrm>
-            <a:off x="7955279" y="2971800"/>
-            <a:ext cx="3657600" cy="822960"/>
+              <a:rPr sz="2900" b="0" i="0">
+                <a:solidFill>
+                  <a:srgbClr val="2B3A6E"/>
+                </a:solidFill>
+                <a:latin typeface="Calibri"/>
+                <a:cs typeface="Calibri"/>
+              </a:rPr>
+              <a:t>Amenaza, vulnerabilidad y patrón: ejemplo cotidiano</a:t>
+            </a:r>
+          </a:p>
+        </p:txBody>
+      </p:sp>
+      <p:sp>
+        <p:nvSpPr>
+          <p:cNvPr id="4" name="Rectangle 3"/>
+          <p:cNvSpPr/>
+          <p:nvPr/>
+        </p:nvSpPr>
+        <p:spPr>
+          <a:xfrm>
+            <a:off x="822960" y="6327648"/>
+            <a:ext cx="10561320" cy="30480"/>
           </a:xfrm>
           <a:prstGeom prst="rect">
             <a:avLst/>
           </a:prstGeom>
+          <a:solidFill>
+            <a:srgbClr val="2B3A6E"/>
+          </a:solidFill>
+          <a:ln>
+            <a:noFill/>
+          </a:ln>
+          <a:effectLst/>
+        </p:spPr>
+        <p:style>
+          <a:lnRef idx="1">
+            <a:schemeClr val="accent1"/>
+          </a:lnRef>
+          <a:fillRef idx="3">
+            <a:schemeClr val="accent1"/>
+          </a:fillRef>
+          <a:effectRef idx="2">
+            <a:schemeClr val="accent1"/>
+          </a:effectRef>
+          <a:fontRef idx="minor">
+            <a:schemeClr val="lt1"/>
+          </a:fontRef>
+        </p:style>
+        <p:txBody>
+          <a:bodyPr rtlCol="0" anchor="ctr"/>
+          <a:lstStyle/>
+          <a:p>
+            <a:pPr algn="ctr"/>
+          </a:p>
+        </p:txBody>
+      </p:sp>
+      <p:sp>
+        <p:nvSpPr>
+          <p:cNvPr id="5" name="TextBox 4"/>
+          <p:cNvSpPr txBox="1"/>
+          <p:nvPr/>
+        </p:nvSpPr>
+        <p:spPr>
+          <a:xfrm>
+            <a:off x="8351215" y="6400800"/>
+            <a:ext cx="3657600" cy="274320"/>
+          </a:xfrm>
+          <a:prstGeom prst="rect">
+            <a:avLst/>
+          </a:prstGeom>
           <a:noFill/>
         </p:spPr>
         <p:txBody>
-          <a:bodyPr wrap="square" anchor="ctr" lIns="0" rIns="0" tIns="0" bIns="0">
+          <a:bodyPr wrap="square" anchor="t" lIns="0" rIns="0" tIns="0" bIns="0">
+            <a:spAutoFit/>
+          </a:bodyPr>
+          <a:lstStyle/>
+          <a:p>
+            <a:pPr algn="r">
+              <a:lnSpc>
+                <a:spcPct val="100000"/>
+              </a:lnSpc>
+              <a:spcBef>
+                <a:spcPts val="0"/>
+              </a:spcBef>
+              <a:spcAft>
+                <a:spcPts val="600"/>
+              </a:spcAft>
+            </a:pPr>
+            <a:r>
+              <a:rPr sz="950" b="1" i="0">
+                <a:solidFill>
+                  <a:srgbClr val="5B667A"/>
+                </a:solidFill>
+                <a:latin typeface="Calibri"/>
+                <a:cs typeface="Calibri"/>
+              </a:rPr>
+              <a:t>CIBERSEGURIDAD</a:t>
+            </a:r>
+            <a:r>
+              <a:rPr sz="950" b="0" i="0">
+                <a:solidFill>
+                  <a:srgbClr val="5B667A"/>
+                </a:solidFill>
+                <a:latin typeface="Calibri"/>
+                <a:cs typeface="Calibri"/>
+              </a:rPr>
+              <a:t>  ·  3.º Bachillerato Tecnológico</a:t>
+            </a:r>
+          </a:p>
+        </p:txBody>
+      </p:sp>
+      <p:sp>
+        <p:nvSpPr>
+          <p:cNvPr id="21" name="Texto 21"/>
+          <p:cNvSpPr txBox="1"/>
+          <p:nvPr/>
+        </p:nvSpPr>
+        <p:spPr>
+          <a:xfrm>
+            <a:off x="868680" y="1371600"/>
+            <a:ext cx="10424160" cy="685800"/>
+          </a:xfrm>
+          <a:prstGeom prst="rect">
+            <a:avLst/>
+          </a:prstGeom>
+          <a:noFill/>
+        </p:spPr>
+        <p:txBody>
+          <a:bodyPr wrap="square" anchor="t" lIns="0" rIns="0" tIns="0" bIns="0">
+            <a:noAutofit/>
+          </a:bodyPr>
+          <a:lstStyle/>
+          <a:p>
+            <a:pPr algn="l">
+              <a:lnSpc>
+                <a:spcPct val="114000"/>
+              </a:lnSpc>
+              <a:spcBef>
+                <a:spcPts val="0"/>
+              </a:spcBef>
+              <a:spcAft>
+                <a:spcPts val="600"/>
+              </a:spcAft>
+            </a:pPr>
+            <a:r>
+              <a:rPr lang="es-UY" sz="1700" b="1" i="0" dirty="0">
+                <a:solidFill>
+                  <a:srgbClr val="2B3A6E"/>
+                </a:solidFill>
+                <a:latin typeface="Calibri"/>
+                <a:cs typeface="Calibri"/>
+              </a:rPr>
+              <a:t xml:space="preserve">La situación. </a:t>
+            </a:r>
+            <a:r>
+              <a:rPr lang="es-UY" sz="1700" b="0" i="0" dirty="0">
+                <a:solidFill>
+                  <a:srgbClr val="222222"/>
+                </a:solidFill>
+                <a:latin typeface="Calibri"/>
+                <a:cs typeface="Calibri"/>
+              </a:rPr>
+              <a:t xml:space="preserve">Una casa en un barrio. El dueño quiere que nadie entre sin permiso.</a:t>
+            </a:r>
+          </a:p>
+        </p:txBody>
+      </p:sp>
+      <p:sp>
+        <p:nvSpPr>
+          <p:cNvPr id="22" name="Tarjeta 22"/>
+          <p:cNvSpPr/>
+          <p:nvPr/>
+        </p:nvSpPr>
+        <p:spPr>
+          <a:xfrm>
+            <a:off x="868680" y="2514600"/>
+            <a:ext cx="3218688" cy="2240280"/>
+          </a:xfrm>
+          <a:prstGeom prst="roundRect">
+            <a:avLst>
+              <a:gd name="adj" fmla="val 5000"/>
+            </a:avLst>
+          </a:prstGeom>
+          <a:solidFill>
+            <a:srgbClr val="F3F4F7"/>
+          </a:solidFill>
+          <a:ln w="9525">
+            <a:solidFill>
+              <a:srgbClr val="D7DDE7"/>
+            </a:solidFill>
+          </a:ln>
+          <a:effectLst/>
+        </p:spPr>
+        <p:style>
+          <a:lnRef idx="1">
+            <a:schemeClr val="accent1"/>
+          </a:lnRef>
+          <a:fillRef idx="3">
+            <a:schemeClr val="accent1"/>
+          </a:fillRef>
+          <a:effectRef idx="2">
+            <a:schemeClr val="accent1"/>
+          </a:effectRef>
+          <a:fontRef idx="minor">
+            <a:schemeClr val="lt1"/>
+          </a:fontRef>
+        </p:style>
+        <p:txBody>
+          <a:bodyPr rtlCol="0" anchor="t" wrap="square" lIns="164592" rIns="146304" tIns="164592" bIns="91440">
+            <a:noAutofit/>
+          </a:bodyPr>
+          <a:lstStyle/>
+          <a:p>
+            <a:pPr algn="l">
+              <a:lnSpc>
+                <a:spcPct val="110000"/>
+              </a:lnSpc>
+              <a:spcBef>
+                <a:spcPts val="0"/>
+              </a:spcBef>
+              <a:spcAft>
+                <a:spcPts val="600"/>
+              </a:spcAft>
+            </a:pPr>
+            <a:r>
+              <a:rPr lang="es-UY" sz="1500" b="0" i="0" dirty="0">
+                <a:solidFill>
+                  <a:srgbClr val="222222"/>
+                </a:solidFill>
+                <a:latin typeface="Calibri"/>
+                <a:cs typeface="Calibri"/>
+              </a:rPr>
+              <a:t xml:space="preserve">Un ladrón que recorre el barrio buscando una casa fácil de abrir.</a:t>
+            </a:r>
+          </a:p>
+          <a:p>
+            <a:pPr algn="l">
+              <a:lnSpc>
+                <a:spcPct val="110000"/>
+              </a:lnSpc>
+              <a:spcBef>
+                <a:spcPts val="0"/>
+              </a:spcBef>
+              <a:spcAft>
+                <a:spcPts val="600"/>
+              </a:spcAft>
+            </a:pPr>
+            <a:r>
+              <a:rPr lang="es-UY" sz="1500" b="0" i="0" dirty="0">
+                <a:solidFill>
+                  <a:srgbClr val="222222"/>
+                </a:solidFill>
+                <a:latin typeface="Calibri"/>
+                <a:cs typeface="Calibri"/>
+              </a:rPr>
+              <a:t xml:space="preserve">El dueño no puede decidir si el ladrón existe o no.</a:t>
+            </a:r>
+          </a:p>
+        </p:txBody>
+      </p:sp>
+      <p:sp>
+        <p:nvSpPr>
+          <p:cNvPr id="23" name="Etiqueta 23"/>
+          <p:cNvSpPr/>
+          <p:nvPr/>
+        </p:nvSpPr>
+        <p:spPr>
+          <a:xfrm>
+            <a:off x="2350008" y="2240280"/>
+            <a:ext cx="1737360" cy="256032"/>
+          </a:xfrm>
+          <a:prstGeom prst="roundRect">
+            <a:avLst>
+              <a:gd name="adj" fmla="val 50000"/>
+            </a:avLst>
+          </a:prstGeom>
+          <a:solidFill>
+            <a:srgbClr val="2B3A6E"/>
+          </a:solidFill>
+          <a:ln>
+            <a:noFill/>
+          </a:ln>
+          <a:effectLst/>
+        </p:spPr>
+        <p:style>
+          <a:lnRef idx="1">
+            <a:schemeClr val="accent1"/>
+          </a:lnRef>
+          <a:fillRef idx="3">
+            <a:schemeClr val="accent1"/>
+          </a:fillRef>
+          <a:effectRef idx="2">
+            <a:schemeClr val="accent1"/>
+          </a:effectRef>
+          <a:fontRef idx="minor">
+            <a:schemeClr val="lt1"/>
+          </a:fontRef>
+        </p:style>
+        <p:txBody>
+          <a:bodyPr rtlCol="0" anchor="ctr" tIns="0" bIns="0"/>
+          <a:lstStyle/>
+          <a:p>
+            <a:pPr algn="ctr"/>
+            <a:r>
+              <a:rPr lang="es-UY" sz="1000" b="1" i="0" dirty="0">
+                <a:solidFill>
+                  <a:srgbClr val="FFFFFF"/>
+                </a:solidFill>
+                <a:latin typeface="Calibri"/>
+                <a:cs typeface="Calibri"/>
+              </a:rPr>
+              <a:t xml:space="preserve">AMENAZA</a:t>
+            </a:r>
+          </a:p>
+        </p:txBody>
+      </p:sp>
+      <p:sp>
+        <p:nvSpPr>
+          <p:cNvPr id="24" name="Flecha 24"/>
+          <p:cNvSpPr/>
+          <p:nvPr/>
+        </p:nvSpPr>
+        <p:spPr>
+          <a:xfrm>
+            <a:off x="4206240" y="3497580"/>
+            <a:ext cx="146304" cy="274320"/>
+          </a:xfrm>
+          <a:prstGeom prst="chevron">
+            <a:avLst/>
+          </a:prstGeom>
+          <a:solidFill>
+            <a:srgbClr val="C2CAD6"/>
+          </a:solidFill>
+          <a:ln>
+            <a:noFill/>
+          </a:ln>
+          <a:effectLst/>
+        </p:spPr>
+        <p:style>
+          <a:lnRef idx="1">
+            <a:schemeClr val="accent1"/>
+          </a:lnRef>
+          <a:fillRef idx="3">
+            <a:schemeClr val="accent1"/>
+          </a:fillRef>
+          <a:effectRef idx="2">
+            <a:schemeClr val="accent1"/>
+          </a:effectRef>
+          <a:fontRef idx="minor">
+            <a:schemeClr val="lt1"/>
+          </a:fontRef>
+        </p:style>
+      </p:sp>
+      <p:sp>
+        <p:nvSpPr>
+          <p:cNvPr id="25" name="Tarjeta 25"/>
+          <p:cNvSpPr/>
+          <p:nvPr/>
+        </p:nvSpPr>
+        <p:spPr>
+          <a:xfrm>
+            <a:off x="4471416" y="2514600"/>
+            <a:ext cx="3218688" cy="2240280"/>
+          </a:xfrm>
+          <a:prstGeom prst="roundRect">
+            <a:avLst>
+              <a:gd name="adj" fmla="val 5000"/>
+            </a:avLst>
+          </a:prstGeom>
+          <a:solidFill>
+            <a:srgbClr val="F3F4F7"/>
+          </a:solidFill>
+          <a:ln w="9525">
+            <a:solidFill>
+              <a:srgbClr val="D7DDE7"/>
+            </a:solidFill>
+          </a:ln>
+          <a:effectLst/>
+        </p:spPr>
+        <p:style>
+          <a:lnRef idx="1">
+            <a:schemeClr val="accent1"/>
+          </a:lnRef>
+          <a:fillRef idx="3">
+            <a:schemeClr val="accent1"/>
+          </a:fillRef>
+          <a:effectRef idx="2">
+            <a:schemeClr val="accent1"/>
+          </a:effectRef>
+          <a:fontRef idx="minor">
+            <a:schemeClr val="lt1"/>
+          </a:fontRef>
+        </p:style>
+        <p:txBody>
+          <a:bodyPr rtlCol="0" anchor="t" wrap="square" lIns="164592" rIns="146304" tIns="164592" bIns="91440">
+            <a:noAutofit/>
+          </a:bodyPr>
+          <a:lstStyle/>
+          <a:p>
+            <a:pPr algn="l">
+              <a:lnSpc>
+                <a:spcPct val="110000"/>
+              </a:lnSpc>
+              <a:spcBef>
+                <a:spcPts val="0"/>
+              </a:spcBef>
+              <a:spcAft>
+                <a:spcPts val="600"/>
+              </a:spcAft>
+            </a:pPr>
+            <a:r>
+              <a:rPr lang="es-UY" sz="1500" b="0" i="0" dirty="0">
+                <a:solidFill>
+                  <a:srgbClr val="222222"/>
+                </a:solidFill>
+                <a:latin typeface="Calibri"/>
+                <a:cs typeface="Calibri"/>
+              </a:rPr>
+              <a:t xml:space="preserve">Una ventana del fondo que no cierra bien.</a:t>
+            </a:r>
+          </a:p>
+          <a:p>
+            <a:pPr algn="l">
+              <a:lnSpc>
+                <a:spcPct val="110000"/>
+              </a:lnSpc>
+              <a:spcBef>
+                <a:spcPts val="0"/>
+              </a:spcBef>
+              <a:spcAft>
+                <a:spcPts val="600"/>
+              </a:spcAft>
+            </a:pPr>
+            <a:r>
+              <a:rPr lang="es-UY" sz="1500" b="0" i="0" dirty="0">
+                <a:solidFill>
+                  <a:srgbClr val="222222"/>
+                </a:solidFill>
+                <a:latin typeface="Calibri"/>
+                <a:cs typeface="Calibri"/>
+              </a:rPr>
+              <a:t xml:space="preserve">Es la debilidad concreta por la que se puede entrar.</a:t>
+            </a:r>
+          </a:p>
+        </p:txBody>
+      </p:sp>
+      <p:sp>
+        <p:nvSpPr>
+          <p:cNvPr id="26" name="Etiqueta 26"/>
+          <p:cNvSpPr/>
+          <p:nvPr/>
+        </p:nvSpPr>
+        <p:spPr>
+          <a:xfrm>
+            <a:off x="5952744" y="2240280"/>
+            <a:ext cx="1737360" cy="256032"/>
+          </a:xfrm>
+          <a:prstGeom prst="roundRect">
+            <a:avLst>
+              <a:gd name="adj" fmla="val 50000"/>
+            </a:avLst>
+          </a:prstGeom>
+          <a:solidFill>
+            <a:srgbClr val="B0362F"/>
+          </a:solidFill>
+          <a:ln>
+            <a:noFill/>
+          </a:ln>
+          <a:effectLst/>
+        </p:spPr>
+        <p:style>
+          <a:lnRef idx="1">
+            <a:schemeClr val="accent1"/>
+          </a:lnRef>
+          <a:fillRef idx="3">
+            <a:schemeClr val="accent1"/>
+          </a:fillRef>
+          <a:effectRef idx="2">
+            <a:schemeClr val="accent1"/>
+          </a:effectRef>
+          <a:fontRef idx="minor">
+            <a:schemeClr val="lt1"/>
+          </a:fontRef>
+        </p:style>
+        <p:txBody>
+          <a:bodyPr rtlCol="0" anchor="ctr" tIns="0" bIns="0"/>
+          <a:lstStyle/>
+          <a:p>
+            <a:pPr algn="ctr"/>
+            <a:r>
+              <a:rPr lang="es-UY" sz="1000" b="1" i="0" dirty="0">
+                <a:solidFill>
+                  <a:srgbClr val="FFFFFF"/>
+                </a:solidFill>
+                <a:latin typeface="Calibri"/>
+                <a:cs typeface="Calibri"/>
+              </a:rPr>
+              <a:t xml:space="preserve">VULNERABILIDAD</a:t>
+            </a:r>
+          </a:p>
+        </p:txBody>
+      </p:sp>
+      <p:sp>
+        <p:nvSpPr>
+          <p:cNvPr id="27" name="Flecha 27"/>
+          <p:cNvSpPr/>
+          <p:nvPr/>
+        </p:nvSpPr>
+        <p:spPr>
+          <a:xfrm>
+            <a:off x="7808976" y="3497580"/>
+            <a:ext cx="146304" cy="274320"/>
+          </a:xfrm>
+          <a:prstGeom prst="chevron">
+            <a:avLst/>
+          </a:prstGeom>
+          <a:solidFill>
+            <a:srgbClr val="C2CAD6"/>
+          </a:solidFill>
+          <a:ln>
+            <a:noFill/>
+          </a:ln>
+          <a:effectLst/>
+        </p:spPr>
+        <p:style>
+          <a:lnRef idx="1">
+            <a:schemeClr val="accent1"/>
+          </a:lnRef>
+          <a:fillRef idx="3">
+            <a:schemeClr val="accent1"/>
+          </a:fillRef>
+          <a:effectRef idx="2">
+            <a:schemeClr val="accent1"/>
+          </a:effectRef>
+          <a:fontRef idx="minor">
+            <a:schemeClr val="lt1"/>
+          </a:fontRef>
+        </p:style>
+      </p:sp>
+      <p:sp>
+        <p:nvSpPr>
+          <p:cNvPr id="28" name="Tarjeta 28"/>
+          <p:cNvSpPr/>
+          <p:nvPr/>
+        </p:nvSpPr>
+        <p:spPr>
+          <a:xfrm>
+            <a:off x="8074152" y="2514600"/>
+            <a:ext cx="3218688" cy="2240280"/>
+          </a:xfrm>
+          <a:prstGeom prst="roundRect">
+            <a:avLst>
+              <a:gd name="adj" fmla="val 5000"/>
+            </a:avLst>
+          </a:prstGeom>
+          <a:solidFill>
+            <a:srgbClr val="F3F4F7"/>
+          </a:solidFill>
+          <a:ln w="9525">
+            <a:solidFill>
+              <a:srgbClr val="D7DDE7"/>
+            </a:solidFill>
+          </a:ln>
+          <a:effectLst/>
+        </p:spPr>
+        <p:style>
+          <a:lnRef idx="1">
+            <a:schemeClr val="accent1"/>
+          </a:lnRef>
+          <a:fillRef idx="3">
+            <a:schemeClr val="accent1"/>
+          </a:fillRef>
+          <a:effectRef idx="2">
+            <a:schemeClr val="accent1"/>
+          </a:effectRef>
+          <a:fontRef idx="minor">
+            <a:schemeClr val="lt1"/>
+          </a:fontRef>
+        </p:style>
+        <p:txBody>
+          <a:bodyPr rtlCol="0" anchor="t" wrap="square" lIns="164592" rIns="146304" tIns="164592" bIns="91440">
+            <a:noAutofit/>
+          </a:bodyPr>
+          <a:lstStyle/>
+          <a:p>
+            <a:pPr algn="l">
+              <a:lnSpc>
+                <a:spcPct val="110000"/>
+              </a:lnSpc>
+              <a:spcBef>
+                <a:spcPts val="0"/>
+              </a:spcBef>
+              <a:spcAft>
+                <a:spcPts val="600"/>
+              </a:spcAft>
+            </a:pPr>
+            <a:r>
+              <a:rPr lang="es-UY" sz="1500" b="0" i="0" dirty="0">
+                <a:solidFill>
+                  <a:srgbClr val="222222"/>
+                </a:solidFill>
+                <a:latin typeface="Calibri"/>
+                <a:cs typeface="Calibri"/>
+              </a:rPr>
+              <a:t xml:space="preserve">Colocar una traba en esa ventana.</a:t>
+            </a:r>
+          </a:p>
+          <a:p>
+            <a:pPr algn="l">
+              <a:lnSpc>
+                <a:spcPct val="110000"/>
+              </a:lnSpc>
+              <a:spcBef>
+                <a:spcPts val="0"/>
+              </a:spcBef>
+              <a:spcAft>
+                <a:spcPts val="600"/>
+              </a:spcAft>
+            </a:pPr>
+            <a:r>
+              <a:rPr lang="es-UY" sz="1500" b="0" i="0" dirty="0">
+                <a:solidFill>
+                  <a:srgbClr val="222222"/>
+                </a:solidFill>
+                <a:latin typeface="Calibri"/>
+                <a:cs typeface="Calibri"/>
+              </a:rPr>
+              <a:t xml:space="preserve">Es una solución conocida, que ya funcionó en miles de casas iguales.</a:t>
+            </a:r>
+          </a:p>
+        </p:txBody>
+      </p:sp>
+      <p:sp>
+        <p:nvSpPr>
+          <p:cNvPr id="29" name="Etiqueta 29"/>
+          <p:cNvSpPr/>
+          <p:nvPr/>
+        </p:nvSpPr>
+        <p:spPr>
+          <a:xfrm>
+            <a:off x="9555480" y="2240280"/>
+            <a:ext cx="1737360" cy="256032"/>
+          </a:xfrm>
+          <a:prstGeom prst="roundRect">
+            <a:avLst>
+              <a:gd name="adj" fmla="val 50000"/>
+            </a:avLst>
+          </a:prstGeom>
+          <a:solidFill>
+            <a:srgbClr val="1E6B3E"/>
+          </a:solidFill>
+          <a:ln>
+            <a:noFill/>
+          </a:ln>
+          <a:effectLst/>
+        </p:spPr>
+        <p:style>
+          <a:lnRef idx="1">
+            <a:schemeClr val="accent1"/>
+          </a:lnRef>
+          <a:fillRef idx="3">
+            <a:schemeClr val="accent1"/>
+          </a:fillRef>
+          <a:effectRef idx="2">
+            <a:schemeClr val="accent1"/>
+          </a:effectRef>
+          <a:fontRef idx="minor">
+            <a:schemeClr val="lt1"/>
+          </a:fontRef>
+        </p:style>
+        <p:txBody>
+          <a:bodyPr rtlCol="0" anchor="ctr" tIns="0" bIns="0"/>
+          <a:lstStyle/>
+          <a:p>
+            <a:pPr algn="ctr"/>
+            <a:r>
+              <a:rPr lang="es-UY" sz="1000" b="1" i="0" dirty="0">
+                <a:solidFill>
+                  <a:srgbClr val="FFFFFF"/>
+                </a:solidFill>
+                <a:latin typeface="Calibri"/>
+                <a:cs typeface="Calibri"/>
+              </a:rPr>
+              <a:t xml:space="preserve">PATRÓN</a:t>
+            </a:r>
+          </a:p>
+        </p:txBody>
+      </p:sp>
+      <p:sp>
+        <p:nvSpPr>
+          <p:cNvPr id="30" name="Tarjeta 30"/>
+          <p:cNvSpPr/>
+          <p:nvPr/>
+        </p:nvSpPr>
+        <p:spPr>
+          <a:xfrm>
+            <a:off x="868680" y="5074920"/>
+            <a:ext cx="10424160" cy="566928"/>
+          </a:xfrm>
+          <a:prstGeom prst="roundRect">
+            <a:avLst>
+              <a:gd name="adj" fmla="val 5000"/>
+            </a:avLst>
+          </a:prstGeom>
+          <a:solidFill>
+            <a:srgbClr val="FFFFFF"/>
+          </a:solidFill>
+          <a:ln w="9525">
+            <a:solidFill>
+              <a:srgbClr val="C2CAD6"/>
+            </a:solidFill>
+          </a:ln>
+          <a:effectLst/>
+        </p:spPr>
+        <p:style>
+          <a:lnRef idx="1">
+            <a:schemeClr val="accent1"/>
+          </a:lnRef>
+          <a:fillRef idx="3">
+            <a:schemeClr val="accent1"/>
+          </a:fillRef>
+          <a:effectRef idx="2">
+            <a:schemeClr val="accent1"/>
+          </a:effectRef>
+          <a:fontRef idx="minor">
+            <a:schemeClr val="lt1"/>
+          </a:fontRef>
+        </p:style>
+        <p:txBody>
+          <a:bodyPr rtlCol="0" anchor="ctr" wrap="square" lIns="164592" rIns="146304" tIns="164592" bIns="91440">
+            <a:noAutofit/>
+          </a:bodyPr>
+          <a:lstStyle/>
+          <a:p>
+            <a:pPr algn="l">
+              <a:lnSpc>
+                <a:spcPct val="105000"/>
+              </a:lnSpc>
+              <a:spcBef>
+                <a:spcPts val="0"/>
+              </a:spcBef>
+              <a:spcAft>
+                <a:spcPts val="0"/>
+              </a:spcAft>
+            </a:pPr>
+            <a:r>
+              <a:rPr lang="es-UY" sz="1500" b="1" i="0" dirty="0">
+                <a:solidFill>
+                  <a:srgbClr val="2B3A6E"/>
+                </a:solidFill>
+                <a:latin typeface="Calibri"/>
+                <a:cs typeface="Calibri"/>
+              </a:rPr>
+              <a:t xml:space="preserve">En la aplicación. </a:t>
+            </a:r>
+            <a:r>
+              <a:rPr lang="es-UY" sz="1500" b="0" i="0" dirty="0">
+                <a:solidFill>
+                  <a:srgbClr val="222222"/>
+                </a:solidFill>
+                <a:latin typeface="Calibri"/>
+                <a:cs typeface="Calibri"/>
+              </a:rPr>
+              <a:t xml:space="preserve">el ladrón es el atacante, la ventana es la línea de código mal escrita y la traba es el patrón.</a:t>
+            </a:r>
+          </a:p>
+        </p:txBody>
+      </p:sp>
+    </p:spTree>
+  </p:cSld>
+  <p:clrMapOvr>
+    <a:masterClrMapping/>
+  </p:clrMapOvr>
+</p:sld>
+</file>
+
+<file path=ppt/slides/slide19.xml><?xml version="1.0" encoding="utf-8"?>
+<p:sld xmlns:a="http://schemas.openxmlformats.org/drawingml/2006/main" xmlns:p="http://schemas.openxmlformats.org/presentationml/2006/main" xmlns:r="http://schemas.openxmlformats.org/officeDocument/2006/relationships">
+  <p:cSld>
+    <p:spTree>
+      <p:nvGrpSpPr>
+        <p:cNvPr id="1" name=""/>
+        <p:cNvGrpSpPr/>
+        <p:nvPr/>
+      </p:nvGrpSpPr>
+      <p:grpSpPr/>
+      <p:sp>
+        <p:nvSpPr>
+          <p:cNvPr id="2" name="Rectangle 1"/>
+          <p:cNvSpPr/>
+          <p:nvPr/>
+        </p:nvSpPr>
+        <p:spPr>
+          <a:xfrm>
+            <a:off x="0" y="0"/>
+            <a:ext cx="292608" cy="6858000"/>
+          </a:xfrm>
+          <a:prstGeom prst="rect">
+            <a:avLst/>
+          </a:prstGeom>
+          <a:pattFill prst="ltUpDiag">
+            <a:fgClr>
+              <a:srgbClr val="C2CAD6"/>
+            </a:fgClr>
+            <a:bgClr>
+              <a:srgbClr val="FFFFFF"/>
+            </a:bgClr>
+          </a:pattFill>
+          <a:ln>
+            <a:noFill/>
+          </a:ln>
+          <a:effectLst/>
+        </p:spPr>
+        <p:style>
+          <a:lnRef idx="1">
+            <a:schemeClr val="accent1"/>
+          </a:lnRef>
+          <a:fillRef idx="3">
+            <a:schemeClr val="accent1"/>
+          </a:fillRef>
+          <a:effectRef idx="2">
+            <a:schemeClr val="accent1"/>
+          </a:effectRef>
+          <a:fontRef idx="minor">
+            <a:schemeClr val="lt1"/>
+          </a:fontRef>
+        </p:style>
+        <p:txBody>
+          <a:bodyPr rtlCol="0" anchor="ctr"/>
+          <a:lstStyle/>
+          <a:p>
+            <a:pPr algn="ctr"/>
+          </a:p>
+        </p:txBody>
+      </p:sp>
+      <p:sp>
+        <p:nvSpPr>
+          <p:cNvPr id="3" name="TextBox 2"/>
+          <p:cNvSpPr txBox="1"/>
+          <p:nvPr/>
+        </p:nvSpPr>
+        <p:spPr>
+          <a:xfrm>
+            <a:off x="822960" y="420624"/>
+            <a:ext cx="10424160" cy="822960"/>
+          </a:xfrm>
+          <a:prstGeom prst="rect">
+            <a:avLst/>
+          </a:prstGeom>
+          <a:noFill/>
+        </p:spPr>
+        <p:txBody>
+          <a:bodyPr wrap="square" anchor="t" lIns="0" rIns="0" tIns="0" bIns="0">
             <a:spAutoFit/>
           </a:bodyPr>
           <a:lstStyle/>
@@ -9349,6 +10746,759 @@
               </a:spcAft>
             </a:pPr>
             <a:r>
+              <a:rPr sz="2900" b="0" i="0">
+                <a:solidFill>
+                  <a:srgbClr val="2B3A6E"/>
+                </a:solidFill>
+                <a:latin typeface="Calibri"/>
+                <a:cs typeface="Calibri"/>
+              </a:rPr>
+              <a:t>Superficie de ataque: ejemplo cotidiano</a:t>
+            </a:r>
+          </a:p>
+        </p:txBody>
+      </p:sp>
+      <p:sp>
+        <p:nvSpPr>
+          <p:cNvPr id="4" name="Rectangle 3"/>
+          <p:cNvSpPr/>
+          <p:nvPr/>
+        </p:nvSpPr>
+        <p:spPr>
+          <a:xfrm>
+            <a:off x="822960" y="6327648"/>
+            <a:ext cx="10561320" cy="30480"/>
+          </a:xfrm>
+          <a:prstGeom prst="rect">
+            <a:avLst/>
+          </a:prstGeom>
+          <a:solidFill>
+            <a:srgbClr val="2B3A6E"/>
+          </a:solidFill>
+          <a:ln>
+            <a:noFill/>
+          </a:ln>
+          <a:effectLst/>
+        </p:spPr>
+        <p:style>
+          <a:lnRef idx="1">
+            <a:schemeClr val="accent1"/>
+          </a:lnRef>
+          <a:fillRef idx="3">
+            <a:schemeClr val="accent1"/>
+          </a:fillRef>
+          <a:effectRef idx="2">
+            <a:schemeClr val="accent1"/>
+          </a:effectRef>
+          <a:fontRef idx="minor">
+            <a:schemeClr val="lt1"/>
+          </a:fontRef>
+        </p:style>
+        <p:txBody>
+          <a:bodyPr rtlCol="0" anchor="ctr"/>
+          <a:lstStyle/>
+          <a:p>
+            <a:pPr algn="ctr"/>
+          </a:p>
+        </p:txBody>
+      </p:sp>
+      <p:sp>
+        <p:nvSpPr>
+          <p:cNvPr id="5" name="TextBox 4"/>
+          <p:cNvSpPr txBox="1"/>
+          <p:nvPr/>
+        </p:nvSpPr>
+        <p:spPr>
+          <a:xfrm>
+            <a:off x="8351215" y="6400800"/>
+            <a:ext cx="3657600" cy="274320"/>
+          </a:xfrm>
+          <a:prstGeom prst="rect">
+            <a:avLst/>
+          </a:prstGeom>
+          <a:noFill/>
+        </p:spPr>
+        <p:txBody>
+          <a:bodyPr wrap="square" anchor="t" lIns="0" rIns="0" tIns="0" bIns="0">
+            <a:spAutoFit/>
+          </a:bodyPr>
+          <a:lstStyle/>
+          <a:p>
+            <a:pPr algn="r">
+              <a:lnSpc>
+                <a:spcPct val="100000"/>
+              </a:lnSpc>
+              <a:spcBef>
+                <a:spcPts val="0"/>
+              </a:spcBef>
+              <a:spcAft>
+                <a:spcPts val="600"/>
+              </a:spcAft>
+            </a:pPr>
+            <a:r>
+              <a:rPr sz="950" b="1" i="0">
+                <a:solidFill>
+                  <a:srgbClr val="5B667A"/>
+                </a:solidFill>
+                <a:latin typeface="Calibri"/>
+                <a:cs typeface="Calibri"/>
+              </a:rPr>
+              <a:t>CIBERSEGURIDAD</a:t>
+            </a:r>
+            <a:r>
+              <a:rPr sz="950" b="0" i="0">
+                <a:solidFill>
+                  <a:srgbClr val="5B667A"/>
+                </a:solidFill>
+                <a:latin typeface="Calibri"/>
+                <a:cs typeface="Calibri"/>
+              </a:rPr>
+              <a:t>  ·  3.º Bachillerato Tecnológico</a:t>
+            </a:r>
+          </a:p>
+        </p:txBody>
+      </p:sp>
+      <p:sp>
+        <p:nvSpPr>
+          <p:cNvPr id="21" name="Texto 21"/>
+          <p:cNvSpPr txBox="1"/>
+          <p:nvPr/>
+        </p:nvSpPr>
+        <p:spPr>
+          <a:xfrm>
+            <a:off x="868680" y="1371600"/>
+            <a:ext cx="10424160" cy="685800"/>
+          </a:xfrm>
+          <a:prstGeom prst="rect">
+            <a:avLst/>
+          </a:prstGeom>
+          <a:noFill/>
+        </p:spPr>
+        <p:txBody>
+          <a:bodyPr wrap="square" anchor="t" lIns="0" rIns="0" tIns="0" bIns="0">
+            <a:noAutofit/>
+          </a:bodyPr>
+          <a:lstStyle/>
+          <a:p>
+            <a:pPr algn="l">
+              <a:lnSpc>
+                <a:spcPct val="114000"/>
+              </a:lnSpc>
+              <a:spcBef>
+                <a:spcPts val="0"/>
+              </a:spcBef>
+              <a:spcAft>
+                <a:spcPts val="600"/>
+              </a:spcAft>
+            </a:pPr>
+            <a:r>
+              <a:rPr lang="es-UY" sz="1700" b="1" i="0" dirty="0">
+                <a:solidFill>
+                  <a:srgbClr val="2B3A6E"/>
+                </a:solidFill>
+                <a:latin typeface="Calibri"/>
+                <a:cs typeface="Calibri"/>
+              </a:rPr>
+              <a:t xml:space="preserve">La situación. </a:t>
+            </a:r>
+            <a:r>
+              <a:rPr lang="es-UY" sz="1700" b="0" i="0" dirty="0">
+                <a:solidFill>
+                  <a:srgbClr val="222222"/>
+                </a:solidFill>
+                <a:latin typeface="Calibri"/>
+                <a:cs typeface="Calibri"/>
+              </a:rPr>
+              <a:t xml:space="preserve">Un liceo tiene varias formas de entrar o de pedir cosas. Cada una es un lugar por donde alguien podría colarse, y cada una necesita su propio control.</a:t>
+            </a:r>
+          </a:p>
+        </p:txBody>
+      </p:sp>
+      <p:graphicFrame>
+        <p:nvGraphicFramePr>
+          <p:cNvPr id="22" name="Table 5"/>
+          <p:cNvGraphicFramePr>
+            <a:graphicFrameLocks noGrp="1"/>
+          </p:cNvGraphicFramePr>
+          <p:nvPr/>
+        </p:nvGraphicFramePr>
+        <p:xfrm>
+          <a:off x="868680" y="2331720"/>
+          <a:ext cx="10424160" cy="2679192"/>
+        </p:xfrm>
+        <a:graphic>
+          <a:graphicData uri="http://schemas.openxmlformats.org/drawingml/2006/table">
+            <a:tbl>
+              <a:tblPr firstRow="1">
+                <a:tableStyleId>{5C22544A-7EE6-4342-B048-85BDC9FD1C3A}</a:tableStyleId>
+              </a:tblPr>
+              <a:tblGrid>
+                <a:gridCol w="3291840"/>
+                <a:gridCol w="3429000"/>
+                <a:gridCol w="3703320"/>
+              </a:tblGrid>
+              <a:tr h="411480">
+                <a:tc>
+                  <a:txBody>
+                    <a:bodyPr/>
+                    <a:lstStyle/>
+                    <a:p>
+                      <a:pPr algn="l"/>
+                      <a:r>
+                        <a:rPr sz="1300" b="1">
+                          <a:solidFill>
+                            <a:srgbClr val="FFFFFF"/>
+                          </a:solidFill>
+                          <a:latin typeface="Calibri"/>
+                          <a:cs typeface="Calibri"/>
+                        </a:rPr>
+                        <a:t>En el liceo</a:t>
+                      </a:r>
+                    </a:p>
+                  </a:txBody>
+                  <a:tcPr marL="109728" marR="91440" marT="36576" marB="36576" anchor="ctr">
+                    <a:solidFill>
+                      <a:srgbClr val="2B3A6E"/>
+                    </a:solidFill>
+                  </a:tcPr>
+                </a:tc>
+                <a:tc>
+                  <a:txBody>
+                    <a:bodyPr/>
+                    <a:lstStyle/>
+                    <a:p>
+                      <a:pPr algn="l"/>
+                      <a:r>
+                        <a:rPr sz="1300" b="1">
+                          <a:solidFill>
+                            <a:srgbClr val="FFFFFF"/>
+                          </a:solidFill>
+                          <a:latin typeface="Calibri"/>
+                          <a:cs typeface="Calibri"/>
+                        </a:rPr>
+                        <a:t>En la aplicación</a:t>
+                      </a:r>
+                    </a:p>
+                  </a:txBody>
+                  <a:tcPr marL="109728" marR="91440" marT="36576" marB="36576" anchor="ctr">
+                    <a:solidFill>
+                      <a:srgbClr val="2B3A6E"/>
+                    </a:solidFill>
+                  </a:tcPr>
+                </a:tc>
+                <a:tc>
+                  <a:txBody>
+                    <a:bodyPr/>
+                    <a:lstStyle/>
+                    <a:p>
+                      <a:pPr algn="l"/>
+                      <a:r>
+                        <a:rPr sz="1300" b="1">
+                          <a:solidFill>
+                            <a:srgbClr val="FFFFFF"/>
+                          </a:solidFill>
+                          <a:latin typeface="Calibri"/>
+                          <a:cs typeface="Calibri"/>
+                        </a:rPr>
+                        <a:t>Qué podría pasar</a:t>
+                      </a:r>
+                    </a:p>
+                  </a:txBody>
+                  <a:tcPr marL="109728" marR="91440" marT="36576" marB="36576" anchor="ctr">
+                    <a:solidFill>
+                      <a:srgbClr val="2B3A6E"/>
+                    </a:solidFill>
+                  </a:tcPr>
+                </a:tc>
+              </a:tr>
+              <a:tr h="566928">
+                <a:tc>
+                  <a:txBody>
+                    <a:bodyPr/>
+                    <a:lstStyle/>
+                    <a:p>
+                      <a:pPr algn="l"/>
+                      <a:r>
+                        <a:rPr sz="1300" b="0">
+                          <a:solidFill>
+                            <a:srgbClr val="222222"/>
+                          </a:solidFill>
+                          <a:latin typeface="Calibri"/>
+                          <a:cs typeface="Calibri"/>
+                        </a:rPr>
+                        <a:t>Puerta principal con portero</a:t>
+                      </a:r>
+                    </a:p>
+                  </a:txBody>
+                  <a:tcPr marL="109728" marR="91440" marT="36576" marB="36576" anchor="ctr">
+                    <a:solidFill>
+                      <a:srgbClr val="FFFFFF"/>
+                    </a:solidFill>
+                  </a:tcPr>
+                </a:tc>
+                <a:tc>
+                  <a:txBody>
+                    <a:bodyPr/>
+                    <a:lstStyle/>
+                    <a:p>
+                      <a:pPr algn="l"/>
+                      <a:r>
+                        <a:rPr sz="1300" b="1">
+                          <a:solidFill>
+                            <a:srgbClr val="222222"/>
+                          </a:solidFill>
+                          <a:latin typeface="Calibri"/>
+                          <a:cs typeface="Calibri"/>
+                        </a:rPr>
+                        <a:t>Formulario de login</a:t>
+                      </a:r>
+                    </a:p>
+                  </a:txBody>
+                  <a:tcPr marL="109728" marR="91440" marT="36576" marB="36576" anchor="ctr">
+                    <a:solidFill>
+                      <a:srgbClr val="FFFFFF"/>
+                    </a:solidFill>
+                  </a:tcPr>
+                </a:tc>
+                <a:tc>
+                  <a:txBody>
+                    <a:bodyPr/>
+                    <a:lstStyle/>
+                    <a:p>
+                      <a:pPr algn="l"/>
+                      <a:r>
+                        <a:rPr sz="1300" b="0">
+                          <a:solidFill>
+                            <a:srgbClr val="222222"/>
+                          </a:solidFill>
+                          <a:latin typeface="Calibri"/>
+                          <a:cs typeface="Calibri"/>
+                        </a:rPr>
+                        <a:t>Alguien entra sin ser estudiante.</a:t>
+                      </a:r>
+                    </a:p>
+                  </a:txBody>
+                  <a:tcPr marL="109728" marR="91440" marT="36576" marB="36576" anchor="ctr">
+                    <a:solidFill>
+                      <a:srgbClr val="FFFFFF"/>
+                    </a:solidFill>
+                  </a:tcPr>
+                </a:tc>
+              </a:tr>
+              <a:tr h="566928">
+                <a:tc>
+                  <a:txBody>
+                    <a:bodyPr/>
+                    <a:lstStyle/>
+                    <a:p>
+                      <a:pPr algn="l"/>
+                      <a:r>
+                        <a:rPr sz="1300" b="0">
+                          <a:solidFill>
+                            <a:srgbClr val="222222"/>
+                          </a:solidFill>
+                          <a:latin typeface="Calibri"/>
+                          <a:cs typeface="Calibri"/>
+                        </a:rPr>
+                        <a:t>Bedelía con carpetas numeradas</a:t>
+                      </a:r>
+                    </a:p>
+                  </a:txBody>
+                  <a:tcPr marL="109728" marR="91440" marT="36576" marB="36576" anchor="ctr">
+                    <a:solidFill>
+                      <a:srgbClr val="EFF2F7"/>
+                    </a:solidFill>
+                  </a:tcPr>
+                </a:tc>
+                <a:tc>
+                  <a:txBody>
+                    <a:bodyPr/>
+                    <a:lstStyle/>
+                    <a:p>
+                      <a:pPr algn="l"/>
+                      <a:r>
+                        <a:rPr sz="1300" b="1">
+                          <a:solidFill>
+                            <a:srgbClr val="222222"/>
+                          </a:solidFill>
+                          <a:latin typeface="Calibri"/>
+                          <a:cs typeface="Calibri"/>
+                        </a:rPr>
+                        <a:t>Dirección con un número (boletin.php?id=3)</a:t>
+                      </a:r>
+                    </a:p>
+                  </a:txBody>
+                  <a:tcPr marL="109728" marR="91440" marT="36576" marB="36576" anchor="ctr">
+                    <a:solidFill>
+                      <a:srgbClr val="EFF2F7"/>
+                    </a:solidFill>
+                  </a:tcPr>
+                </a:tc>
+                <a:tc>
+                  <a:txBody>
+                    <a:bodyPr/>
+                    <a:lstStyle/>
+                    <a:p>
+                      <a:pPr algn="l"/>
+                      <a:r>
+                        <a:rPr sz="1300" b="0">
+                          <a:solidFill>
+                            <a:srgbClr val="222222"/>
+                          </a:solidFill>
+                          <a:latin typeface="Calibri"/>
+                          <a:cs typeface="Calibri"/>
+                        </a:rPr>
+                        <a:t>Alguien pide la carpeta de otra persona.</a:t>
+                      </a:r>
+                    </a:p>
+                  </a:txBody>
+                  <a:tcPr marL="109728" marR="91440" marT="36576" marB="36576" anchor="ctr">
+                    <a:solidFill>
+                      <a:srgbClr val="EFF2F7"/>
+                    </a:solidFill>
+                  </a:tcPr>
+                </a:tc>
+              </a:tr>
+              <a:tr h="566928">
+                <a:tc>
+                  <a:txBody>
+                    <a:bodyPr/>
+                    <a:lstStyle/>
+                    <a:p>
+                      <a:pPr algn="l"/>
+                      <a:r>
+                        <a:rPr sz="1300" b="0">
+                          <a:solidFill>
+                            <a:srgbClr val="222222"/>
+                          </a:solidFill>
+                          <a:latin typeface="Calibri"/>
+                          <a:cs typeface="Calibri"/>
+                        </a:rPr>
+                        <a:t>Buzón de mensajes que se leen en voz alta</a:t>
+                      </a:r>
+                    </a:p>
+                  </a:txBody>
+                  <a:tcPr marL="109728" marR="91440" marT="36576" marB="36576" anchor="ctr">
+                    <a:solidFill>
+                      <a:srgbClr val="FFFFFF"/>
+                    </a:solidFill>
+                  </a:tcPr>
+                </a:tc>
+                <a:tc>
+                  <a:txBody>
+                    <a:bodyPr/>
+                    <a:lstStyle/>
+                    <a:p>
+                      <a:pPr algn="l"/>
+                      <a:r>
+                        <a:rPr sz="1300" b="1">
+                          <a:solidFill>
+                            <a:srgbClr val="222222"/>
+                          </a:solidFill>
+                          <a:latin typeface="Calibri"/>
+                          <a:cs typeface="Calibri"/>
+                        </a:rPr>
+                        <a:t>Buscador o campo de comentarios</a:t>
+                      </a:r>
+                    </a:p>
+                  </a:txBody>
+                  <a:tcPr marL="109728" marR="91440" marT="36576" marB="36576" anchor="ctr">
+                    <a:solidFill>
+                      <a:srgbClr val="FFFFFF"/>
+                    </a:solidFill>
+                  </a:tcPr>
+                </a:tc>
+                <a:tc>
+                  <a:txBody>
+                    <a:bodyPr/>
+                    <a:lstStyle/>
+                    <a:p>
+                      <a:pPr algn="l"/>
+                      <a:r>
+                        <a:rPr sz="1300" b="0">
+                          <a:solidFill>
+                            <a:srgbClr val="222222"/>
+                          </a:solidFill>
+                          <a:latin typeface="Calibri"/>
+                          <a:cs typeface="Calibri"/>
+                        </a:rPr>
+                        <a:t>Alguien deja un mensaje que engaña a quien lo lee.</a:t>
+                      </a:r>
+                    </a:p>
+                  </a:txBody>
+                  <a:tcPr marL="109728" marR="91440" marT="36576" marB="36576" anchor="ctr">
+                    <a:solidFill>
+                      <a:srgbClr val="FFFFFF"/>
+                    </a:solidFill>
+                  </a:tcPr>
+                </a:tc>
+              </a:tr>
+              <a:tr h="566928">
+                <a:tc>
+                  <a:txBody>
+                    <a:bodyPr/>
+                    <a:lstStyle/>
+                    <a:p>
+                      <a:pPr algn="l"/>
+                      <a:r>
+                        <a:rPr sz="1300" b="0">
+                          <a:solidFill>
+                            <a:srgbClr val="222222"/>
+                          </a:solidFill>
+                          <a:latin typeface="Calibri"/>
+                          <a:cs typeface="Calibri"/>
+                        </a:rPr>
+                        <a:t>Fotocopiadora que copia a pedido</a:t>
+                      </a:r>
+                    </a:p>
+                  </a:txBody>
+                  <a:tcPr marL="109728" marR="91440" marT="36576" marB="36576" anchor="ctr">
+                    <a:solidFill>
+                      <a:srgbClr val="EFF2F7"/>
+                    </a:solidFill>
+                  </a:tcPr>
+                </a:tc>
+                <a:tc>
+                  <a:txBody>
+                    <a:bodyPr/>
+                    <a:lstStyle/>
+                    <a:p>
+                      <a:pPr algn="l"/>
+                      <a:r>
+                        <a:rPr sz="1300" b="1">
+                          <a:solidFill>
+                            <a:srgbClr val="222222"/>
+                          </a:solidFill>
+                          <a:latin typeface="Calibri"/>
+                          <a:cs typeface="Calibri"/>
+                        </a:rPr>
+                        <a:t>Descarga de archivos</a:t>
+                      </a:r>
+                    </a:p>
+                  </a:txBody>
+                  <a:tcPr marL="109728" marR="91440" marT="36576" marB="36576" anchor="ctr">
+                    <a:solidFill>
+                      <a:srgbClr val="EFF2F7"/>
+                    </a:solidFill>
+                  </a:tcPr>
+                </a:tc>
+                <a:tc>
+                  <a:txBody>
+                    <a:bodyPr/>
+                    <a:lstStyle/>
+                    <a:p>
+                      <a:pPr algn="l"/>
+                      <a:r>
+                        <a:rPr sz="1300" b="0">
+                          <a:solidFill>
+                            <a:srgbClr val="222222"/>
+                          </a:solidFill>
+                          <a:latin typeface="Calibri"/>
+                          <a:cs typeface="Calibri"/>
+                        </a:rPr>
+                        <a:t>Alguien pide copiar un papel de la dirección.</a:t>
+                      </a:r>
+                    </a:p>
+                  </a:txBody>
+                  <a:tcPr marL="109728" marR="91440" marT="36576" marB="36576" anchor="ctr">
+                    <a:solidFill>
+                      <a:srgbClr val="EFF2F7"/>
+                    </a:solidFill>
+                  </a:tcPr>
+                </a:tc>
+              </a:tr>
+            </a:tbl>
+          </a:graphicData>
+        </a:graphic>
+      </p:graphicFrame>
+      <p:sp>
+        <p:nvSpPr>
+          <p:cNvPr id="23" name="Texto 23"/>
+          <p:cNvSpPr txBox="1"/>
+          <p:nvPr/>
+        </p:nvSpPr>
+        <p:spPr>
+          <a:xfrm>
+            <a:off x="868680" y="5349240"/>
+            <a:ext cx="10424160" cy="457200"/>
+          </a:xfrm>
+          <a:prstGeom prst="rect">
+            <a:avLst/>
+          </a:prstGeom>
+          <a:noFill/>
+        </p:spPr>
+        <p:txBody>
+          <a:bodyPr wrap="square" anchor="t" lIns="0" rIns="0" tIns="0" bIns="0">
+            <a:noAutofit/>
+          </a:bodyPr>
+          <a:lstStyle/>
+          <a:p>
+            <a:pPr algn="l">
+              <a:lnSpc>
+                <a:spcPct val="114000"/>
+              </a:lnSpc>
+              <a:spcBef>
+                <a:spcPts val="0"/>
+              </a:spcBef>
+              <a:spcAft>
+                <a:spcPts val="600"/>
+              </a:spcAft>
+            </a:pPr>
+            <a:r>
+              <a:rPr lang="es-UY" sz="1600" b="1" i="0" dirty="0">
+                <a:solidFill>
+                  <a:srgbClr val="2B3A6E"/>
+                </a:solidFill>
+                <a:latin typeface="Calibri"/>
+                <a:cs typeface="Calibri"/>
+              </a:rPr>
+              <a:t xml:space="preserve">Más entradas significa más lugares para vigilar. Por eso se busca tener menos entradas y controlar todas.</a:t>
+            </a:r>
+          </a:p>
+        </p:txBody>
+      </p:sp>
+    </p:spTree>
+  </p:cSld>
+  <p:clrMapOvr>
+    <a:masterClrMapping/>
+  </p:clrMapOvr>
+</p:sld>
+</file>
+
+<file path=ppt/slides/slide2.xml><?xml version="1.0" encoding="utf-8"?>
+<p:sld xmlns:a="http://schemas.openxmlformats.org/drawingml/2006/main" xmlns:p="http://schemas.openxmlformats.org/presentationml/2006/main" xmlns:r="http://schemas.openxmlformats.org/officeDocument/2006/relationships">
+  <p:cSld>
+    <p:spTree>
+      <p:nvGrpSpPr>
+        <p:cNvPr id="1" name=""/>
+        <p:cNvGrpSpPr/>
+        <p:nvPr/>
+      </p:nvGrpSpPr>
+      <p:grpSpPr/>
+      <p:sp>
+        <p:nvSpPr>
+          <p:cNvPr id="2" name="Rectangle 1"/>
+          <p:cNvSpPr/>
+          <p:nvPr/>
+        </p:nvSpPr>
+        <p:spPr>
+          <a:xfrm>
+            <a:off x="0" y="0"/>
+            <a:ext cx="7315200" cy="6858000"/>
+          </a:xfrm>
+          <a:prstGeom prst="rect">
+            <a:avLst/>
+          </a:prstGeom>
+          <a:solidFill>
+            <a:srgbClr val="2B3A6E"/>
+          </a:solidFill>
+          <a:ln>
+            <a:noFill/>
+          </a:ln>
+          <a:effectLst/>
+        </p:spPr>
+        <p:style>
+          <a:lnRef idx="1">
+            <a:schemeClr val="accent1"/>
+          </a:lnRef>
+          <a:fillRef idx="3">
+            <a:schemeClr val="accent1"/>
+          </a:fillRef>
+          <a:effectRef idx="2">
+            <a:schemeClr val="accent1"/>
+          </a:effectRef>
+          <a:fontRef idx="minor">
+            <a:schemeClr val="lt1"/>
+          </a:fontRef>
+        </p:style>
+        <p:txBody>
+          <a:bodyPr rtlCol="0" anchor="ctr"/>
+          <a:lstStyle/>
+          <a:p>
+            <a:pPr algn="ctr"/>
+          </a:p>
+        </p:txBody>
+      </p:sp>
+      <p:sp>
+        <p:nvSpPr>
+          <p:cNvPr id="3" name="TextBox 2"/>
+          <p:cNvSpPr txBox="1"/>
+          <p:nvPr/>
+        </p:nvSpPr>
+        <p:spPr>
+          <a:xfrm>
+            <a:off x="822960" y="2743200"/>
+            <a:ext cx="5852160" cy="1280160"/>
+          </a:xfrm>
+          <a:prstGeom prst="rect">
+            <a:avLst/>
+          </a:prstGeom>
+          <a:noFill/>
+        </p:spPr>
+        <p:txBody>
+          <a:bodyPr wrap="square" anchor="ctr" lIns="0" rIns="0" tIns="0" bIns="0">
+            <a:spAutoFit/>
+          </a:bodyPr>
+          <a:lstStyle/>
+          <a:p>
+            <a:pPr algn="l">
+              <a:lnSpc>
+                <a:spcPct val="100000"/>
+              </a:lnSpc>
+              <a:spcBef>
+                <a:spcPts val="0"/>
+              </a:spcBef>
+              <a:spcAft>
+                <a:spcPts val="600"/>
+              </a:spcAft>
+            </a:pPr>
+            <a:r>
+              <a:rPr sz="3200" b="0" i="0">
+                <a:solidFill>
+                  <a:srgbClr val="FFFFFF"/>
+                </a:solidFill>
+                <a:latin typeface="Calibri"/>
+                <a:cs typeface="Calibri"/>
+              </a:rPr>
+              <a:t>Conceptos</a:t>
+            </a:r>
+          </a:p>
+        </p:txBody>
+      </p:sp>
+      <p:sp>
+        <p:nvSpPr>
+          <p:cNvPr id="4" name="TextBox 3"/>
+          <p:cNvSpPr txBox="1"/>
+          <p:nvPr/>
+        </p:nvSpPr>
+        <p:spPr>
+          <a:xfrm>
+            <a:off x="7955279" y="2971800"/>
+            <a:ext cx="3657600" cy="822960"/>
+          </a:xfrm>
+          <a:prstGeom prst="rect">
+            <a:avLst/>
+          </a:prstGeom>
+          <a:noFill/>
+        </p:spPr>
+        <p:txBody>
+          <a:bodyPr wrap="square" anchor="ctr" lIns="0" rIns="0" tIns="0" bIns="0">
+            <a:spAutoFit/>
+          </a:bodyPr>
+          <a:lstStyle/>
+          <a:p>
+            <a:pPr algn="l">
+              <a:lnSpc>
+                <a:spcPct val="100000"/>
+              </a:lnSpc>
+              <a:spcBef>
+                <a:spcPts val="0"/>
+              </a:spcBef>
+              <a:spcAft>
+                <a:spcPts val="600"/>
+              </a:spcAft>
+            </a:pPr>
+            <a:r>
               <a:rPr sz="1300" b="1" i="0">
                 <a:solidFill>
                   <a:srgbClr val="2B3A6E"/>
@@ -9357,6 +11507,5086 @@
                 <a:cs typeface="Calibri"/>
               </a:rPr>
               <a:t>CIBERSEGURIDAD</a:t>
+            </a:r>
+          </a:p>
+        </p:txBody>
+      </p:sp>
+    </p:spTree>
+  </p:cSld>
+  <p:clrMapOvr>
+    <a:masterClrMapping/>
+  </p:clrMapOvr>
+</p:sld>
+</file>
+
+<file path=ppt/slides/slide20.xml><?xml version="1.0" encoding="utf-8"?>
+<p:sld xmlns:a="http://schemas.openxmlformats.org/drawingml/2006/main" xmlns:p="http://schemas.openxmlformats.org/presentationml/2006/main" xmlns:r="http://schemas.openxmlformats.org/officeDocument/2006/relationships">
+  <p:cSld>
+    <p:spTree>
+      <p:nvGrpSpPr>
+        <p:cNvPr id="1" name=""/>
+        <p:cNvGrpSpPr/>
+        <p:nvPr/>
+      </p:nvGrpSpPr>
+      <p:grpSpPr/>
+      <p:sp>
+        <p:nvSpPr>
+          <p:cNvPr id="2" name="Rectangle 1"/>
+          <p:cNvSpPr/>
+          <p:nvPr/>
+        </p:nvSpPr>
+        <p:spPr>
+          <a:xfrm>
+            <a:off x="0" y="0"/>
+            <a:ext cx="292608" cy="6858000"/>
+          </a:xfrm>
+          <a:prstGeom prst="rect">
+            <a:avLst/>
+          </a:prstGeom>
+          <a:pattFill prst="ltUpDiag">
+            <a:fgClr>
+              <a:srgbClr val="C2CAD6"/>
+            </a:fgClr>
+            <a:bgClr>
+              <a:srgbClr val="FFFFFF"/>
+            </a:bgClr>
+          </a:pattFill>
+          <a:ln>
+            <a:noFill/>
+          </a:ln>
+          <a:effectLst/>
+        </p:spPr>
+        <p:style>
+          <a:lnRef idx="1">
+            <a:schemeClr val="accent1"/>
+          </a:lnRef>
+          <a:fillRef idx="3">
+            <a:schemeClr val="accent1"/>
+          </a:fillRef>
+          <a:effectRef idx="2">
+            <a:schemeClr val="accent1"/>
+          </a:effectRef>
+          <a:fontRef idx="minor">
+            <a:schemeClr val="lt1"/>
+          </a:fontRef>
+        </p:style>
+        <p:txBody>
+          <a:bodyPr rtlCol="0" anchor="ctr"/>
+          <a:lstStyle/>
+          <a:p>
+            <a:pPr algn="ctr"/>
+          </a:p>
+        </p:txBody>
+      </p:sp>
+      <p:sp>
+        <p:nvSpPr>
+          <p:cNvPr id="3" name="TextBox 2"/>
+          <p:cNvSpPr txBox="1"/>
+          <p:nvPr/>
+        </p:nvSpPr>
+        <p:spPr>
+          <a:xfrm>
+            <a:off x="822960" y="420624"/>
+            <a:ext cx="10424160" cy="822960"/>
+          </a:xfrm>
+          <a:prstGeom prst="rect">
+            <a:avLst/>
+          </a:prstGeom>
+          <a:noFill/>
+        </p:spPr>
+        <p:txBody>
+          <a:bodyPr wrap="square" anchor="t" lIns="0" rIns="0" tIns="0" bIns="0">
+            <a:spAutoFit/>
+          </a:bodyPr>
+          <a:lstStyle/>
+          <a:p>
+            <a:pPr algn="l">
+              <a:lnSpc>
+                <a:spcPct val="100000"/>
+              </a:lnSpc>
+              <a:spcBef>
+                <a:spcPts val="0"/>
+              </a:spcBef>
+              <a:spcAft>
+                <a:spcPts val="600"/>
+              </a:spcAft>
+            </a:pPr>
+            <a:r>
+              <a:rPr sz="2900" b="0" i="0">
+                <a:solidFill>
+                  <a:srgbClr val="2B3A6E"/>
+                </a:solidFill>
+                <a:latin typeface="Calibri"/>
+                <a:cs typeface="Calibri"/>
+              </a:rPr>
+              <a:t>Falla 1 · Inyección SQL: ejemplo cotidiano</a:t>
+            </a:r>
+          </a:p>
+        </p:txBody>
+      </p:sp>
+      <p:sp>
+        <p:nvSpPr>
+          <p:cNvPr id="4" name="Rectangle 3"/>
+          <p:cNvSpPr/>
+          <p:nvPr/>
+        </p:nvSpPr>
+        <p:spPr>
+          <a:xfrm>
+            <a:off x="822960" y="6327648"/>
+            <a:ext cx="10561320" cy="30480"/>
+          </a:xfrm>
+          <a:prstGeom prst="rect">
+            <a:avLst/>
+          </a:prstGeom>
+          <a:solidFill>
+            <a:srgbClr val="2B3A6E"/>
+          </a:solidFill>
+          <a:ln>
+            <a:noFill/>
+          </a:ln>
+          <a:effectLst/>
+        </p:spPr>
+        <p:style>
+          <a:lnRef idx="1">
+            <a:schemeClr val="accent1"/>
+          </a:lnRef>
+          <a:fillRef idx="3">
+            <a:schemeClr val="accent1"/>
+          </a:fillRef>
+          <a:effectRef idx="2">
+            <a:schemeClr val="accent1"/>
+          </a:effectRef>
+          <a:fontRef idx="minor">
+            <a:schemeClr val="lt1"/>
+          </a:fontRef>
+        </p:style>
+        <p:txBody>
+          <a:bodyPr rtlCol="0" anchor="ctr"/>
+          <a:lstStyle/>
+          <a:p>
+            <a:pPr algn="ctr"/>
+          </a:p>
+        </p:txBody>
+      </p:sp>
+      <p:sp>
+        <p:nvSpPr>
+          <p:cNvPr id="5" name="TextBox 4"/>
+          <p:cNvSpPr txBox="1"/>
+          <p:nvPr/>
+        </p:nvSpPr>
+        <p:spPr>
+          <a:xfrm>
+            <a:off x="8351215" y="6400800"/>
+            <a:ext cx="3657600" cy="274320"/>
+          </a:xfrm>
+          <a:prstGeom prst="rect">
+            <a:avLst/>
+          </a:prstGeom>
+          <a:noFill/>
+        </p:spPr>
+        <p:txBody>
+          <a:bodyPr wrap="square" anchor="t" lIns="0" rIns="0" tIns="0" bIns="0">
+            <a:spAutoFit/>
+          </a:bodyPr>
+          <a:lstStyle/>
+          <a:p>
+            <a:pPr algn="r">
+              <a:lnSpc>
+                <a:spcPct val="100000"/>
+              </a:lnSpc>
+              <a:spcBef>
+                <a:spcPts val="0"/>
+              </a:spcBef>
+              <a:spcAft>
+                <a:spcPts val="600"/>
+              </a:spcAft>
+            </a:pPr>
+            <a:r>
+              <a:rPr sz="950" b="1" i="0">
+                <a:solidFill>
+                  <a:srgbClr val="5B667A"/>
+                </a:solidFill>
+                <a:latin typeface="Calibri"/>
+                <a:cs typeface="Calibri"/>
+              </a:rPr>
+              <a:t>CIBERSEGURIDAD</a:t>
+            </a:r>
+            <a:r>
+              <a:rPr sz="950" b="0" i="0">
+                <a:solidFill>
+                  <a:srgbClr val="5B667A"/>
+                </a:solidFill>
+                <a:latin typeface="Calibri"/>
+                <a:cs typeface="Calibri"/>
+              </a:rPr>
+              <a:t>  ·  3.º Bachillerato Tecnológico</a:t>
+            </a:r>
+          </a:p>
+        </p:txBody>
+      </p:sp>
+      <p:sp>
+        <p:nvSpPr>
+          <p:cNvPr id="21" name="Texto 21"/>
+          <p:cNvSpPr txBox="1"/>
+          <p:nvPr/>
+        </p:nvSpPr>
+        <p:spPr>
+          <a:xfrm>
+            <a:off x="868680" y="1371600"/>
+            <a:ext cx="10424160" cy="685800"/>
+          </a:xfrm>
+          <a:prstGeom prst="rect">
+            <a:avLst/>
+          </a:prstGeom>
+          <a:noFill/>
+        </p:spPr>
+        <p:txBody>
+          <a:bodyPr wrap="square" anchor="t" lIns="0" rIns="0" tIns="0" bIns="0">
+            <a:noAutofit/>
+          </a:bodyPr>
+          <a:lstStyle/>
+          <a:p>
+            <a:pPr algn="l">
+              <a:lnSpc>
+                <a:spcPct val="114000"/>
+              </a:lnSpc>
+              <a:spcBef>
+                <a:spcPts val="0"/>
+              </a:spcBef>
+              <a:spcAft>
+                <a:spcPts val="600"/>
+              </a:spcAft>
+            </a:pPr>
+            <a:r>
+              <a:rPr lang="es-UY" sz="1700" b="1" i="0" dirty="0">
+                <a:solidFill>
+                  <a:srgbClr val="2B3A6E"/>
+                </a:solidFill>
+                <a:latin typeface="Calibri"/>
+                <a:cs typeface="Calibri"/>
+              </a:rPr>
+              <a:t xml:space="preserve">La situación. </a:t>
+            </a:r>
+            <a:r>
+              <a:rPr lang="es-UY" sz="1700" b="0" i="0" dirty="0">
+                <a:solidFill>
+                  <a:srgbClr val="222222"/>
+                </a:solidFill>
+                <a:latin typeface="Calibri"/>
+                <a:cs typeface="Calibri"/>
+              </a:rPr>
+              <a:t xml:space="preserve">El portero de un liceo cumple al pie de la letra una orden escrita en un papel.</a:t>
+            </a:r>
+          </a:p>
+        </p:txBody>
+      </p:sp>
+      <p:sp>
+        <p:nvSpPr>
+          <p:cNvPr id="22" name="Tarjeta 22"/>
+          <p:cNvSpPr/>
+          <p:nvPr/>
+        </p:nvSpPr>
+        <p:spPr>
+          <a:xfrm>
+            <a:off x="868680" y="2514600"/>
+            <a:ext cx="3218688" cy="2240280"/>
+          </a:xfrm>
+          <a:prstGeom prst="roundRect">
+            <a:avLst>
+              <a:gd name="adj" fmla="val 5000"/>
+            </a:avLst>
+          </a:prstGeom>
+          <a:solidFill>
+            <a:srgbClr val="F3F4F7"/>
+          </a:solidFill>
+          <a:ln w="9525">
+            <a:solidFill>
+              <a:srgbClr val="D7DDE7"/>
+            </a:solidFill>
+          </a:ln>
+          <a:effectLst/>
+        </p:spPr>
+        <p:style>
+          <a:lnRef idx="1">
+            <a:schemeClr val="accent1"/>
+          </a:lnRef>
+          <a:fillRef idx="3">
+            <a:schemeClr val="accent1"/>
+          </a:fillRef>
+          <a:effectRef idx="2">
+            <a:schemeClr val="accent1"/>
+          </a:effectRef>
+          <a:fontRef idx="minor">
+            <a:schemeClr val="lt1"/>
+          </a:fontRef>
+        </p:style>
+        <p:txBody>
+          <a:bodyPr rtlCol="0" anchor="t" wrap="square" lIns="164592" rIns="146304" tIns="164592" bIns="91440">
+            <a:noAutofit/>
+          </a:bodyPr>
+          <a:lstStyle/>
+          <a:p>
+            <a:pPr algn="l">
+              <a:lnSpc>
+                <a:spcPct val="110000"/>
+              </a:lnSpc>
+              <a:spcBef>
+                <a:spcPts val="0"/>
+              </a:spcBef>
+              <a:spcAft>
+                <a:spcPts val="600"/>
+              </a:spcAft>
+            </a:pPr>
+            <a:r>
+              <a:rPr lang="es-UY" sz="1500" b="0" i="0" dirty="0">
+                <a:solidFill>
+                  <a:srgbClr val="222222"/>
+                </a:solidFill>
+                <a:latin typeface="Calibri"/>
+                <a:cs typeface="Calibri"/>
+              </a:rPr>
+              <a:t xml:space="preserve">La orden tiene un espacio en blanco: «Dejar pasar si el nombre es ______».</a:t>
+            </a:r>
+          </a:p>
+          <a:p>
+            <a:pPr algn="l">
+              <a:lnSpc>
+                <a:spcPct val="110000"/>
+              </a:lnSpc>
+              <a:spcBef>
+                <a:spcPts val="0"/>
+              </a:spcBef>
+              <a:spcAft>
+                <a:spcPts val="600"/>
+              </a:spcAft>
+            </a:pPr>
+            <a:r>
+              <a:rPr lang="es-UY" sz="1500" b="0" i="0" dirty="0">
+                <a:solidFill>
+                  <a:srgbClr val="222222"/>
+                </a:solidFill>
+                <a:latin typeface="Calibri"/>
+                <a:cs typeface="Calibri"/>
+              </a:rPr>
+              <a:t xml:space="preserve">Cada visitante completa el espacio y el portero cumple la orden tal como quedó escrita.</a:t>
+            </a:r>
+          </a:p>
+        </p:txBody>
+      </p:sp>
+      <p:sp>
+        <p:nvSpPr>
+          <p:cNvPr id="23" name="Etiqueta 23"/>
+          <p:cNvSpPr/>
+          <p:nvPr/>
+        </p:nvSpPr>
+        <p:spPr>
+          <a:xfrm>
+            <a:off x="2350008" y="2240280"/>
+            <a:ext cx="1737360" cy="256032"/>
+          </a:xfrm>
+          <a:prstGeom prst="roundRect">
+            <a:avLst>
+              <a:gd name="adj" fmla="val 50000"/>
+            </a:avLst>
+          </a:prstGeom>
+          <a:solidFill>
+            <a:srgbClr val="2B3A6E"/>
+          </a:solidFill>
+          <a:ln>
+            <a:noFill/>
+          </a:ln>
+          <a:effectLst/>
+        </p:spPr>
+        <p:style>
+          <a:lnRef idx="1">
+            <a:schemeClr val="accent1"/>
+          </a:lnRef>
+          <a:fillRef idx="3">
+            <a:schemeClr val="accent1"/>
+          </a:fillRef>
+          <a:effectRef idx="2">
+            <a:schemeClr val="accent1"/>
+          </a:effectRef>
+          <a:fontRef idx="minor">
+            <a:schemeClr val="lt1"/>
+          </a:fontRef>
+        </p:style>
+        <p:txBody>
+          <a:bodyPr rtlCol="0" anchor="ctr" tIns="0" bIns="0"/>
+          <a:lstStyle/>
+          <a:p>
+            <a:pPr algn="ctr"/>
+            <a:r>
+              <a:rPr lang="es-UY" sz="1000" b="1" i="0" dirty="0">
+                <a:solidFill>
+                  <a:srgbClr val="FFFFFF"/>
+                </a:solidFill>
+                <a:latin typeface="Calibri"/>
+                <a:cs typeface="Calibri"/>
+              </a:rPr>
+              <a:t xml:space="preserve">CÓMO FUNCIONA</a:t>
+            </a:r>
+          </a:p>
+        </p:txBody>
+      </p:sp>
+      <p:sp>
+        <p:nvSpPr>
+          <p:cNvPr id="24" name="Flecha 24"/>
+          <p:cNvSpPr/>
+          <p:nvPr/>
+        </p:nvSpPr>
+        <p:spPr>
+          <a:xfrm>
+            <a:off x="4206240" y="3497580"/>
+            <a:ext cx="146304" cy="274320"/>
+          </a:xfrm>
+          <a:prstGeom prst="chevron">
+            <a:avLst/>
+          </a:prstGeom>
+          <a:solidFill>
+            <a:srgbClr val="C2CAD6"/>
+          </a:solidFill>
+          <a:ln>
+            <a:noFill/>
+          </a:ln>
+          <a:effectLst/>
+        </p:spPr>
+        <p:style>
+          <a:lnRef idx="1">
+            <a:schemeClr val="accent1"/>
+          </a:lnRef>
+          <a:fillRef idx="3">
+            <a:schemeClr val="accent1"/>
+          </a:fillRef>
+          <a:effectRef idx="2">
+            <a:schemeClr val="accent1"/>
+          </a:effectRef>
+          <a:fontRef idx="minor">
+            <a:schemeClr val="lt1"/>
+          </a:fontRef>
+        </p:style>
+      </p:sp>
+      <p:sp>
+        <p:nvSpPr>
+          <p:cNvPr id="25" name="Tarjeta 25"/>
+          <p:cNvSpPr/>
+          <p:nvPr/>
+        </p:nvSpPr>
+        <p:spPr>
+          <a:xfrm>
+            <a:off x="4471416" y="2514600"/>
+            <a:ext cx="3218688" cy="2240280"/>
+          </a:xfrm>
+          <a:prstGeom prst="roundRect">
+            <a:avLst>
+              <a:gd name="adj" fmla="val 5000"/>
+            </a:avLst>
+          </a:prstGeom>
+          <a:solidFill>
+            <a:srgbClr val="F3F4F7"/>
+          </a:solidFill>
+          <a:ln w="9525">
+            <a:solidFill>
+              <a:srgbClr val="D7DDE7"/>
+            </a:solidFill>
+          </a:ln>
+          <a:effectLst/>
+        </p:spPr>
+        <p:style>
+          <a:lnRef idx="1">
+            <a:schemeClr val="accent1"/>
+          </a:lnRef>
+          <a:fillRef idx="3">
+            <a:schemeClr val="accent1"/>
+          </a:fillRef>
+          <a:effectRef idx="2">
+            <a:schemeClr val="accent1"/>
+          </a:effectRef>
+          <a:fontRef idx="minor">
+            <a:schemeClr val="lt1"/>
+          </a:fontRef>
+        </p:style>
+        <p:txBody>
+          <a:bodyPr rtlCol="0" anchor="t" wrap="square" lIns="164592" rIns="146304" tIns="164592" bIns="91440">
+            <a:noAutofit/>
+          </a:bodyPr>
+          <a:lstStyle/>
+          <a:p>
+            <a:pPr algn="l">
+              <a:lnSpc>
+                <a:spcPct val="110000"/>
+              </a:lnSpc>
+              <a:spcBef>
+                <a:spcPts val="0"/>
+              </a:spcBef>
+              <a:spcAft>
+                <a:spcPts val="600"/>
+              </a:spcAft>
+            </a:pPr>
+            <a:r>
+              <a:rPr lang="es-UY" sz="1500" b="0" i="0" dirty="0">
+                <a:solidFill>
+                  <a:srgbClr val="222222"/>
+                </a:solidFill>
+                <a:latin typeface="Calibri"/>
+                <a:cs typeface="Calibri"/>
+              </a:rPr>
+              <a:t xml:space="preserve">Alguien escribe en el espacio: «Ana, o dejar pasar a cualquiera».</a:t>
+            </a:r>
+          </a:p>
+          <a:p>
+            <a:pPr algn="l">
+              <a:lnSpc>
+                <a:spcPct val="110000"/>
+              </a:lnSpc>
+              <a:spcBef>
+                <a:spcPts val="0"/>
+              </a:spcBef>
+              <a:spcAft>
+                <a:spcPts val="600"/>
+              </a:spcAft>
+            </a:pPr>
+            <a:r>
+              <a:rPr lang="es-UY" sz="1500" b="0" i="0" dirty="0">
+                <a:solidFill>
+                  <a:srgbClr val="222222"/>
+                </a:solidFill>
+                <a:latin typeface="Calibri"/>
+                <a:cs typeface="Calibri"/>
+              </a:rPr>
+              <a:t xml:space="preserve">La orden queda: «Dejar pasar si el nombre es Ana, o dejar pasar a cualquiera». El portero la cumple y entra cualquiera.</a:t>
+            </a:r>
+          </a:p>
+        </p:txBody>
+      </p:sp>
+      <p:sp>
+        <p:nvSpPr>
+          <p:cNvPr id="26" name="Etiqueta 26"/>
+          <p:cNvSpPr/>
+          <p:nvPr/>
+        </p:nvSpPr>
+        <p:spPr>
+          <a:xfrm>
+            <a:off x="5952744" y="2240280"/>
+            <a:ext cx="1737360" cy="256032"/>
+          </a:xfrm>
+          <a:prstGeom prst="roundRect">
+            <a:avLst>
+              <a:gd name="adj" fmla="val 50000"/>
+            </a:avLst>
+          </a:prstGeom>
+          <a:solidFill>
+            <a:srgbClr val="B0362F"/>
+          </a:solidFill>
+          <a:ln>
+            <a:noFill/>
+          </a:ln>
+          <a:effectLst/>
+        </p:spPr>
+        <p:style>
+          <a:lnRef idx="1">
+            <a:schemeClr val="accent1"/>
+          </a:lnRef>
+          <a:fillRef idx="3">
+            <a:schemeClr val="accent1"/>
+          </a:fillRef>
+          <a:effectRef idx="2">
+            <a:schemeClr val="accent1"/>
+          </a:effectRef>
+          <a:fontRef idx="minor">
+            <a:schemeClr val="lt1"/>
+          </a:fontRef>
+        </p:style>
+        <p:txBody>
+          <a:bodyPr rtlCol="0" anchor="ctr" tIns="0" bIns="0"/>
+          <a:lstStyle/>
+          <a:p>
+            <a:pPr algn="ctr"/>
+            <a:r>
+              <a:rPr lang="es-UY" sz="1000" b="1" i="0" dirty="0">
+                <a:solidFill>
+                  <a:srgbClr val="FFFFFF"/>
+                </a:solidFill>
+                <a:latin typeface="Calibri"/>
+                <a:cs typeface="Calibri"/>
+              </a:rPr>
+              <a:t xml:space="preserve">EL ATAQUE</a:t>
+            </a:r>
+          </a:p>
+        </p:txBody>
+      </p:sp>
+      <p:sp>
+        <p:nvSpPr>
+          <p:cNvPr id="27" name="Flecha 27"/>
+          <p:cNvSpPr/>
+          <p:nvPr/>
+        </p:nvSpPr>
+        <p:spPr>
+          <a:xfrm>
+            <a:off x="7808976" y="3497580"/>
+            <a:ext cx="146304" cy="274320"/>
+          </a:xfrm>
+          <a:prstGeom prst="chevron">
+            <a:avLst/>
+          </a:prstGeom>
+          <a:solidFill>
+            <a:srgbClr val="C2CAD6"/>
+          </a:solidFill>
+          <a:ln>
+            <a:noFill/>
+          </a:ln>
+          <a:effectLst/>
+        </p:spPr>
+        <p:style>
+          <a:lnRef idx="1">
+            <a:schemeClr val="accent1"/>
+          </a:lnRef>
+          <a:fillRef idx="3">
+            <a:schemeClr val="accent1"/>
+          </a:fillRef>
+          <a:effectRef idx="2">
+            <a:schemeClr val="accent1"/>
+          </a:effectRef>
+          <a:fontRef idx="minor">
+            <a:schemeClr val="lt1"/>
+          </a:fontRef>
+        </p:style>
+      </p:sp>
+      <p:sp>
+        <p:nvSpPr>
+          <p:cNvPr id="28" name="Tarjeta 28"/>
+          <p:cNvSpPr/>
+          <p:nvPr/>
+        </p:nvSpPr>
+        <p:spPr>
+          <a:xfrm>
+            <a:off x="8074152" y="2514600"/>
+            <a:ext cx="3218688" cy="2240280"/>
+          </a:xfrm>
+          <a:prstGeom prst="roundRect">
+            <a:avLst>
+              <a:gd name="adj" fmla="val 5000"/>
+            </a:avLst>
+          </a:prstGeom>
+          <a:solidFill>
+            <a:srgbClr val="F3F4F7"/>
+          </a:solidFill>
+          <a:ln w="9525">
+            <a:solidFill>
+              <a:srgbClr val="D7DDE7"/>
+            </a:solidFill>
+          </a:ln>
+          <a:effectLst/>
+        </p:spPr>
+        <p:style>
+          <a:lnRef idx="1">
+            <a:schemeClr val="accent1"/>
+          </a:lnRef>
+          <a:fillRef idx="3">
+            <a:schemeClr val="accent1"/>
+          </a:fillRef>
+          <a:effectRef idx="2">
+            <a:schemeClr val="accent1"/>
+          </a:effectRef>
+          <a:fontRef idx="minor">
+            <a:schemeClr val="lt1"/>
+          </a:fontRef>
+        </p:style>
+        <p:txBody>
+          <a:bodyPr rtlCol="0" anchor="t" wrap="square" lIns="164592" rIns="146304" tIns="164592" bIns="91440">
+            <a:noAutofit/>
+          </a:bodyPr>
+          <a:lstStyle/>
+          <a:p>
+            <a:pPr algn="l">
+              <a:lnSpc>
+                <a:spcPct val="110000"/>
+              </a:lnSpc>
+              <a:spcBef>
+                <a:spcPts val="0"/>
+              </a:spcBef>
+              <a:spcAft>
+                <a:spcPts val="600"/>
+              </a:spcAft>
+            </a:pPr>
+            <a:r>
+              <a:rPr lang="es-UY" sz="1500" b="0" i="0" dirty="0">
+                <a:solidFill>
+                  <a:srgbClr val="222222"/>
+                </a:solidFill>
+                <a:latin typeface="Calibri"/>
+                <a:cs typeface="Calibri"/>
+              </a:rPr>
+              <a:t xml:space="preserve">El nombre se escribe en una casilla aparte y se trata solo como un nombre.</a:t>
+            </a:r>
+          </a:p>
+          <a:p>
+            <a:pPr algn="l">
+              <a:lnSpc>
+                <a:spcPct val="110000"/>
+              </a:lnSpc>
+              <a:spcBef>
+                <a:spcPts val="0"/>
+              </a:spcBef>
+              <a:spcAft>
+                <a:spcPts val="600"/>
+              </a:spcAft>
+            </a:pPr>
+            <a:r>
+              <a:rPr lang="es-UY" sz="1500" b="0" i="0" dirty="0">
+                <a:solidFill>
+                  <a:srgbClr val="222222"/>
+                </a:solidFill>
+                <a:latin typeface="Calibri"/>
+                <a:cs typeface="Calibri"/>
+              </a:rPr>
+              <a:t xml:space="preserve">El portero busca a alguien llamado «Ana, o dejar pasar a cualquiera», no lo encuentra y no deja pasar a nadie.</a:t>
+            </a:r>
+          </a:p>
+        </p:txBody>
+      </p:sp>
+      <p:sp>
+        <p:nvSpPr>
+          <p:cNvPr id="29" name="Etiqueta 29"/>
+          <p:cNvSpPr/>
+          <p:nvPr/>
+        </p:nvSpPr>
+        <p:spPr>
+          <a:xfrm>
+            <a:off x="9555480" y="2240280"/>
+            <a:ext cx="1737360" cy="256032"/>
+          </a:xfrm>
+          <a:prstGeom prst="roundRect">
+            <a:avLst>
+              <a:gd name="adj" fmla="val 50000"/>
+            </a:avLst>
+          </a:prstGeom>
+          <a:solidFill>
+            <a:srgbClr val="1E6B3E"/>
+          </a:solidFill>
+          <a:ln>
+            <a:noFill/>
+          </a:ln>
+          <a:effectLst/>
+        </p:spPr>
+        <p:style>
+          <a:lnRef idx="1">
+            <a:schemeClr val="accent1"/>
+          </a:lnRef>
+          <a:fillRef idx="3">
+            <a:schemeClr val="accent1"/>
+          </a:fillRef>
+          <a:effectRef idx="2">
+            <a:schemeClr val="accent1"/>
+          </a:effectRef>
+          <a:fontRef idx="minor">
+            <a:schemeClr val="lt1"/>
+          </a:fontRef>
+        </p:style>
+        <p:txBody>
+          <a:bodyPr rtlCol="0" anchor="ctr" tIns="0" bIns="0"/>
+          <a:lstStyle/>
+          <a:p>
+            <a:pPr algn="ctr"/>
+            <a:r>
+              <a:rPr lang="es-UY" sz="1000" b="1" i="0" dirty="0">
+                <a:solidFill>
+                  <a:srgbClr val="FFFFFF"/>
+                </a:solidFill>
+                <a:latin typeface="Calibri"/>
+                <a:cs typeface="Calibri"/>
+              </a:rPr>
+              <a:t xml:space="preserve">EL PATRÓN</a:t>
+            </a:r>
+          </a:p>
+        </p:txBody>
+      </p:sp>
+      <p:sp>
+        <p:nvSpPr>
+          <p:cNvPr id="30" name="Tarjeta 30"/>
+          <p:cNvSpPr/>
+          <p:nvPr/>
+        </p:nvSpPr>
+        <p:spPr>
+          <a:xfrm>
+            <a:off x="868680" y="5074920"/>
+            <a:ext cx="10424160" cy="566928"/>
+          </a:xfrm>
+          <a:prstGeom prst="roundRect">
+            <a:avLst>
+              <a:gd name="adj" fmla="val 5000"/>
+            </a:avLst>
+          </a:prstGeom>
+          <a:solidFill>
+            <a:srgbClr val="FFFFFF"/>
+          </a:solidFill>
+          <a:ln w="9525">
+            <a:solidFill>
+              <a:srgbClr val="C2CAD6"/>
+            </a:solidFill>
+          </a:ln>
+          <a:effectLst/>
+        </p:spPr>
+        <p:style>
+          <a:lnRef idx="1">
+            <a:schemeClr val="accent1"/>
+          </a:lnRef>
+          <a:fillRef idx="3">
+            <a:schemeClr val="accent1"/>
+          </a:fillRef>
+          <a:effectRef idx="2">
+            <a:schemeClr val="accent1"/>
+          </a:effectRef>
+          <a:fontRef idx="minor">
+            <a:schemeClr val="lt1"/>
+          </a:fontRef>
+        </p:style>
+        <p:txBody>
+          <a:bodyPr rtlCol="0" anchor="ctr" wrap="square" lIns="164592" rIns="146304" tIns="164592" bIns="91440">
+            <a:noAutofit/>
+          </a:bodyPr>
+          <a:lstStyle/>
+          <a:p>
+            <a:pPr algn="l">
+              <a:lnSpc>
+                <a:spcPct val="105000"/>
+              </a:lnSpc>
+              <a:spcBef>
+                <a:spcPts val="0"/>
+              </a:spcBef>
+              <a:spcAft>
+                <a:spcPts val="0"/>
+              </a:spcAft>
+            </a:pPr>
+            <a:r>
+              <a:rPr lang="es-UY" sz="1500" b="1" i="0" dirty="0">
+                <a:solidFill>
+                  <a:srgbClr val="2B3A6E"/>
+                </a:solidFill>
+                <a:latin typeface="Calibri"/>
+                <a:cs typeface="Calibri"/>
+              </a:rPr>
+              <a:t xml:space="preserve">En la aplicación. </a:t>
+            </a:r>
+            <a:r>
+              <a:rPr lang="es-UY" sz="1500" b="0" i="0" dirty="0">
+                <a:solidFill>
+                  <a:srgbClr val="222222"/>
+                </a:solidFill>
+                <a:latin typeface="Calibri"/>
+                <a:cs typeface="Calibri"/>
+              </a:rPr>
+              <a:t xml:space="preserve">la orden es la consulta SQL, la frase agregada es ' OR '1'='1 y la casilla aparte es el marcador ?.</a:t>
+            </a:r>
+          </a:p>
+        </p:txBody>
+      </p:sp>
+    </p:spTree>
+  </p:cSld>
+  <p:clrMapOvr>
+    <a:masterClrMapping/>
+  </p:clrMapOvr>
+</p:sld>
+</file>
+
+<file path=ppt/slides/slide21.xml><?xml version="1.0" encoding="utf-8"?>
+<p:sld xmlns:a="http://schemas.openxmlformats.org/drawingml/2006/main" xmlns:p="http://schemas.openxmlformats.org/presentationml/2006/main" xmlns:r="http://schemas.openxmlformats.org/officeDocument/2006/relationships">
+  <p:cSld>
+    <p:spTree>
+      <p:nvGrpSpPr>
+        <p:cNvPr id="1" name=""/>
+        <p:cNvGrpSpPr/>
+        <p:nvPr/>
+      </p:nvGrpSpPr>
+      <p:grpSpPr/>
+      <p:sp>
+        <p:nvSpPr>
+          <p:cNvPr id="2" name="Rectangle 1"/>
+          <p:cNvSpPr/>
+          <p:nvPr/>
+        </p:nvSpPr>
+        <p:spPr>
+          <a:xfrm>
+            <a:off x="0" y="0"/>
+            <a:ext cx="292608" cy="6858000"/>
+          </a:xfrm>
+          <a:prstGeom prst="rect">
+            <a:avLst/>
+          </a:prstGeom>
+          <a:pattFill prst="ltUpDiag">
+            <a:fgClr>
+              <a:srgbClr val="C2CAD6"/>
+            </a:fgClr>
+            <a:bgClr>
+              <a:srgbClr val="FFFFFF"/>
+            </a:bgClr>
+          </a:pattFill>
+          <a:ln>
+            <a:noFill/>
+          </a:ln>
+          <a:effectLst/>
+        </p:spPr>
+        <p:style>
+          <a:lnRef idx="1">
+            <a:schemeClr val="accent1"/>
+          </a:lnRef>
+          <a:fillRef idx="3">
+            <a:schemeClr val="accent1"/>
+          </a:fillRef>
+          <a:effectRef idx="2">
+            <a:schemeClr val="accent1"/>
+          </a:effectRef>
+          <a:fontRef idx="minor">
+            <a:schemeClr val="lt1"/>
+          </a:fontRef>
+        </p:style>
+        <p:txBody>
+          <a:bodyPr rtlCol="0" anchor="ctr"/>
+          <a:lstStyle/>
+          <a:p>
+            <a:pPr algn="ctr"/>
+          </a:p>
+        </p:txBody>
+      </p:sp>
+      <p:sp>
+        <p:nvSpPr>
+          <p:cNvPr id="3" name="TextBox 2"/>
+          <p:cNvSpPr txBox="1"/>
+          <p:nvPr/>
+        </p:nvSpPr>
+        <p:spPr>
+          <a:xfrm>
+            <a:off x="822960" y="420624"/>
+            <a:ext cx="10424160" cy="822960"/>
+          </a:xfrm>
+          <a:prstGeom prst="rect">
+            <a:avLst/>
+          </a:prstGeom>
+          <a:noFill/>
+        </p:spPr>
+        <p:txBody>
+          <a:bodyPr wrap="square" anchor="t" lIns="0" rIns="0" tIns="0" bIns="0">
+            <a:spAutoFit/>
+          </a:bodyPr>
+          <a:lstStyle/>
+          <a:p>
+            <a:pPr algn="l">
+              <a:lnSpc>
+                <a:spcPct val="100000"/>
+              </a:lnSpc>
+              <a:spcBef>
+                <a:spcPts val="0"/>
+              </a:spcBef>
+              <a:spcAft>
+                <a:spcPts val="600"/>
+              </a:spcAft>
+            </a:pPr>
+            <a:r>
+              <a:rPr sz="2900" b="0" i="0">
+                <a:solidFill>
+                  <a:srgbClr val="2B3A6E"/>
+                </a:solidFill>
+                <a:latin typeface="Calibri"/>
+                <a:cs typeface="Calibri"/>
+              </a:rPr>
+              <a:t>Falla 2 · XSS: ejemplo cotidiano</a:t>
+            </a:r>
+          </a:p>
+        </p:txBody>
+      </p:sp>
+      <p:sp>
+        <p:nvSpPr>
+          <p:cNvPr id="4" name="Rectangle 3"/>
+          <p:cNvSpPr/>
+          <p:nvPr/>
+        </p:nvSpPr>
+        <p:spPr>
+          <a:xfrm>
+            <a:off x="822960" y="6327648"/>
+            <a:ext cx="10561320" cy="30480"/>
+          </a:xfrm>
+          <a:prstGeom prst="rect">
+            <a:avLst/>
+          </a:prstGeom>
+          <a:solidFill>
+            <a:srgbClr val="2B3A6E"/>
+          </a:solidFill>
+          <a:ln>
+            <a:noFill/>
+          </a:ln>
+          <a:effectLst/>
+        </p:spPr>
+        <p:style>
+          <a:lnRef idx="1">
+            <a:schemeClr val="accent1"/>
+          </a:lnRef>
+          <a:fillRef idx="3">
+            <a:schemeClr val="accent1"/>
+          </a:fillRef>
+          <a:effectRef idx="2">
+            <a:schemeClr val="accent1"/>
+          </a:effectRef>
+          <a:fontRef idx="minor">
+            <a:schemeClr val="lt1"/>
+          </a:fontRef>
+        </p:style>
+        <p:txBody>
+          <a:bodyPr rtlCol="0" anchor="ctr"/>
+          <a:lstStyle/>
+          <a:p>
+            <a:pPr algn="ctr"/>
+          </a:p>
+        </p:txBody>
+      </p:sp>
+      <p:sp>
+        <p:nvSpPr>
+          <p:cNvPr id="5" name="TextBox 4"/>
+          <p:cNvSpPr txBox="1"/>
+          <p:nvPr/>
+        </p:nvSpPr>
+        <p:spPr>
+          <a:xfrm>
+            <a:off x="8351215" y="6400800"/>
+            <a:ext cx="3657600" cy="274320"/>
+          </a:xfrm>
+          <a:prstGeom prst="rect">
+            <a:avLst/>
+          </a:prstGeom>
+          <a:noFill/>
+        </p:spPr>
+        <p:txBody>
+          <a:bodyPr wrap="square" anchor="t" lIns="0" rIns="0" tIns="0" bIns="0">
+            <a:spAutoFit/>
+          </a:bodyPr>
+          <a:lstStyle/>
+          <a:p>
+            <a:pPr algn="r">
+              <a:lnSpc>
+                <a:spcPct val="100000"/>
+              </a:lnSpc>
+              <a:spcBef>
+                <a:spcPts val="0"/>
+              </a:spcBef>
+              <a:spcAft>
+                <a:spcPts val="600"/>
+              </a:spcAft>
+            </a:pPr>
+            <a:r>
+              <a:rPr sz="950" b="1" i="0">
+                <a:solidFill>
+                  <a:srgbClr val="5B667A"/>
+                </a:solidFill>
+                <a:latin typeface="Calibri"/>
+                <a:cs typeface="Calibri"/>
+              </a:rPr>
+              <a:t>CIBERSEGURIDAD</a:t>
+            </a:r>
+            <a:r>
+              <a:rPr sz="950" b="0" i="0">
+                <a:solidFill>
+                  <a:srgbClr val="5B667A"/>
+                </a:solidFill>
+                <a:latin typeface="Calibri"/>
+                <a:cs typeface="Calibri"/>
+              </a:rPr>
+              <a:t>  ·  3.º Bachillerato Tecnológico</a:t>
+            </a:r>
+          </a:p>
+        </p:txBody>
+      </p:sp>
+      <p:sp>
+        <p:nvSpPr>
+          <p:cNvPr id="21" name="Texto 21"/>
+          <p:cNvSpPr txBox="1"/>
+          <p:nvPr/>
+        </p:nvSpPr>
+        <p:spPr>
+          <a:xfrm>
+            <a:off x="868680" y="1371600"/>
+            <a:ext cx="10424160" cy="685800"/>
+          </a:xfrm>
+          <a:prstGeom prst="rect">
+            <a:avLst/>
+          </a:prstGeom>
+          <a:noFill/>
+        </p:spPr>
+        <p:txBody>
+          <a:bodyPr wrap="square" anchor="t" lIns="0" rIns="0" tIns="0" bIns="0">
+            <a:noAutofit/>
+          </a:bodyPr>
+          <a:lstStyle/>
+          <a:p>
+            <a:pPr algn="l">
+              <a:lnSpc>
+                <a:spcPct val="114000"/>
+              </a:lnSpc>
+              <a:spcBef>
+                <a:spcPts val="0"/>
+              </a:spcBef>
+              <a:spcAft>
+                <a:spcPts val="600"/>
+              </a:spcAft>
+            </a:pPr>
+            <a:r>
+              <a:rPr lang="es-UY" sz="1700" b="1" i="0" dirty="0">
+                <a:solidFill>
+                  <a:srgbClr val="2B3A6E"/>
+                </a:solidFill>
+                <a:latin typeface="Calibri"/>
+                <a:cs typeface="Calibri"/>
+              </a:rPr>
+              <a:t xml:space="preserve">La situación. </a:t>
+            </a:r>
+            <a:r>
+              <a:rPr lang="es-UY" sz="1700" b="0" i="0" dirty="0">
+                <a:solidFill>
+                  <a:srgbClr val="222222"/>
+                </a:solidFill>
+                <a:latin typeface="Calibri"/>
+                <a:cs typeface="Calibri"/>
+              </a:rPr>
+              <a:t xml:space="preserve">En un teatro, el público envía saludos y el actor los lee en escena.</a:t>
+            </a:r>
+          </a:p>
+        </p:txBody>
+      </p:sp>
+      <p:sp>
+        <p:nvSpPr>
+          <p:cNvPr id="22" name="Tarjeta 22"/>
+          <p:cNvSpPr/>
+          <p:nvPr/>
+        </p:nvSpPr>
+        <p:spPr>
+          <a:xfrm>
+            <a:off x="868680" y="2514600"/>
+            <a:ext cx="3218688" cy="2240280"/>
+          </a:xfrm>
+          <a:prstGeom prst="roundRect">
+            <a:avLst>
+              <a:gd name="adj" fmla="val 5000"/>
+            </a:avLst>
+          </a:prstGeom>
+          <a:solidFill>
+            <a:srgbClr val="F3F4F7"/>
+          </a:solidFill>
+          <a:ln w="9525">
+            <a:solidFill>
+              <a:srgbClr val="D7DDE7"/>
+            </a:solidFill>
+          </a:ln>
+          <a:effectLst/>
+        </p:spPr>
+        <p:style>
+          <a:lnRef idx="1">
+            <a:schemeClr val="accent1"/>
+          </a:lnRef>
+          <a:fillRef idx="3">
+            <a:schemeClr val="accent1"/>
+          </a:fillRef>
+          <a:effectRef idx="2">
+            <a:schemeClr val="accent1"/>
+          </a:effectRef>
+          <a:fontRef idx="minor">
+            <a:schemeClr val="lt1"/>
+          </a:fontRef>
+        </p:style>
+        <p:txBody>
+          <a:bodyPr rtlCol="0" anchor="t" wrap="square" lIns="164592" rIns="146304" tIns="164592" bIns="91440">
+            <a:noAutofit/>
+          </a:bodyPr>
+          <a:lstStyle/>
+          <a:p>
+            <a:pPr algn="l">
+              <a:lnSpc>
+                <a:spcPct val="110000"/>
+              </a:lnSpc>
+              <a:spcBef>
+                <a:spcPts val="0"/>
+              </a:spcBef>
+              <a:spcAft>
+                <a:spcPts val="600"/>
+              </a:spcAft>
+            </a:pPr>
+            <a:r>
+              <a:rPr lang="es-UY" sz="1500" b="0" i="0" dirty="0">
+                <a:solidFill>
+                  <a:srgbClr val="222222"/>
+                </a:solidFill>
+                <a:latin typeface="Calibri"/>
+                <a:cs typeface="Calibri"/>
+              </a:rPr>
+              <a:t xml:space="preserve">En un guion, lo que va entre paréntesis no se dice: se hace. Por ejemplo, «(apaga las luces)».</a:t>
+            </a:r>
+          </a:p>
+          <a:p>
+            <a:pPr algn="l">
+              <a:lnSpc>
+                <a:spcPct val="110000"/>
+              </a:lnSpc>
+              <a:spcBef>
+                <a:spcPts val="0"/>
+              </a:spcBef>
+              <a:spcAft>
+                <a:spcPts val="600"/>
+              </a:spcAft>
+            </a:pPr>
+            <a:r>
+              <a:rPr lang="es-UY" sz="1500" b="0" i="0" dirty="0">
+                <a:solidFill>
+                  <a:srgbClr val="222222"/>
+                </a:solidFill>
+                <a:latin typeface="Calibri"/>
+                <a:cs typeface="Calibri"/>
+              </a:rPr>
+              <a:t xml:space="preserve">Los saludos del público se pegan dentro del guion para que el actor los lea.</a:t>
+            </a:r>
+          </a:p>
+        </p:txBody>
+      </p:sp>
+      <p:sp>
+        <p:nvSpPr>
+          <p:cNvPr id="23" name="Etiqueta 23"/>
+          <p:cNvSpPr/>
+          <p:nvPr/>
+        </p:nvSpPr>
+        <p:spPr>
+          <a:xfrm>
+            <a:off x="2350008" y="2240280"/>
+            <a:ext cx="1737360" cy="256032"/>
+          </a:xfrm>
+          <a:prstGeom prst="roundRect">
+            <a:avLst>
+              <a:gd name="adj" fmla="val 50000"/>
+            </a:avLst>
+          </a:prstGeom>
+          <a:solidFill>
+            <a:srgbClr val="2B3A6E"/>
+          </a:solidFill>
+          <a:ln>
+            <a:noFill/>
+          </a:ln>
+          <a:effectLst/>
+        </p:spPr>
+        <p:style>
+          <a:lnRef idx="1">
+            <a:schemeClr val="accent1"/>
+          </a:lnRef>
+          <a:fillRef idx="3">
+            <a:schemeClr val="accent1"/>
+          </a:fillRef>
+          <a:effectRef idx="2">
+            <a:schemeClr val="accent1"/>
+          </a:effectRef>
+          <a:fontRef idx="minor">
+            <a:schemeClr val="lt1"/>
+          </a:fontRef>
+        </p:style>
+        <p:txBody>
+          <a:bodyPr rtlCol="0" anchor="ctr" tIns="0" bIns="0"/>
+          <a:lstStyle/>
+          <a:p>
+            <a:pPr algn="ctr"/>
+            <a:r>
+              <a:rPr lang="es-UY" sz="1000" b="1" i="0" dirty="0">
+                <a:solidFill>
+                  <a:srgbClr val="FFFFFF"/>
+                </a:solidFill>
+                <a:latin typeface="Calibri"/>
+                <a:cs typeface="Calibri"/>
+              </a:rPr>
+              <a:t xml:space="preserve">CÓMO FUNCIONA</a:t>
+            </a:r>
+          </a:p>
+        </p:txBody>
+      </p:sp>
+      <p:sp>
+        <p:nvSpPr>
+          <p:cNvPr id="24" name="Flecha 24"/>
+          <p:cNvSpPr/>
+          <p:nvPr/>
+        </p:nvSpPr>
+        <p:spPr>
+          <a:xfrm>
+            <a:off x="4206240" y="3497580"/>
+            <a:ext cx="146304" cy="274320"/>
+          </a:xfrm>
+          <a:prstGeom prst="chevron">
+            <a:avLst/>
+          </a:prstGeom>
+          <a:solidFill>
+            <a:srgbClr val="C2CAD6"/>
+          </a:solidFill>
+          <a:ln>
+            <a:noFill/>
+          </a:ln>
+          <a:effectLst/>
+        </p:spPr>
+        <p:style>
+          <a:lnRef idx="1">
+            <a:schemeClr val="accent1"/>
+          </a:lnRef>
+          <a:fillRef idx="3">
+            <a:schemeClr val="accent1"/>
+          </a:fillRef>
+          <a:effectRef idx="2">
+            <a:schemeClr val="accent1"/>
+          </a:effectRef>
+          <a:fontRef idx="minor">
+            <a:schemeClr val="lt1"/>
+          </a:fontRef>
+        </p:style>
+      </p:sp>
+      <p:sp>
+        <p:nvSpPr>
+          <p:cNvPr id="25" name="Tarjeta 25"/>
+          <p:cNvSpPr/>
+          <p:nvPr/>
+        </p:nvSpPr>
+        <p:spPr>
+          <a:xfrm>
+            <a:off x="4471416" y="2514600"/>
+            <a:ext cx="3218688" cy="2240280"/>
+          </a:xfrm>
+          <a:prstGeom prst="roundRect">
+            <a:avLst>
+              <a:gd name="adj" fmla="val 5000"/>
+            </a:avLst>
+          </a:prstGeom>
+          <a:solidFill>
+            <a:srgbClr val="F3F4F7"/>
+          </a:solidFill>
+          <a:ln w="9525">
+            <a:solidFill>
+              <a:srgbClr val="D7DDE7"/>
+            </a:solidFill>
+          </a:ln>
+          <a:effectLst/>
+        </p:spPr>
+        <p:style>
+          <a:lnRef idx="1">
+            <a:schemeClr val="accent1"/>
+          </a:lnRef>
+          <a:fillRef idx="3">
+            <a:schemeClr val="accent1"/>
+          </a:fillRef>
+          <a:effectRef idx="2">
+            <a:schemeClr val="accent1"/>
+          </a:effectRef>
+          <a:fontRef idx="minor">
+            <a:schemeClr val="lt1"/>
+          </a:fontRef>
+        </p:style>
+        <p:txBody>
+          <a:bodyPr rtlCol="0" anchor="t" wrap="square" lIns="164592" rIns="146304" tIns="164592" bIns="91440">
+            <a:noAutofit/>
+          </a:bodyPr>
+          <a:lstStyle/>
+          <a:p>
+            <a:pPr algn="l">
+              <a:lnSpc>
+                <a:spcPct val="110000"/>
+              </a:lnSpc>
+              <a:spcBef>
+                <a:spcPts val="0"/>
+              </a:spcBef>
+              <a:spcAft>
+                <a:spcPts val="600"/>
+              </a:spcAft>
+            </a:pPr>
+            <a:r>
+              <a:rPr lang="es-UY" sz="1500" b="0" i="0" dirty="0">
+                <a:solidFill>
+                  <a:srgbClr val="222222"/>
+                </a:solidFill>
+                <a:latin typeface="Calibri"/>
+                <a:cs typeface="Calibri"/>
+              </a:rPr>
+              <a:t xml:space="preserve">Alguien envía: «Saludos a Ana (apaga las luces y se va)».</a:t>
+            </a:r>
+          </a:p>
+          <a:p>
+            <a:pPr algn="l">
+              <a:lnSpc>
+                <a:spcPct val="110000"/>
+              </a:lnSpc>
+              <a:spcBef>
+                <a:spcPts val="0"/>
+              </a:spcBef>
+              <a:spcAft>
+                <a:spcPts val="600"/>
+              </a:spcAft>
+            </a:pPr>
+            <a:r>
+              <a:rPr lang="es-UY" sz="1500" b="0" i="0" dirty="0">
+                <a:solidFill>
+                  <a:srgbClr val="222222"/>
+                </a:solidFill>
+                <a:latin typeface="Calibri"/>
+                <a:cs typeface="Calibri"/>
+              </a:rPr>
+              <a:t xml:space="preserve">El actor dice «Saludos a Ana» y después apaga las luces y se va: para él, el paréntesis es una orden.</a:t>
+            </a:r>
+          </a:p>
+        </p:txBody>
+      </p:sp>
+      <p:sp>
+        <p:nvSpPr>
+          <p:cNvPr id="26" name="Etiqueta 26"/>
+          <p:cNvSpPr/>
+          <p:nvPr/>
+        </p:nvSpPr>
+        <p:spPr>
+          <a:xfrm>
+            <a:off x="5952744" y="2240280"/>
+            <a:ext cx="1737360" cy="256032"/>
+          </a:xfrm>
+          <a:prstGeom prst="roundRect">
+            <a:avLst>
+              <a:gd name="adj" fmla="val 50000"/>
+            </a:avLst>
+          </a:prstGeom>
+          <a:solidFill>
+            <a:srgbClr val="B0362F"/>
+          </a:solidFill>
+          <a:ln>
+            <a:noFill/>
+          </a:ln>
+          <a:effectLst/>
+        </p:spPr>
+        <p:style>
+          <a:lnRef idx="1">
+            <a:schemeClr val="accent1"/>
+          </a:lnRef>
+          <a:fillRef idx="3">
+            <a:schemeClr val="accent1"/>
+          </a:fillRef>
+          <a:effectRef idx="2">
+            <a:schemeClr val="accent1"/>
+          </a:effectRef>
+          <a:fontRef idx="minor">
+            <a:schemeClr val="lt1"/>
+          </a:fontRef>
+        </p:style>
+        <p:txBody>
+          <a:bodyPr rtlCol="0" anchor="ctr" tIns="0" bIns="0"/>
+          <a:lstStyle/>
+          <a:p>
+            <a:pPr algn="ctr"/>
+            <a:r>
+              <a:rPr lang="es-UY" sz="1000" b="1" i="0" dirty="0">
+                <a:solidFill>
+                  <a:srgbClr val="FFFFFF"/>
+                </a:solidFill>
+                <a:latin typeface="Calibri"/>
+                <a:cs typeface="Calibri"/>
+              </a:rPr>
+              <a:t xml:space="preserve">EL ATAQUE</a:t>
+            </a:r>
+          </a:p>
+        </p:txBody>
+      </p:sp>
+      <p:sp>
+        <p:nvSpPr>
+          <p:cNvPr id="27" name="Flecha 27"/>
+          <p:cNvSpPr/>
+          <p:nvPr/>
+        </p:nvSpPr>
+        <p:spPr>
+          <a:xfrm>
+            <a:off x="7808976" y="3497580"/>
+            <a:ext cx="146304" cy="274320"/>
+          </a:xfrm>
+          <a:prstGeom prst="chevron">
+            <a:avLst/>
+          </a:prstGeom>
+          <a:solidFill>
+            <a:srgbClr val="C2CAD6"/>
+          </a:solidFill>
+          <a:ln>
+            <a:noFill/>
+          </a:ln>
+          <a:effectLst/>
+        </p:spPr>
+        <p:style>
+          <a:lnRef idx="1">
+            <a:schemeClr val="accent1"/>
+          </a:lnRef>
+          <a:fillRef idx="3">
+            <a:schemeClr val="accent1"/>
+          </a:fillRef>
+          <a:effectRef idx="2">
+            <a:schemeClr val="accent1"/>
+          </a:effectRef>
+          <a:fontRef idx="minor">
+            <a:schemeClr val="lt1"/>
+          </a:fontRef>
+        </p:style>
+      </p:sp>
+      <p:sp>
+        <p:nvSpPr>
+          <p:cNvPr id="28" name="Tarjeta 28"/>
+          <p:cNvSpPr/>
+          <p:nvPr/>
+        </p:nvSpPr>
+        <p:spPr>
+          <a:xfrm>
+            <a:off x="8074152" y="2514600"/>
+            <a:ext cx="3218688" cy="2240280"/>
+          </a:xfrm>
+          <a:prstGeom prst="roundRect">
+            <a:avLst>
+              <a:gd name="adj" fmla="val 5000"/>
+            </a:avLst>
+          </a:prstGeom>
+          <a:solidFill>
+            <a:srgbClr val="F3F4F7"/>
+          </a:solidFill>
+          <a:ln w="9525">
+            <a:solidFill>
+              <a:srgbClr val="D7DDE7"/>
+            </a:solidFill>
+          </a:ln>
+          <a:effectLst/>
+        </p:spPr>
+        <p:style>
+          <a:lnRef idx="1">
+            <a:schemeClr val="accent1"/>
+          </a:lnRef>
+          <a:fillRef idx="3">
+            <a:schemeClr val="accent1"/>
+          </a:fillRef>
+          <a:effectRef idx="2">
+            <a:schemeClr val="accent1"/>
+          </a:effectRef>
+          <a:fontRef idx="minor">
+            <a:schemeClr val="lt1"/>
+          </a:fontRef>
+        </p:style>
+        <p:txBody>
+          <a:bodyPr rtlCol="0" anchor="t" wrap="square" lIns="164592" rIns="146304" tIns="164592" bIns="91440">
+            <a:noAutofit/>
+          </a:bodyPr>
+          <a:lstStyle/>
+          <a:p>
+            <a:pPr algn="l">
+              <a:lnSpc>
+                <a:spcPct val="110000"/>
+              </a:lnSpc>
+              <a:spcBef>
+                <a:spcPts val="0"/>
+              </a:spcBef>
+              <a:spcAft>
+                <a:spcPts val="600"/>
+              </a:spcAft>
+            </a:pPr>
+            <a:r>
+              <a:rPr lang="es-UY" sz="1500" b="0" i="0" dirty="0">
+                <a:solidFill>
+                  <a:srgbClr val="222222"/>
+                </a:solidFill>
+                <a:latin typeface="Calibri"/>
+                <a:cs typeface="Calibri"/>
+              </a:rPr>
+              <a:t xml:space="preserve">Antes de pegar el saludo, sus paréntesis se marcan como texto para leer en voz alta.</a:t>
+            </a:r>
+          </a:p>
+          <a:p>
+            <a:pPr algn="l">
+              <a:lnSpc>
+                <a:spcPct val="110000"/>
+              </a:lnSpc>
+              <a:spcBef>
+                <a:spcPts val="0"/>
+              </a:spcBef>
+              <a:spcAft>
+                <a:spcPts val="600"/>
+              </a:spcAft>
+            </a:pPr>
+            <a:r>
+              <a:rPr lang="es-UY" sz="1500" b="0" i="0" dirty="0">
+                <a:solidFill>
+                  <a:srgbClr val="222222"/>
+                </a:solidFill>
+                <a:latin typeface="Calibri"/>
+                <a:cs typeface="Calibri"/>
+              </a:rPr>
+              <a:t xml:space="preserve">El actor lee la frase completa, paréntesis incluidos, y no hace nada más.</a:t>
+            </a:r>
+          </a:p>
+        </p:txBody>
+      </p:sp>
+      <p:sp>
+        <p:nvSpPr>
+          <p:cNvPr id="29" name="Etiqueta 29"/>
+          <p:cNvSpPr/>
+          <p:nvPr/>
+        </p:nvSpPr>
+        <p:spPr>
+          <a:xfrm>
+            <a:off x="9555480" y="2240280"/>
+            <a:ext cx="1737360" cy="256032"/>
+          </a:xfrm>
+          <a:prstGeom prst="roundRect">
+            <a:avLst>
+              <a:gd name="adj" fmla="val 50000"/>
+            </a:avLst>
+          </a:prstGeom>
+          <a:solidFill>
+            <a:srgbClr val="1E6B3E"/>
+          </a:solidFill>
+          <a:ln>
+            <a:noFill/>
+          </a:ln>
+          <a:effectLst/>
+        </p:spPr>
+        <p:style>
+          <a:lnRef idx="1">
+            <a:schemeClr val="accent1"/>
+          </a:lnRef>
+          <a:fillRef idx="3">
+            <a:schemeClr val="accent1"/>
+          </a:fillRef>
+          <a:effectRef idx="2">
+            <a:schemeClr val="accent1"/>
+          </a:effectRef>
+          <a:fontRef idx="minor">
+            <a:schemeClr val="lt1"/>
+          </a:fontRef>
+        </p:style>
+        <p:txBody>
+          <a:bodyPr rtlCol="0" anchor="ctr" tIns="0" bIns="0"/>
+          <a:lstStyle/>
+          <a:p>
+            <a:pPr algn="ctr"/>
+            <a:r>
+              <a:rPr lang="es-UY" sz="1000" b="1" i="0" dirty="0">
+                <a:solidFill>
+                  <a:srgbClr val="FFFFFF"/>
+                </a:solidFill>
+                <a:latin typeface="Calibri"/>
+                <a:cs typeface="Calibri"/>
+              </a:rPr>
+              <a:t xml:space="preserve">EL PATRÓN</a:t>
+            </a:r>
+          </a:p>
+        </p:txBody>
+      </p:sp>
+      <p:sp>
+        <p:nvSpPr>
+          <p:cNvPr id="30" name="Tarjeta 30"/>
+          <p:cNvSpPr/>
+          <p:nvPr/>
+        </p:nvSpPr>
+        <p:spPr>
+          <a:xfrm>
+            <a:off x="868680" y="5074920"/>
+            <a:ext cx="10424160" cy="566928"/>
+          </a:xfrm>
+          <a:prstGeom prst="roundRect">
+            <a:avLst>
+              <a:gd name="adj" fmla="val 5000"/>
+            </a:avLst>
+          </a:prstGeom>
+          <a:solidFill>
+            <a:srgbClr val="FFFFFF"/>
+          </a:solidFill>
+          <a:ln w="9525">
+            <a:solidFill>
+              <a:srgbClr val="C2CAD6"/>
+            </a:solidFill>
+          </a:ln>
+          <a:effectLst/>
+        </p:spPr>
+        <p:style>
+          <a:lnRef idx="1">
+            <a:schemeClr val="accent1"/>
+          </a:lnRef>
+          <a:fillRef idx="3">
+            <a:schemeClr val="accent1"/>
+          </a:fillRef>
+          <a:effectRef idx="2">
+            <a:schemeClr val="accent1"/>
+          </a:effectRef>
+          <a:fontRef idx="minor">
+            <a:schemeClr val="lt1"/>
+          </a:fontRef>
+        </p:style>
+        <p:txBody>
+          <a:bodyPr rtlCol="0" anchor="ctr" wrap="square" lIns="164592" rIns="146304" tIns="164592" bIns="91440">
+            <a:noAutofit/>
+          </a:bodyPr>
+          <a:lstStyle/>
+          <a:p>
+            <a:pPr algn="l">
+              <a:lnSpc>
+                <a:spcPct val="105000"/>
+              </a:lnSpc>
+              <a:spcBef>
+                <a:spcPts val="0"/>
+              </a:spcBef>
+              <a:spcAft>
+                <a:spcPts val="0"/>
+              </a:spcAft>
+            </a:pPr>
+            <a:r>
+              <a:rPr lang="es-UY" sz="1500" b="1" i="0" dirty="0">
+                <a:solidFill>
+                  <a:srgbClr val="2B3A6E"/>
+                </a:solidFill>
+                <a:latin typeface="Calibri"/>
+                <a:cs typeface="Calibri"/>
+              </a:rPr>
+              <a:t xml:space="preserve">En la aplicación. </a:t>
+            </a:r>
+            <a:r>
+              <a:rPr lang="es-UY" sz="1500" b="0" i="0" dirty="0">
+                <a:solidFill>
+                  <a:srgbClr val="222222"/>
+                </a:solidFill>
+                <a:latin typeface="Calibri"/>
+                <a:cs typeface="Calibri"/>
+              </a:rPr>
+              <a:t xml:space="preserve">el actor es el navegador, el guion es la página y los paréntesis son etiquetas como &lt;script&gt;.</a:t>
+            </a:r>
+          </a:p>
+        </p:txBody>
+      </p:sp>
+    </p:spTree>
+  </p:cSld>
+  <p:clrMapOvr>
+    <a:masterClrMapping/>
+  </p:clrMapOvr>
+</p:sld>
+</file>
+
+<file path=ppt/slides/slide22.xml><?xml version="1.0" encoding="utf-8"?>
+<p:sld xmlns:a="http://schemas.openxmlformats.org/drawingml/2006/main" xmlns:p="http://schemas.openxmlformats.org/presentationml/2006/main" xmlns:r="http://schemas.openxmlformats.org/officeDocument/2006/relationships">
+  <p:cSld>
+    <p:spTree>
+      <p:nvGrpSpPr>
+        <p:cNvPr id="1" name=""/>
+        <p:cNvGrpSpPr/>
+        <p:nvPr/>
+      </p:nvGrpSpPr>
+      <p:grpSpPr/>
+      <p:sp>
+        <p:nvSpPr>
+          <p:cNvPr id="2" name="Rectangle 1"/>
+          <p:cNvSpPr/>
+          <p:nvPr/>
+        </p:nvSpPr>
+        <p:spPr>
+          <a:xfrm>
+            <a:off x="0" y="0"/>
+            <a:ext cx="292608" cy="6858000"/>
+          </a:xfrm>
+          <a:prstGeom prst="rect">
+            <a:avLst/>
+          </a:prstGeom>
+          <a:pattFill prst="ltUpDiag">
+            <a:fgClr>
+              <a:srgbClr val="C2CAD6"/>
+            </a:fgClr>
+            <a:bgClr>
+              <a:srgbClr val="FFFFFF"/>
+            </a:bgClr>
+          </a:pattFill>
+          <a:ln>
+            <a:noFill/>
+          </a:ln>
+          <a:effectLst/>
+        </p:spPr>
+        <p:style>
+          <a:lnRef idx="1">
+            <a:schemeClr val="accent1"/>
+          </a:lnRef>
+          <a:fillRef idx="3">
+            <a:schemeClr val="accent1"/>
+          </a:fillRef>
+          <a:effectRef idx="2">
+            <a:schemeClr val="accent1"/>
+          </a:effectRef>
+          <a:fontRef idx="minor">
+            <a:schemeClr val="lt1"/>
+          </a:fontRef>
+        </p:style>
+        <p:txBody>
+          <a:bodyPr rtlCol="0" anchor="ctr"/>
+          <a:lstStyle/>
+          <a:p>
+            <a:pPr algn="ctr"/>
+          </a:p>
+        </p:txBody>
+      </p:sp>
+      <p:sp>
+        <p:nvSpPr>
+          <p:cNvPr id="3" name="TextBox 2"/>
+          <p:cNvSpPr txBox="1"/>
+          <p:nvPr/>
+        </p:nvSpPr>
+        <p:spPr>
+          <a:xfrm>
+            <a:off x="822960" y="420624"/>
+            <a:ext cx="10424160" cy="822960"/>
+          </a:xfrm>
+          <a:prstGeom prst="rect">
+            <a:avLst/>
+          </a:prstGeom>
+          <a:noFill/>
+        </p:spPr>
+        <p:txBody>
+          <a:bodyPr wrap="square" anchor="t" lIns="0" rIns="0" tIns="0" bIns="0">
+            <a:spAutoFit/>
+          </a:bodyPr>
+          <a:lstStyle/>
+          <a:p>
+            <a:pPr algn="l">
+              <a:lnSpc>
+                <a:spcPct val="100000"/>
+              </a:lnSpc>
+              <a:spcBef>
+                <a:spcPts val="0"/>
+              </a:spcBef>
+              <a:spcAft>
+                <a:spcPts val="600"/>
+              </a:spcAft>
+            </a:pPr>
+            <a:r>
+              <a:rPr sz="2900" b="0" i="0">
+                <a:solidFill>
+                  <a:srgbClr val="2B3A6E"/>
+                </a:solidFill>
+                <a:latin typeface="Calibri"/>
+                <a:cs typeface="Calibri"/>
+              </a:rPr>
+              <a:t>Falla 3 · IDOR: ejemplo cotidiano</a:t>
+            </a:r>
+          </a:p>
+        </p:txBody>
+      </p:sp>
+      <p:sp>
+        <p:nvSpPr>
+          <p:cNvPr id="4" name="Rectangle 3"/>
+          <p:cNvSpPr/>
+          <p:nvPr/>
+        </p:nvSpPr>
+        <p:spPr>
+          <a:xfrm>
+            <a:off x="822960" y="6327648"/>
+            <a:ext cx="10561320" cy="30480"/>
+          </a:xfrm>
+          <a:prstGeom prst="rect">
+            <a:avLst/>
+          </a:prstGeom>
+          <a:solidFill>
+            <a:srgbClr val="2B3A6E"/>
+          </a:solidFill>
+          <a:ln>
+            <a:noFill/>
+          </a:ln>
+          <a:effectLst/>
+        </p:spPr>
+        <p:style>
+          <a:lnRef idx="1">
+            <a:schemeClr val="accent1"/>
+          </a:lnRef>
+          <a:fillRef idx="3">
+            <a:schemeClr val="accent1"/>
+          </a:fillRef>
+          <a:effectRef idx="2">
+            <a:schemeClr val="accent1"/>
+          </a:effectRef>
+          <a:fontRef idx="minor">
+            <a:schemeClr val="lt1"/>
+          </a:fontRef>
+        </p:style>
+        <p:txBody>
+          <a:bodyPr rtlCol="0" anchor="ctr"/>
+          <a:lstStyle/>
+          <a:p>
+            <a:pPr algn="ctr"/>
+          </a:p>
+        </p:txBody>
+      </p:sp>
+      <p:sp>
+        <p:nvSpPr>
+          <p:cNvPr id="5" name="TextBox 4"/>
+          <p:cNvSpPr txBox="1"/>
+          <p:nvPr/>
+        </p:nvSpPr>
+        <p:spPr>
+          <a:xfrm>
+            <a:off x="8351215" y="6400800"/>
+            <a:ext cx="3657600" cy="274320"/>
+          </a:xfrm>
+          <a:prstGeom prst="rect">
+            <a:avLst/>
+          </a:prstGeom>
+          <a:noFill/>
+        </p:spPr>
+        <p:txBody>
+          <a:bodyPr wrap="square" anchor="t" lIns="0" rIns="0" tIns="0" bIns="0">
+            <a:spAutoFit/>
+          </a:bodyPr>
+          <a:lstStyle/>
+          <a:p>
+            <a:pPr algn="r">
+              <a:lnSpc>
+                <a:spcPct val="100000"/>
+              </a:lnSpc>
+              <a:spcBef>
+                <a:spcPts val="0"/>
+              </a:spcBef>
+              <a:spcAft>
+                <a:spcPts val="600"/>
+              </a:spcAft>
+            </a:pPr>
+            <a:r>
+              <a:rPr sz="950" b="1" i="0">
+                <a:solidFill>
+                  <a:srgbClr val="5B667A"/>
+                </a:solidFill>
+                <a:latin typeface="Calibri"/>
+                <a:cs typeface="Calibri"/>
+              </a:rPr>
+              <a:t>CIBERSEGURIDAD</a:t>
+            </a:r>
+            <a:r>
+              <a:rPr sz="950" b="0" i="0">
+                <a:solidFill>
+                  <a:srgbClr val="5B667A"/>
+                </a:solidFill>
+                <a:latin typeface="Calibri"/>
+                <a:cs typeface="Calibri"/>
+              </a:rPr>
+              <a:t>  ·  3.º Bachillerato Tecnológico</a:t>
+            </a:r>
+          </a:p>
+        </p:txBody>
+      </p:sp>
+      <p:sp>
+        <p:nvSpPr>
+          <p:cNvPr id="21" name="Texto 21"/>
+          <p:cNvSpPr txBox="1"/>
+          <p:nvPr/>
+        </p:nvSpPr>
+        <p:spPr>
+          <a:xfrm>
+            <a:off x="868680" y="1371600"/>
+            <a:ext cx="10424160" cy="685800"/>
+          </a:xfrm>
+          <a:prstGeom prst="rect">
+            <a:avLst/>
+          </a:prstGeom>
+          <a:noFill/>
+        </p:spPr>
+        <p:txBody>
+          <a:bodyPr wrap="square" anchor="t" lIns="0" rIns="0" tIns="0" bIns="0">
+            <a:noAutofit/>
+          </a:bodyPr>
+          <a:lstStyle/>
+          <a:p>
+            <a:pPr algn="l">
+              <a:lnSpc>
+                <a:spcPct val="114000"/>
+              </a:lnSpc>
+              <a:spcBef>
+                <a:spcPts val="0"/>
+              </a:spcBef>
+              <a:spcAft>
+                <a:spcPts val="600"/>
+              </a:spcAft>
+            </a:pPr>
+            <a:r>
+              <a:rPr lang="es-UY" sz="1700" b="1" i="0" dirty="0">
+                <a:solidFill>
+                  <a:srgbClr val="2B3A6E"/>
+                </a:solidFill>
+                <a:latin typeface="Calibri"/>
+                <a:cs typeface="Calibri"/>
+              </a:rPr>
+              <a:t xml:space="preserve">La situación. </a:t>
+            </a:r>
+            <a:r>
+              <a:rPr lang="es-UY" sz="1700" b="0" i="0" dirty="0">
+                <a:solidFill>
+                  <a:srgbClr val="222222"/>
+                </a:solidFill>
+                <a:latin typeface="Calibri"/>
+                <a:cs typeface="Calibri"/>
+              </a:rPr>
+              <a:t xml:space="preserve">La bedelía de un liceo guarda los boletines en carpetas numeradas.</a:t>
+            </a:r>
+          </a:p>
+        </p:txBody>
+      </p:sp>
+      <p:sp>
+        <p:nvSpPr>
+          <p:cNvPr id="22" name="Tarjeta 22"/>
+          <p:cNvSpPr/>
+          <p:nvPr/>
+        </p:nvSpPr>
+        <p:spPr>
+          <a:xfrm>
+            <a:off x="868680" y="2514600"/>
+            <a:ext cx="3218688" cy="2240280"/>
+          </a:xfrm>
+          <a:prstGeom prst="roundRect">
+            <a:avLst>
+              <a:gd name="adj" fmla="val 5000"/>
+            </a:avLst>
+          </a:prstGeom>
+          <a:solidFill>
+            <a:srgbClr val="F3F4F7"/>
+          </a:solidFill>
+          <a:ln w="9525">
+            <a:solidFill>
+              <a:srgbClr val="D7DDE7"/>
+            </a:solidFill>
+          </a:ln>
+          <a:effectLst/>
+        </p:spPr>
+        <p:style>
+          <a:lnRef idx="1">
+            <a:schemeClr val="accent1"/>
+          </a:lnRef>
+          <a:fillRef idx="3">
+            <a:schemeClr val="accent1"/>
+          </a:fillRef>
+          <a:effectRef idx="2">
+            <a:schemeClr val="accent1"/>
+          </a:effectRef>
+          <a:fontRef idx="minor">
+            <a:schemeClr val="lt1"/>
+          </a:fontRef>
+        </p:style>
+        <p:txBody>
+          <a:bodyPr rtlCol="0" anchor="t" wrap="square" lIns="164592" rIns="146304" tIns="164592" bIns="91440">
+            <a:noAutofit/>
+          </a:bodyPr>
+          <a:lstStyle/>
+          <a:p>
+            <a:pPr algn="l">
+              <a:lnSpc>
+                <a:spcPct val="110000"/>
+              </a:lnSpc>
+              <a:spcBef>
+                <a:spcPts val="0"/>
+              </a:spcBef>
+              <a:spcAft>
+                <a:spcPts val="600"/>
+              </a:spcAft>
+            </a:pPr>
+            <a:r>
+              <a:rPr lang="es-UY" sz="1500" b="0" i="0" dirty="0">
+                <a:solidFill>
+                  <a:srgbClr val="222222"/>
+                </a:solidFill>
+                <a:latin typeface="Calibri"/>
+                <a:cs typeface="Calibri"/>
+              </a:rPr>
+              <a:t xml:space="preserve">El estudiante muestra el carné y dice el número de su carpeta.</a:t>
+            </a:r>
+          </a:p>
+          <a:p>
+            <a:pPr algn="l">
+              <a:lnSpc>
+                <a:spcPct val="110000"/>
+              </a:lnSpc>
+              <a:spcBef>
+                <a:spcPts val="0"/>
+              </a:spcBef>
+              <a:spcAft>
+                <a:spcPts val="600"/>
+              </a:spcAft>
+            </a:pPr>
+            <a:r>
+              <a:rPr lang="es-UY" sz="1500" b="0" i="0" dirty="0">
+                <a:solidFill>
+                  <a:srgbClr val="222222"/>
+                </a:solidFill>
+                <a:latin typeface="Calibri"/>
+                <a:cs typeface="Calibri"/>
+              </a:rPr>
+              <a:t xml:space="preserve">La bedelía controla que el carné sea válido y entrega la carpeta pedida.</a:t>
+            </a:r>
+          </a:p>
+        </p:txBody>
+      </p:sp>
+      <p:sp>
+        <p:nvSpPr>
+          <p:cNvPr id="23" name="Etiqueta 23"/>
+          <p:cNvSpPr/>
+          <p:nvPr/>
+        </p:nvSpPr>
+        <p:spPr>
+          <a:xfrm>
+            <a:off x="2350008" y="2240280"/>
+            <a:ext cx="1737360" cy="256032"/>
+          </a:xfrm>
+          <a:prstGeom prst="roundRect">
+            <a:avLst>
+              <a:gd name="adj" fmla="val 50000"/>
+            </a:avLst>
+          </a:prstGeom>
+          <a:solidFill>
+            <a:srgbClr val="2B3A6E"/>
+          </a:solidFill>
+          <a:ln>
+            <a:noFill/>
+          </a:ln>
+          <a:effectLst/>
+        </p:spPr>
+        <p:style>
+          <a:lnRef idx="1">
+            <a:schemeClr val="accent1"/>
+          </a:lnRef>
+          <a:fillRef idx="3">
+            <a:schemeClr val="accent1"/>
+          </a:fillRef>
+          <a:effectRef idx="2">
+            <a:schemeClr val="accent1"/>
+          </a:effectRef>
+          <a:fontRef idx="minor">
+            <a:schemeClr val="lt1"/>
+          </a:fontRef>
+        </p:style>
+        <p:txBody>
+          <a:bodyPr rtlCol="0" anchor="ctr" tIns="0" bIns="0"/>
+          <a:lstStyle/>
+          <a:p>
+            <a:pPr algn="ctr"/>
+            <a:r>
+              <a:rPr lang="es-UY" sz="1000" b="1" i="0" dirty="0">
+                <a:solidFill>
+                  <a:srgbClr val="FFFFFF"/>
+                </a:solidFill>
+                <a:latin typeface="Calibri"/>
+                <a:cs typeface="Calibri"/>
+              </a:rPr>
+              <a:t xml:space="preserve">CÓMO FUNCIONA</a:t>
+            </a:r>
+          </a:p>
+        </p:txBody>
+      </p:sp>
+      <p:sp>
+        <p:nvSpPr>
+          <p:cNvPr id="24" name="Flecha 24"/>
+          <p:cNvSpPr/>
+          <p:nvPr/>
+        </p:nvSpPr>
+        <p:spPr>
+          <a:xfrm>
+            <a:off x="4206240" y="3497580"/>
+            <a:ext cx="146304" cy="274320"/>
+          </a:xfrm>
+          <a:prstGeom prst="chevron">
+            <a:avLst/>
+          </a:prstGeom>
+          <a:solidFill>
+            <a:srgbClr val="C2CAD6"/>
+          </a:solidFill>
+          <a:ln>
+            <a:noFill/>
+          </a:ln>
+          <a:effectLst/>
+        </p:spPr>
+        <p:style>
+          <a:lnRef idx="1">
+            <a:schemeClr val="accent1"/>
+          </a:lnRef>
+          <a:fillRef idx="3">
+            <a:schemeClr val="accent1"/>
+          </a:fillRef>
+          <a:effectRef idx="2">
+            <a:schemeClr val="accent1"/>
+          </a:effectRef>
+          <a:fontRef idx="minor">
+            <a:schemeClr val="lt1"/>
+          </a:fontRef>
+        </p:style>
+      </p:sp>
+      <p:sp>
+        <p:nvSpPr>
+          <p:cNvPr id="25" name="Tarjeta 25"/>
+          <p:cNvSpPr/>
+          <p:nvPr/>
+        </p:nvSpPr>
+        <p:spPr>
+          <a:xfrm>
+            <a:off x="4471416" y="2514600"/>
+            <a:ext cx="3218688" cy="2240280"/>
+          </a:xfrm>
+          <a:prstGeom prst="roundRect">
+            <a:avLst>
+              <a:gd name="adj" fmla="val 5000"/>
+            </a:avLst>
+          </a:prstGeom>
+          <a:solidFill>
+            <a:srgbClr val="F3F4F7"/>
+          </a:solidFill>
+          <a:ln w="9525">
+            <a:solidFill>
+              <a:srgbClr val="D7DDE7"/>
+            </a:solidFill>
+          </a:ln>
+          <a:effectLst/>
+        </p:spPr>
+        <p:style>
+          <a:lnRef idx="1">
+            <a:schemeClr val="accent1"/>
+          </a:lnRef>
+          <a:fillRef idx="3">
+            <a:schemeClr val="accent1"/>
+          </a:fillRef>
+          <a:effectRef idx="2">
+            <a:schemeClr val="accent1"/>
+          </a:effectRef>
+          <a:fontRef idx="minor">
+            <a:schemeClr val="lt1"/>
+          </a:fontRef>
+        </p:style>
+        <p:txBody>
+          <a:bodyPr rtlCol="0" anchor="t" wrap="square" lIns="164592" rIns="146304" tIns="164592" bIns="91440">
+            <a:noAutofit/>
+          </a:bodyPr>
+          <a:lstStyle/>
+          <a:p>
+            <a:pPr algn="l">
+              <a:lnSpc>
+                <a:spcPct val="110000"/>
+              </a:lnSpc>
+              <a:spcBef>
+                <a:spcPts val="0"/>
+              </a:spcBef>
+              <a:spcAft>
+                <a:spcPts val="600"/>
+              </a:spcAft>
+            </a:pPr>
+            <a:r>
+              <a:rPr lang="es-UY" sz="1500" b="0" i="0" dirty="0">
+                <a:solidFill>
+                  <a:srgbClr val="222222"/>
+                </a:solidFill>
+                <a:latin typeface="Calibri"/>
+                <a:cs typeface="Calibri"/>
+              </a:rPr>
+              <a:t xml:space="preserve">Un estudiante muestra su carné, que es válido, y pide la carpeta 125, que es de otra persona.</a:t>
+            </a:r>
+          </a:p>
+          <a:p>
+            <a:pPr algn="l">
+              <a:lnSpc>
+                <a:spcPct val="110000"/>
+              </a:lnSpc>
+              <a:spcBef>
+                <a:spcPts val="0"/>
+              </a:spcBef>
+              <a:spcAft>
+                <a:spcPts val="600"/>
+              </a:spcAft>
+            </a:pPr>
+            <a:r>
+              <a:rPr lang="es-UY" sz="1500" b="0" i="0" dirty="0">
+                <a:solidFill>
+                  <a:srgbClr val="222222"/>
+                </a:solidFill>
+                <a:latin typeface="Calibri"/>
+                <a:cs typeface="Calibri"/>
+              </a:rPr>
+              <a:t xml:space="preserve">Como solo se controló el carné, se la entregan.</a:t>
+            </a:r>
+          </a:p>
+        </p:txBody>
+      </p:sp>
+      <p:sp>
+        <p:nvSpPr>
+          <p:cNvPr id="26" name="Etiqueta 26"/>
+          <p:cNvSpPr/>
+          <p:nvPr/>
+        </p:nvSpPr>
+        <p:spPr>
+          <a:xfrm>
+            <a:off x="5952744" y="2240280"/>
+            <a:ext cx="1737360" cy="256032"/>
+          </a:xfrm>
+          <a:prstGeom prst="roundRect">
+            <a:avLst>
+              <a:gd name="adj" fmla="val 50000"/>
+            </a:avLst>
+          </a:prstGeom>
+          <a:solidFill>
+            <a:srgbClr val="B0362F"/>
+          </a:solidFill>
+          <a:ln>
+            <a:noFill/>
+          </a:ln>
+          <a:effectLst/>
+        </p:spPr>
+        <p:style>
+          <a:lnRef idx="1">
+            <a:schemeClr val="accent1"/>
+          </a:lnRef>
+          <a:fillRef idx="3">
+            <a:schemeClr val="accent1"/>
+          </a:fillRef>
+          <a:effectRef idx="2">
+            <a:schemeClr val="accent1"/>
+          </a:effectRef>
+          <a:fontRef idx="minor">
+            <a:schemeClr val="lt1"/>
+          </a:fontRef>
+        </p:style>
+        <p:txBody>
+          <a:bodyPr rtlCol="0" anchor="ctr" tIns="0" bIns="0"/>
+          <a:lstStyle/>
+          <a:p>
+            <a:pPr algn="ctr"/>
+            <a:r>
+              <a:rPr lang="es-UY" sz="1000" b="1" i="0" dirty="0">
+                <a:solidFill>
+                  <a:srgbClr val="FFFFFF"/>
+                </a:solidFill>
+                <a:latin typeface="Calibri"/>
+                <a:cs typeface="Calibri"/>
+              </a:rPr>
+              <a:t xml:space="preserve">EL ATAQUE</a:t>
+            </a:r>
+          </a:p>
+        </p:txBody>
+      </p:sp>
+      <p:sp>
+        <p:nvSpPr>
+          <p:cNvPr id="27" name="Flecha 27"/>
+          <p:cNvSpPr/>
+          <p:nvPr/>
+        </p:nvSpPr>
+        <p:spPr>
+          <a:xfrm>
+            <a:off x="7808976" y="3497580"/>
+            <a:ext cx="146304" cy="274320"/>
+          </a:xfrm>
+          <a:prstGeom prst="chevron">
+            <a:avLst/>
+          </a:prstGeom>
+          <a:solidFill>
+            <a:srgbClr val="C2CAD6"/>
+          </a:solidFill>
+          <a:ln>
+            <a:noFill/>
+          </a:ln>
+          <a:effectLst/>
+        </p:spPr>
+        <p:style>
+          <a:lnRef idx="1">
+            <a:schemeClr val="accent1"/>
+          </a:lnRef>
+          <a:fillRef idx="3">
+            <a:schemeClr val="accent1"/>
+          </a:fillRef>
+          <a:effectRef idx="2">
+            <a:schemeClr val="accent1"/>
+          </a:effectRef>
+          <a:fontRef idx="minor">
+            <a:schemeClr val="lt1"/>
+          </a:fontRef>
+        </p:style>
+      </p:sp>
+      <p:sp>
+        <p:nvSpPr>
+          <p:cNvPr id="28" name="Tarjeta 28"/>
+          <p:cNvSpPr/>
+          <p:nvPr/>
+        </p:nvSpPr>
+        <p:spPr>
+          <a:xfrm>
+            <a:off x="8074152" y="2514600"/>
+            <a:ext cx="3218688" cy="2240280"/>
+          </a:xfrm>
+          <a:prstGeom prst="roundRect">
+            <a:avLst>
+              <a:gd name="adj" fmla="val 5000"/>
+            </a:avLst>
+          </a:prstGeom>
+          <a:solidFill>
+            <a:srgbClr val="F3F4F7"/>
+          </a:solidFill>
+          <a:ln w="9525">
+            <a:solidFill>
+              <a:srgbClr val="D7DDE7"/>
+            </a:solidFill>
+          </a:ln>
+          <a:effectLst/>
+        </p:spPr>
+        <p:style>
+          <a:lnRef idx="1">
+            <a:schemeClr val="accent1"/>
+          </a:lnRef>
+          <a:fillRef idx="3">
+            <a:schemeClr val="accent1"/>
+          </a:fillRef>
+          <a:effectRef idx="2">
+            <a:schemeClr val="accent1"/>
+          </a:effectRef>
+          <a:fontRef idx="minor">
+            <a:schemeClr val="lt1"/>
+          </a:fontRef>
+        </p:style>
+        <p:txBody>
+          <a:bodyPr rtlCol="0" anchor="t" wrap="square" lIns="164592" rIns="146304" tIns="164592" bIns="91440">
+            <a:noAutofit/>
+          </a:bodyPr>
+          <a:lstStyle/>
+          <a:p>
+            <a:pPr algn="l">
+              <a:lnSpc>
+                <a:spcPct val="110000"/>
+              </a:lnSpc>
+              <a:spcBef>
+                <a:spcPts val="0"/>
+              </a:spcBef>
+              <a:spcAft>
+                <a:spcPts val="600"/>
+              </a:spcAft>
+            </a:pPr>
+            <a:r>
+              <a:rPr lang="es-UY" sz="1500" b="0" i="0" dirty="0">
+                <a:solidFill>
+                  <a:srgbClr val="222222"/>
+                </a:solidFill>
+                <a:latin typeface="Calibri"/>
+                <a:cs typeface="Calibri"/>
+              </a:rPr>
+              <a:t xml:space="preserve">Antes de entregar, la bedelía controla también que la carpeta 125 sea de quien la pide, o que quien la pide sea adscripta.</a:t>
+            </a:r>
+          </a:p>
+          <a:p>
+            <a:pPr algn="l">
+              <a:lnSpc>
+                <a:spcPct val="110000"/>
+              </a:lnSpc>
+              <a:spcBef>
+                <a:spcPts val="0"/>
+              </a:spcBef>
+              <a:spcAft>
+                <a:spcPts val="600"/>
+              </a:spcAft>
+            </a:pPr>
+            <a:r>
+              <a:rPr lang="es-UY" sz="1500" b="0" i="0" dirty="0">
+                <a:solidFill>
+                  <a:srgbClr val="222222"/>
+                </a:solidFill>
+                <a:latin typeface="Calibri"/>
+                <a:cs typeface="Calibri"/>
+              </a:rPr>
+              <a:t xml:space="preserve">Si no corresponde, no la entrega.</a:t>
+            </a:r>
+          </a:p>
+        </p:txBody>
+      </p:sp>
+      <p:sp>
+        <p:nvSpPr>
+          <p:cNvPr id="29" name="Etiqueta 29"/>
+          <p:cNvSpPr/>
+          <p:nvPr/>
+        </p:nvSpPr>
+        <p:spPr>
+          <a:xfrm>
+            <a:off x="9555480" y="2240280"/>
+            <a:ext cx="1737360" cy="256032"/>
+          </a:xfrm>
+          <a:prstGeom prst="roundRect">
+            <a:avLst>
+              <a:gd name="adj" fmla="val 50000"/>
+            </a:avLst>
+          </a:prstGeom>
+          <a:solidFill>
+            <a:srgbClr val="1E6B3E"/>
+          </a:solidFill>
+          <a:ln>
+            <a:noFill/>
+          </a:ln>
+          <a:effectLst/>
+        </p:spPr>
+        <p:style>
+          <a:lnRef idx="1">
+            <a:schemeClr val="accent1"/>
+          </a:lnRef>
+          <a:fillRef idx="3">
+            <a:schemeClr val="accent1"/>
+          </a:fillRef>
+          <a:effectRef idx="2">
+            <a:schemeClr val="accent1"/>
+          </a:effectRef>
+          <a:fontRef idx="minor">
+            <a:schemeClr val="lt1"/>
+          </a:fontRef>
+        </p:style>
+        <p:txBody>
+          <a:bodyPr rtlCol="0" anchor="ctr" tIns="0" bIns="0"/>
+          <a:lstStyle/>
+          <a:p>
+            <a:pPr algn="ctr"/>
+            <a:r>
+              <a:rPr lang="es-UY" sz="1000" b="1" i="0" dirty="0">
+                <a:solidFill>
+                  <a:srgbClr val="FFFFFF"/>
+                </a:solidFill>
+                <a:latin typeface="Calibri"/>
+                <a:cs typeface="Calibri"/>
+              </a:rPr>
+              <a:t xml:space="preserve">EL PATRÓN</a:t>
+            </a:r>
+          </a:p>
+        </p:txBody>
+      </p:sp>
+      <p:sp>
+        <p:nvSpPr>
+          <p:cNvPr id="30" name="Tarjeta 30"/>
+          <p:cNvSpPr/>
+          <p:nvPr/>
+        </p:nvSpPr>
+        <p:spPr>
+          <a:xfrm>
+            <a:off x="868680" y="5074920"/>
+            <a:ext cx="10424160" cy="566928"/>
+          </a:xfrm>
+          <a:prstGeom prst="roundRect">
+            <a:avLst>
+              <a:gd name="adj" fmla="val 5000"/>
+            </a:avLst>
+          </a:prstGeom>
+          <a:solidFill>
+            <a:srgbClr val="FFFFFF"/>
+          </a:solidFill>
+          <a:ln w="9525">
+            <a:solidFill>
+              <a:srgbClr val="C2CAD6"/>
+            </a:solidFill>
+          </a:ln>
+          <a:effectLst/>
+        </p:spPr>
+        <p:style>
+          <a:lnRef idx="1">
+            <a:schemeClr val="accent1"/>
+          </a:lnRef>
+          <a:fillRef idx="3">
+            <a:schemeClr val="accent1"/>
+          </a:fillRef>
+          <a:effectRef idx="2">
+            <a:schemeClr val="accent1"/>
+          </a:effectRef>
+          <a:fontRef idx="minor">
+            <a:schemeClr val="lt1"/>
+          </a:fontRef>
+        </p:style>
+        <p:txBody>
+          <a:bodyPr rtlCol="0" anchor="ctr" wrap="square" lIns="164592" rIns="146304" tIns="164592" bIns="91440">
+            <a:noAutofit/>
+          </a:bodyPr>
+          <a:lstStyle/>
+          <a:p>
+            <a:pPr algn="l">
+              <a:lnSpc>
+                <a:spcPct val="105000"/>
+              </a:lnSpc>
+              <a:spcBef>
+                <a:spcPts val="0"/>
+              </a:spcBef>
+              <a:spcAft>
+                <a:spcPts val="0"/>
+              </a:spcAft>
+            </a:pPr>
+            <a:r>
+              <a:rPr lang="es-UY" sz="1500" b="1" i="0" dirty="0">
+                <a:solidFill>
+                  <a:srgbClr val="2B3A6E"/>
+                </a:solidFill>
+                <a:latin typeface="Calibri"/>
+                <a:cs typeface="Calibri"/>
+              </a:rPr>
+              <a:t xml:space="preserve">En la aplicación. </a:t>
+            </a:r>
+            <a:r>
+              <a:rPr lang="es-UY" sz="1500" b="0" i="0" dirty="0">
+                <a:solidFill>
+                  <a:srgbClr val="222222"/>
+                </a:solidFill>
+                <a:latin typeface="Calibri"/>
+                <a:cs typeface="Calibri"/>
+              </a:rPr>
+              <a:t xml:space="preserve">el carné es el login y la carpeta 125 es boletin.php?id=125. Tener carné no da acceso a todas las carpetas.</a:t>
+            </a:r>
+          </a:p>
+        </p:txBody>
+      </p:sp>
+    </p:spTree>
+  </p:cSld>
+  <p:clrMapOvr>
+    <a:masterClrMapping/>
+  </p:clrMapOvr>
+</p:sld>
+</file>
+
+<file path=ppt/slides/slide23.xml><?xml version="1.0" encoding="utf-8"?>
+<p:sld xmlns:a="http://schemas.openxmlformats.org/drawingml/2006/main" xmlns:p="http://schemas.openxmlformats.org/presentationml/2006/main" xmlns:r="http://schemas.openxmlformats.org/officeDocument/2006/relationships">
+  <p:cSld>
+    <p:spTree>
+      <p:nvGrpSpPr>
+        <p:cNvPr id="1" name=""/>
+        <p:cNvGrpSpPr/>
+        <p:nvPr/>
+      </p:nvGrpSpPr>
+      <p:grpSpPr/>
+      <p:sp>
+        <p:nvSpPr>
+          <p:cNvPr id="2" name="Rectangle 1"/>
+          <p:cNvSpPr/>
+          <p:nvPr/>
+        </p:nvSpPr>
+        <p:spPr>
+          <a:xfrm>
+            <a:off x="0" y="0"/>
+            <a:ext cx="292608" cy="6858000"/>
+          </a:xfrm>
+          <a:prstGeom prst="rect">
+            <a:avLst/>
+          </a:prstGeom>
+          <a:pattFill prst="ltUpDiag">
+            <a:fgClr>
+              <a:srgbClr val="C2CAD6"/>
+            </a:fgClr>
+            <a:bgClr>
+              <a:srgbClr val="FFFFFF"/>
+            </a:bgClr>
+          </a:pattFill>
+          <a:ln>
+            <a:noFill/>
+          </a:ln>
+          <a:effectLst/>
+        </p:spPr>
+        <p:style>
+          <a:lnRef idx="1">
+            <a:schemeClr val="accent1"/>
+          </a:lnRef>
+          <a:fillRef idx="3">
+            <a:schemeClr val="accent1"/>
+          </a:fillRef>
+          <a:effectRef idx="2">
+            <a:schemeClr val="accent1"/>
+          </a:effectRef>
+          <a:fontRef idx="minor">
+            <a:schemeClr val="lt1"/>
+          </a:fontRef>
+        </p:style>
+        <p:txBody>
+          <a:bodyPr rtlCol="0" anchor="ctr"/>
+          <a:lstStyle/>
+          <a:p>
+            <a:pPr algn="ctr"/>
+          </a:p>
+        </p:txBody>
+      </p:sp>
+      <p:sp>
+        <p:nvSpPr>
+          <p:cNvPr id="3" name="TextBox 2"/>
+          <p:cNvSpPr txBox="1"/>
+          <p:nvPr/>
+        </p:nvSpPr>
+        <p:spPr>
+          <a:xfrm>
+            <a:off x="822960" y="420624"/>
+            <a:ext cx="10424160" cy="822960"/>
+          </a:xfrm>
+          <a:prstGeom prst="rect">
+            <a:avLst/>
+          </a:prstGeom>
+          <a:noFill/>
+        </p:spPr>
+        <p:txBody>
+          <a:bodyPr wrap="square" anchor="t" lIns="0" rIns="0" tIns="0" bIns="0">
+            <a:spAutoFit/>
+          </a:bodyPr>
+          <a:lstStyle/>
+          <a:p>
+            <a:pPr algn="l">
+              <a:lnSpc>
+                <a:spcPct val="100000"/>
+              </a:lnSpc>
+              <a:spcBef>
+                <a:spcPts val="0"/>
+              </a:spcBef>
+              <a:spcAft>
+                <a:spcPts val="600"/>
+              </a:spcAft>
+            </a:pPr>
+            <a:r>
+              <a:rPr sz="2900" b="0" i="0">
+                <a:solidFill>
+                  <a:srgbClr val="2B3A6E"/>
+                </a:solidFill>
+                <a:latin typeface="Calibri"/>
+                <a:cs typeface="Calibri"/>
+              </a:rPr>
+              <a:t>Falla 4 · Salto de directorio: ejemplo cotidiano</a:t>
+            </a:r>
+          </a:p>
+        </p:txBody>
+      </p:sp>
+      <p:sp>
+        <p:nvSpPr>
+          <p:cNvPr id="4" name="Rectangle 3"/>
+          <p:cNvSpPr/>
+          <p:nvPr/>
+        </p:nvSpPr>
+        <p:spPr>
+          <a:xfrm>
+            <a:off x="822960" y="6327648"/>
+            <a:ext cx="10561320" cy="30480"/>
+          </a:xfrm>
+          <a:prstGeom prst="rect">
+            <a:avLst/>
+          </a:prstGeom>
+          <a:solidFill>
+            <a:srgbClr val="2B3A6E"/>
+          </a:solidFill>
+          <a:ln>
+            <a:noFill/>
+          </a:ln>
+          <a:effectLst/>
+        </p:spPr>
+        <p:style>
+          <a:lnRef idx="1">
+            <a:schemeClr val="accent1"/>
+          </a:lnRef>
+          <a:fillRef idx="3">
+            <a:schemeClr val="accent1"/>
+          </a:fillRef>
+          <a:effectRef idx="2">
+            <a:schemeClr val="accent1"/>
+          </a:effectRef>
+          <a:fontRef idx="minor">
+            <a:schemeClr val="lt1"/>
+          </a:fontRef>
+        </p:style>
+        <p:txBody>
+          <a:bodyPr rtlCol="0" anchor="ctr"/>
+          <a:lstStyle/>
+          <a:p>
+            <a:pPr algn="ctr"/>
+          </a:p>
+        </p:txBody>
+      </p:sp>
+      <p:sp>
+        <p:nvSpPr>
+          <p:cNvPr id="5" name="TextBox 4"/>
+          <p:cNvSpPr txBox="1"/>
+          <p:nvPr/>
+        </p:nvSpPr>
+        <p:spPr>
+          <a:xfrm>
+            <a:off x="8351215" y="6400800"/>
+            <a:ext cx="3657600" cy="274320"/>
+          </a:xfrm>
+          <a:prstGeom prst="rect">
+            <a:avLst/>
+          </a:prstGeom>
+          <a:noFill/>
+        </p:spPr>
+        <p:txBody>
+          <a:bodyPr wrap="square" anchor="t" lIns="0" rIns="0" tIns="0" bIns="0">
+            <a:spAutoFit/>
+          </a:bodyPr>
+          <a:lstStyle/>
+          <a:p>
+            <a:pPr algn="r">
+              <a:lnSpc>
+                <a:spcPct val="100000"/>
+              </a:lnSpc>
+              <a:spcBef>
+                <a:spcPts val="0"/>
+              </a:spcBef>
+              <a:spcAft>
+                <a:spcPts val="600"/>
+              </a:spcAft>
+            </a:pPr>
+            <a:r>
+              <a:rPr sz="950" b="1" i="0">
+                <a:solidFill>
+                  <a:srgbClr val="5B667A"/>
+                </a:solidFill>
+                <a:latin typeface="Calibri"/>
+                <a:cs typeface="Calibri"/>
+              </a:rPr>
+              <a:t>CIBERSEGURIDAD</a:t>
+            </a:r>
+            <a:r>
+              <a:rPr sz="950" b="0" i="0">
+                <a:solidFill>
+                  <a:srgbClr val="5B667A"/>
+                </a:solidFill>
+                <a:latin typeface="Calibri"/>
+                <a:cs typeface="Calibri"/>
+              </a:rPr>
+              <a:t>  ·  3.º Bachillerato Tecnológico</a:t>
+            </a:r>
+          </a:p>
+        </p:txBody>
+      </p:sp>
+      <p:sp>
+        <p:nvSpPr>
+          <p:cNvPr id="21" name="Texto 21"/>
+          <p:cNvSpPr txBox="1"/>
+          <p:nvPr/>
+        </p:nvSpPr>
+        <p:spPr>
+          <a:xfrm>
+            <a:off x="868680" y="1371600"/>
+            <a:ext cx="10424160" cy="685800"/>
+          </a:xfrm>
+          <a:prstGeom prst="rect">
+            <a:avLst/>
+          </a:prstGeom>
+          <a:noFill/>
+        </p:spPr>
+        <p:txBody>
+          <a:bodyPr wrap="square" anchor="t" lIns="0" rIns="0" tIns="0" bIns="0">
+            <a:noAutofit/>
+          </a:bodyPr>
+          <a:lstStyle/>
+          <a:p>
+            <a:pPr algn="l">
+              <a:lnSpc>
+                <a:spcPct val="114000"/>
+              </a:lnSpc>
+              <a:spcBef>
+                <a:spcPts val="0"/>
+              </a:spcBef>
+              <a:spcAft>
+                <a:spcPts val="600"/>
+              </a:spcAft>
+            </a:pPr>
+            <a:r>
+              <a:rPr lang="es-UY" sz="1700" b="1" i="0" dirty="0">
+                <a:solidFill>
+                  <a:srgbClr val="2B3A6E"/>
+                </a:solidFill>
+                <a:latin typeface="Calibri"/>
+                <a:cs typeface="Calibri"/>
+              </a:rPr>
+              <a:t xml:space="preserve">La situación. </a:t>
+            </a:r>
+            <a:r>
+              <a:rPr lang="es-UY" sz="1700" b="0" i="0" dirty="0">
+                <a:solidFill>
+                  <a:srgbClr val="222222"/>
+                </a:solidFill>
+                <a:latin typeface="Calibri"/>
+                <a:cs typeface="Calibri"/>
+              </a:rPr>
+              <a:t xml:space="preserve">El encargado de la fotocopiadora copia documentos del estante público a pedido.</a:t>
+            </a:r>
+          </a:p>
+        </p:txBody>
+      </p:sp>
+      <p:sp>
+        <p:nvSpPr>
+          <p:cNvPr id="22" name="Tarjeta 22"/>
+          <p:cNvSpPr/>
+          <p:nvPr/>
+        </p:nvSpPr>
+        <p:spPr>
+          <a:xfrm>
+            <a:off x="868680" y="2514600"/>
+            <a:ext cx="3218688" cy="2240280"/>
+          </a:xfrm>
+          <a:prstGeom prst="roundRect">
+            <a:avLst>
+              <a:gd name="adj" fmla="val 5000"/>
+            </a:avLst>
+          </a:prstGeom>
+          <a:solidFill>
+            <a:srgbClr val="F3F4F7"/>
+          </a:solidFill>
+          <a:ln w="9525">
+            <a:solidFill>
+              <a:srgbClr val="D7DDE7"/>
+            </a:solidFill>
+          </a:ln>
+          <a:effectLst/>
+        </p:spPr>
+        <p:style>
+          <a:lnRef idx="1">
+            <a:schemeClr val="accent1"/>
+          </a:lnRef>
+          <a:fillRef idx="3">
+            <a:schemeClr val="accent1"/>
+          </a:fillRef>
+          <a:effectRef idx="2">
+            <a:schemeClr val="accent1"/>
+          </a:effectRef>
+          <a:fontRef idx="minor">
+            <a:schemeClr val="lt1"/>
+          </a:fontRef>
+        </p:style>
+        <p:txBody>
+          <a:bodyPr rtlCol="0" anchor="t" wrap="square" lIns="164592" rIns="146304" tIns="164592" bIns="91440">
+            <a:noAutofit/>
+          </a:bodyPr>
+          <a:lstStyle/>
+          <a:p>
+            <a:pPr algn="l">
+              <a:lnSpc>
+                <a:spcPct val="110000"/>
+              </a:lnSpc>
+              <a:spcBef>
+                <a:spcPts val="0"/>
+              </a:spcBef>
+              <a:spcAft>
+                <a:spcPts val="600"/>
+              </a:spcAft>
+            </a:pPr>
+            <a:r>
+              <a:rPr lang="es-UY" sz="1500" b="0" i="0" dirty="0">
+                <a:solidFill>
+                  <a:srgbClr val="222222"/>
+                </a:solidFill>
+                <a:latin typeface="Calibri"/>
+                <a:cs typeface="Calibri"/>
+              </a:rPr>
+              <a:t xml:space="preserve">El pedido dice: «Copiar del estante público el documento ______».</a:t>
+            </a:r>
+          </a:p>
+          <a:p>
+            <a:pPr algn="l">
+              <a:lnSpc>
+                <a:spcPct val="110000"/>
+              </a:lnSpc>
+              <a:spcBef>
+                <a:spcPts val="0"/>
+              </a:spcBef>
+              <a:spcAft>
+                <a:spcPts val="600"/>
+              </a:spcAft>
+            </a:pPr>
+            <a:r>
+              <a:rPr lang="es-UY" sz="1500" b="0" i="0" dirty="0">
+                <a:solidFill>
+                  <a:srgbClr val="222222"/>
+                </a:solidFill>
+                <a:latin typeface="Calibri"/>
+                <a:cs typeface="Calibri"/>
+              </a:rPr>
+              <a:t xml:space="preserve">El encargado sigue el camino escrito en el pedido, busca el documento y lo copia.</a:t>
+            </a:r>
+          </a:p>
+        </p:txBody>
+      </p:sp>
+      <p:sp>
+        <p:nvSpPr>
+          <p:cNvPr id="23" name="Etiqueta 23"/>
+          <p:cNvSpPr/>
+          <p:nvPr/>
+        </p:nvSpPr>
+        <p:spPr>
+          <a:xfrm>
+            <a:off x="2350008" y="2240280"/>
+            <a:ext cx="1737360" cy="256032"/>
+          </a:xfrm>
+          <a:prstGeom prst="roundRect">
+            <a:avLst>
+              <a:gd name="adj" fmla="val 50000"/>
+            </a:avLst>
+          </a:prstGeom>
+          <a:solidFill>
+            <a:srgbClr val="2B3A6E"/>
+          </a:solidFill>
+          <a:ln>
+            <a:noFill/>
+          </a:ln>
+          <a:effectLst/>
+        </p:spPr>
+        <p:style>
+          <a:lnRef idx="1">
+            <a:schemeClr val="accent1"/>
+          </a:lnRef>
+          <a:fillRef idx="3">
+            <a:schemeClr val="accent1"/>
+          </a:fillRef>
+          <a:effectRef idx="2">
+            <a:schemeClr val="accent1"/>
+          </a:effectRef>
+          <a:fontRef idx="minor">
+            <a:schemeClr val="lt1"/>
+          </a:fontRef>
+        </p:style>
+        <p:txBody>
+          <a:bodyPr rtlCol="0" anchor="ctr" tIns="0" bIns="0"/>
+          <a:lstStyle/>
+          <a:p>
+            <a:pPr algn="ctr"/>
+            <a:r>
+              <a:rPr lang="es-UY" sz="1000" b="1" i="0" dirty="0">
+                <a:solidFill>
+                  <a:srgbClr val="FFFFFF"/>
+                </a:solidFill>
+                <a:latin typeface="Calibri"/>
+                <a:cs typeface="Calibri"/>
+              </a:rPr>
+              <a:t xml:space="preserve">CÓMO FUNCIONA</a:t>
+            </a:r>
+          </a:p>
+        </p:txBody>
+      </p:sp>
+      <p:sp>
+        <p:nvSpPr>
+          <p:cNvPr id="24" name="Flecha 24"/>
+          <p:cNvSpPr/>
+          <p:nvPr/>
+        </p:nvSpPr>
+        <p:spPr>
+          <a:xfrm>
+            <a:off x="4206240" y="3497580"/>
+            <a:ext cx="146304" cy="274320"/>
+          </a:xfrm>
+          <a:prstGeom prst="chevron">
+            <a:avLst/>
+          </a:prstGeom>
+          <a:solidFill>
+            <a:srgbClr val="C2CAD6"/>
+          </a:solidFill>
+          <a:ln>
+            <a:noFill/>
+          </a:ln>
+          <a:effectLst/>
+        </p:spPr>
+        <p:style>
+          <a:lnRef idx="1">
+            <a:schemeClr val="accent1"/>
+          </a:lnRef>
+          <a:fillRef idx="3">
+            <a:schemeClr val="accent1"/>
+          </a:fillRef>
+          <a:effectRef idx="2">
+            <a:schemeClr val="accent1"/>
+          </a:effectRef>
+          <a:fontRef idx="minor">
+            <a:schemeClr val="lt1"/>
+          </a:fontRef>
+        </p:style>
+      </p:sp>
+      <p:sp>
+        <p:nvSpPr>
+          <p:cNvPr id="25" name="Tarjeta 25"/>
+          <p:cNvSpPr/>
+          <p:nvPr/>
+        </p:nvSpPr>
+        <p:spPr>
+          <a:xfrm>
+            <a:off x="4471416" y="2514600"/>
+            <a:ext cx="3218688" cy="2240280"/>
+          </a:xfrm>
+          <a:prstGeom prst="roundRect">
+            <a:avLst>
+              <a:gd name="adj" fmla="val 5000"/>
+            </a:avLst>
+          </a:prstGeom>
+          <a:solidFill>
+            <a:srgbClr val="F3F4F7"/>
+          </a:solidFill>
+          <a:ln w="9525">
+            <a:solidFill>
+              <a:srgbClr val="D7DDE7"/>
+            </a:solidFill>
+          </a:ln>
+          <a:effectLst/>
+        </p:spPr>
+        <p:style>
+          <a:lnRef idx="1">
+            <a:schemeClr val="accent1"/>
+          </a:lnRef>
+          <a:fillRef idx="3">
+            <a:schemeClr val="accent1"/>
+          </a:fillRef>
+          <a:effectRef idx="2">
+            <a:schemeClr val="accent1"/>
+          </a:effectRef>
+          <a:fontRef idx="minor">
+            <a:schemeClr val="lt1"/>
+          </a:fontRef>
+        </p:style>
+        <p:txBody>
+          <a:bodyPr rtlCol="0" anchor="t" wrap="square" lIns="164592" rIns="146304" tIns="164592" bIns="91440">
+            <a:noAutofit/>
+          </a:bodyPr>
+          <a:lstStyle/>
+          <a:p>
+            <a:pPr algn="l">
+              <a:lnSpc>
+                <a:spcPct val="110000"/>
+              </a:lnSpc>
+              <a:spcBef>
+                <a:spcPts val="0"/>
+              </a:spcBef>
+              <a:spcAft>
+                <a:spcPts val="600"/>
+              </a:spcAft>
+            </a:pPr>
+            <a:r>
+              <a:rPr lang="es-UY" sz="1500" b="0" i="0" dirty="0">
+                <a:solidFill>
+                  <a:srgbClr val="222222"/>
+                </a:solidFill>
+                <a:latin typeface="Calibri"/>
+                <a:cs typeface="Calibri"/>
+              </a:rPr>
+              <a:t xml:space="preserve">Alguien escribe: «volver al pasillo, entrar a dirección, carpeta de claves».</a:t>
+            </a:r>
+          </a:p>
+          <a:p>
+            <a:pPr algn="l">
+              <a:lnSpc>
+                <a:spcPct val="110000"/>
+              </a:lnSpc>
+              <a:spcBef>
+                <a:spcPts val="0"/>
+              </a:spcBef>
+              <a:spcAft>
+                <a:spcPts val="600"/>
+              </a:spcAft>
+            </a:pPr>
+            <a:r>
+              <a:rPr lang="es-UY" sz="1500" b="0" i="0" dirty="0">
+                <a:solidFill>
+                  <a:srgbClr val="222222"/>
+                </a:solidFill>
+                <a:latin typeface="Calibri"/>
+                <a:cs typeface="Calibri"/>
+              </a:rPr>
+              <a:t xml:space="preserve">El encargado sigue el camino, sale del estante público y copia un papel privado.</a:t>
+            </a:r>
+          </a:p>
+        </p:txBody>
+      </p:sp>
+      <p:sp>
+        <p:nvSpPr>
+          <p:cNvPr id="26" name="Etiqueta 26"/>
+          <p:cNvSpPr/>
+          <p:nvPr/>
+        </p:nvSpPr>
+        <p:spPr>
+          <a:xfrm>
+            <a:off x="5952744" y="2240280"/>
+            <a:ext cx="1737360" cy="256032"/>
+          </a:xfrm>
+          <a:prstGeom prst="roundRect">
+            <a:avLst>
+              <a:gd name="adj" fmla="val 50000"/>
+            </a:avLst>
+          </a:prstGeom>
+          <a:solidFill>
+            <a:srgbClr val="B0362F"/>
+          </a:solidFill>
+          <a:ln>
+            <a:noFill/>
+          </a:ln>
+          <a:effectLst/>
+        </p:spPr>
+        <p:style>
+          <a:lnRef idx="1">
+            <a:schemeClr val="accent1"/>
+          </a:lnRef>
+          <a:fillRef idx="3">
+            <a:schemeClr val="accent1"/>
+          </a:fillRef>
+          <a:effectRef idx="2">
+            <a:schemeClr val="accent1"/>
+          </a:effectRef>
+          <a:fontRef idx="minor">
+            <a:schemeClr val="lt1"/>
+          </a:fontRef>
+        </p:style>
+        <p:txBody>
+          <a:bodyPr rtlCol="0" anchor="ctr" tIns="0" bIns="0"/>
+          <a:lstStyle/>
+          <a:p>
+            <a:pPr algn="ctr"/>
+            <a:r>
+              <a:rPr lang="es-UY" sz="1000" b="1" i="0" dirty="0">
+                <a:solidFill>
+                  <a:srgbClr val="FFFFFF"/>
+                </a:solidFill>
+                <a:latin typeface="Calibri"/>
+                <a:cs typeface="Calibri"/>
+              </a:rPr>
+              <a:t xml:space="preserve">EL ATAQUE</a:t>
+            </a:r>
+          </a:p>
+        </p:txBody>
+      </p:sp>
+      <p:sp>
+        <p:nvSpPr>
+          <p:cNvPr id="27" name="Flecha 27"/>
+          <p:cNvSpPr/>
+          <p:nvPr/>
+        </p:nvSpPr>
+        <p:spPr>
+          <a:xfrm>
+            <a:off x="7808976" y="3497580"/>
+            <a:ext cx="146304" cy="274320"/>
+          </a:xfrm>
+          <a:prstGeom prst="chevron">
+            <a:avLst/>
+          </a:prstGeom>
+          <a:solidFill>
+            <a:srgbClr val="C2CAD6"/>
+          </a:solidFill>
+          <a:ln>
+            <a:noFill/>
+          </a:ln>
+          <a:effectLst/>
+        </p:spPr>
+        <p:style>
+          <a:lnRef idx="1">
+            <a:schemeClr val="accent1"/>
+          </a:lnRef>
+          <a:fillRef idx="3">
+            <a:schemeClr val="accent1"/>
+          </a:fillRef>
+          <a:effectRef idx="2">
+            <a:schemeClr val="accent1"/>
+          </a:effectRef>
+          <a:fontRef idx="minor">
+            <a:schemeClr val="lt1"/>
+          </a:fontRef>
+        </p:style>
+      </p:sp>
+      <p:sp>
+        <p:nvSpPr>
+          <p:cNvPr id="28" name="Tarjeta 28"/>
+          <p:cNvSpPr/>
+          <p:nvPr/>
+        </p:nvSpPr>
+        <p:spPr>
+          <a:xfrm>
+            <a:off x="8074152" y="2514600"/>
+            <a:ext cx="3218688" cy="2240280"/>
+          </a:xfrm>
+          <a:prstGeom prst="roundRect">
+            <a:avLst>
+              <a:gd name="adj" fmla="val 5000"/>
+            </a:avLst>
+          </a:prstGeom>
+          <a:solidFill>
+            <a:srgbClr val="F3F4F7"/>
+          </a:solidFill>
+          <a:ln w="9525">
+            <a:solidFill>
+              <a:srgbClr val="D7DDE7"/>
+            </a:solidFill>
+          </a:ln>
+          <a:effectLst/>
+        </p:spPr>
+        <p:style>
+          <a:lnRef idx="1">
+            <a:schemeClr val="accent1"/>
+          </a:lnRef>
+          <a:fillRef idx="3">
+            <a:schemeClr val="accent1"/>
+          </a:fillRef>
+          <a:effectRef idx="2">
+            <a:schemeClr val="accent1"/>
+          </a:effectRef>
+          <a:fontRef idx="minor">
+            <a:schemeClr val="lt1"/>
+          </a:fontRef>
+        </p:style>
+        <p:txBody>
+          <a:bodyPr rtlCol="0" anchor="t" wrap="square" lIns="164592" rIns="146304" tIns="164592" bIns="91440">
+            <a:noAutofit/>
+          </a:bodyPr>
+          <a:lstStyle/>
+          <a:p>
+            <a:pPr algn="l">
+              <a:lnSpc>
+                <a:spcPct val="110000"/>
+              </a:lnSpc>
+              <a:spcBef>
+                <a:spcPts val="0"/>
+              </a:spcBef>
+              <a:spcAft>
+                <a:spcPts val="600"/>
+              </a:spcAft>
+            </a:pPr>
+            <a:r>
+              <a:rPr lang="es-UY" sz="1500" b="0" i="0" dirty="0">
+                <a:solidFill>
+                  <a:srgbClr val="222222"/>
+                </a:solidFill>
+                <a:latin typeface="Calibri"/>
+                <a:cs typeface="Calibri"/>
+              </a:rPr>
+              <a:t xml:space="preserve">El encargado tiene una lista impresa con los únicos documentos que se pueden copiar.</a:t>
+            </a:r>
+          </a:p>
+          <a:p>
+            <a:pPr algn="l">
+              <a:lnSpc>
+                <a:spcPct val="110000"/>
+              </a:lnSpc>
+              <a:spcBef>
+                <a:spcPts val="0"/>
+              </a:spcBef>
+              <a:spcAft>
+                <a:spcPts val="600"/>
+              </a:spcAft>
+            </a:pPr>
+            <a:r>
+              <a:rPr lang="es-UY" sz="1500" b="0" i="0" dirty="0">
+                <a:solidFill>
+                  <a:srgbClr val="222222"/>
+                </a:solidFill>
+                <a:latin typeface="Calibri"/>
+                <a:cs typeface="Calibri"/>
+              </a:rPr>
+              <a:t xml:space="preserve">Si lo pedido no está en la lista, no se copia, se escriba como se escriba.</a:t>
+            </a:r>
+          </a:p>
+        </p:txBody>
+      </p:sp>
+      <p:sp>
+        <p:nvSpPr>
+          <p:cNvPr id="29" name="Etiqueta 29"/>
+          <p:cNvSpPr/>
+          <p:nvPr/>
+        </p:nvSpPr>
+        <p:spPr>
+          <a:xfrm>
+            <a:off x="9555480" y="2240280"/>
+            <a:ext cx="1737360" cy="256032"/>
+          </a:xfrm>
+          <a:prstGeom prst="roundRect">
+            <a:avLst>
+              <a:gd name="adj" fmla="val 50000"/>
+            </a:avLst>
+          </a:prstGeom>
+          <a:solidFill>
+            <a:srgbClr val="1E6B3E"/>
+          </a:solidFill>
+          <a:ln>
+            <a:noFill/>
+          </a:ln>
+          <a:effectLst/>
+        </p:spPr>
+        <p:style>
+          <a:lnRef idx="1">
+            <a:schemeClr val="accent1"/>
+          </a:lnRef>
+          <a:fillRef idx="3">
+            <a:schemeClr val="accent1"/>
+          </a:fillRef>
+          <a:effectRef idx="2">
+            <a:schemeClr val="accent1"/>
+          </a:effectRef>
+          <a:fontRef idx="minor">
+            <a:schemeClr val="lt1"/>
+          </a:fontRef>
+        </p:style>
+        <p:txBody>
+          <a:bodyPr rtlCol="0" anchor="ctr" tIns="0" bIns="0"/>
+          <a:lstStyle/>
+          <a:p>
+            <a:pPr algn="ctr"/>
+            <a:r>
+              <a:rPr lang="es-UY" sz="1000" b="1" i="0" dirty="0">
+                <a:solidFill>
+                  <a:srgbClr val="FFFFFF"/>
+                </a:solidFill>
+                <a:latin typeface="Calibri"/>
+                <a:cs typeface="Calibri"/>
+              </a:rPr>
+              <a:t xml:space="preserve">EL PATRÓN</a:t>
+            </a:r>
+          </a:p>
+        </p:txBody>
+      </p:sp>
+      <p:sp>
+        <p:nvSpPr>
+          <p:cNvPr id="30" name="Tarjeta 30"/>
+          <p:cNvSpPr/>
+          <p:nvPr/>
+        </p:nvSpPr>
+        <p:spPr>
+          <a:xfrm>
+            <a:off x="868680" y="5074920"/>
+            <a:ext cx="10424160" cy="566928"/>
+          </a:xfrm>
+          <a:prstGeom prst="roundRect">
+            <a:avLst>
+              <a:gd name="adj" fmla="val 5000"/>
+            </a:avLst>
+          </a:prstGeom>
+          <a:solidFill>
+            <a:srgbClr val="FFFFFF"/>
+          </a:solidFill>
+          <a:ln w="9525">
+            <a:solidFill>
+              <a:srgbClr val="C2CAD6"/>
+            </a:solidFill>
+          </a:ln>
+          <a:effectLst/>
+        </p:spPr>
+        <p:style>
+          <a:lnRef idx="1">
+            <a:schemeClr val="accent1"/>
+          </a:lnRef>
+          <a:fillRef idx="3">
+            <a:schemeClr val="accent1"/>
+          </a:fillRef>
+          <a:effectRef idx="2">
+            <a:schemeClr val="accent1"/>
+          </a:effectRef>
+          <a:fontRef idx="minor">
+            <a:schemeClr val="lt1"/>
+          </a:fontRef>
+        </p:style>
+        <p:txBody>
+          <a:bodyPr rtlCol="0" anchor="ctr" wrap="square" lIns="164592" rIns="146304" tIns="164592" bIns="91440">
+            <a:noAutofit/>
+          </a:bodyPr>
+          <a:lstStyle/>
+          <a:p>
+            <a:pPr algn="l">
+              <a:lnSpc>
+                <a:spcPct val="105000"/>
+              </a:lnSpc>
+              <a:spcBef>
+                <a:spcPts val="0"/>
+              </a:spcBef>
+              <a:spcAft>
+                <a:spcPts val="0"/>
+              </a:spcAft>
+            </a:pPr>
+            <a:r>
+              <a:rPr lang="es-UY" sz="1500" b="1" i="0" dirty="0">
+                <a:solidFill>
+                  <a:srgbClr val="2B3A6E"/>
+                </a:solidFill>
+                <a:latin typeface="Calibri"/>
+                <a:cs typeface="Calibri"/>
+              </a:rPr>
+              <a:t xml:space="preserve">En la aplicación. </a:t>
+            </a:r>
+            <a:r>
+              <a:rPr lang="es-UY" sz="1500" b="0" i="0" dirty="0">
+                <a:solidFill>
+                  <a:srgbClr val="222222"/>
+                </a:solidFill>
+                <a:latin typeface="Calibri"/>
+                <a:cs typeface="Calibri"/>
+              </a:rPr>
+              <a:t xml:space="preserve">el estante es la carpeta archivos/, «volver al pasillo» es ../ y la lista impresa es la lista blanca.</a:t>
+            </a:r>
+          </a:p>
+        </p:txBody>
+      </p:sp>
+    </p:spTree>
+  </p:cSld>
+  <p:clrMapOvr>
+    <a:masterClrMapping/>
+  </p:clrMapOvr>
+</p:sld>
+</file>
+
+<file path=ppt/slides/slide24.xml><?xml version="1.0" encoding="utf-8"?>
+<p:sld xmlns:a="http://schemas.openxmlformats.org/drawingml/2006/main" xmlns:p="http://schemas.openxmlformats.org/presentationml/2006/main" xmlns:r="http://schemas.openxmlformats.org/officeDocument/2006/relationships">
+  <p:cSld>
+    <p:spTree>
+      <p:nvGrpSpPr>
+        <p:cNvPr id="1" name=""/>
+        <p:cNvGrpSpPr/>
+        <p:nvPr/>
+      </p:nvGrpSpPr>
+      <p:grpSpPr/>
+      <p:sp>
+        <p:nvSpPr>
+          <p:cNvPr id="2" name="Rectangle 1"/>
+          <p:cNvSpPr/>
+          <p:nvPr/>
+        </p:nvSpPr>
+        <p:spPr>
+          <a:xfrm>
+            <a:off x="0" y="0"/>
+            <a:ext cx="292608" cy="6858000"/>
+          </a:xfrm>
+          <a:prstGeom prst="rect">
+            <a:avLst/>
+          </a:prstGeom>
+          <a:pattFill prst="ltUpDiag">
+            <a:fgClr>
+              <a:srgbClr val="C2CAD6"/>
+            </a:fgClr>
+            <a:bgClr>
+              <a:srgbClr val="FFFFFF"/>
+            </a:bgClr>
+          </a:pattFill>
+          <a:ln>
+            <a:noFill/>
+          </a:ln>
+          <a:effectLst/>
+        </p:spPr>
+        <p:style>
+          <a:lnRef idx="1">
+            <a:schemeClr val="accent1"/>
+          </a:lnRef>
+          <a:fillRef idx="3">
+            <a:schemeClr val="accent1"/>
+          </a:fillRef>
+          <a:effectRef idx="2">
+            <a:schemeClr val="accent1"/>
+          </a:effectRef>
+          <a:fontRef idx="minor">
+            <a:schemeClr val="lt1"/>
+          </a:fontRef>
+        </p:style>
+        <p:txBody>
+          <a:bodyPr rtlCol="0" anchor="ctr"/>
+          <a:lstStyle/>
+          <a:p>
+            <a:pPr algn="ctr"/>
+          </a:p>
+        </p:txBody>
+      </p:sp>
+      <p:sp>
+        <p:nvSpPr>
+          <p:cNvPr id="3" name="TextBox 2"/>
+          <p:cNvSpPr txBox="1"/>
+          <p:nvPr/>
+        </p:nvSpPr>
+        <p:spPr>
+          <a:xfrm>
+            <a:off x="822960" y="420624"/>
+            <a:ext cx="10424160" cy="822960"/>
+          </a:xfrm>
+          <a:prstGeom prst="rect">
+            <a:avLst/>
+          </a:prstGeom>
+          <a:noFill/>
+        </p:spPr>
+        <p:txBody>
+          <a:bodyPr wrap="square" anchor="t" lIns="0" rIns="0" tIns="0" bIns="0">
+            <a:spAutoFit/>
+          </a:bodyPr>
+          <a:lstStyle/>
+          <a:p>
+            <a:pPr algn="l">
+              <a:lnSpc>
+                <a:spcPct val="100000"/>
+              </a:lnSpc>
+              <a:spcBef>
+                <a:spcPts val="0"/>
+              </a:spcBef>
+              <a:spcAft>
+                <a:spcPts val="600"/>
+              </a:spcAft>
+            </a:pPr>
+            <a:r>
+              <a:rPr sz="2900" b="0" i="0">
+                <a:solidFill>
+                  <a:srgbClr val="2B3A6E"/>
+                </a:solidFill>
+                <a:latin typeface="Calibri"/>
+                <a:cs typeface="Calibri"/>
+              </a:rPr>
+              <a:t>Falla 5 · Contraseñas guardadas: ejemplo cotidiano</a:t>
+            </a:r>
+          </a:p>
+        </p:txBody>
+      </p:sp>
+      <p:sp>
+        <p:nvSpPr>
+          <p:cNvPr id="4" name="Rectangle 3"/>
+          <p:cNvSpPr/>
+          <p:nvPr/>
+        </p:nvSpPr>
+        <p:spPr>
+          <a:xfrm>
+            <a:off x="822960" y="6327648"/>
+            <a:ext cx="10561320" cy="30480"/>
+          </a:xfrm>
+          <a:prstGeom prst="rect">
+            <a:avLst/>
+          </a:prstGeom>
+          <a:solidFill>
+            <a:srgbClr val="2B3A6E"/>
+          </a:solidFill>
+          <a:ln>
+            <a:noFill/>
+          </a:ln>
+          <a:effectLst/>
+        </p:spPr>
+        <p:style>
+          <a:lnRef idx="1">
+            <a:schemeClr val="accent1"/>
+          </a:lnRef>
+          <a:fillRef idx="3">
+            <a:schemeClr val="accent1"/>
+          </a:fillRef>
+          <a:effectRef idx="2">
+            <a:schemeClr val="accent1"/>
+          </a:effectRef>
+          <a:fontRef idx="minor">
+            <a:schemeClr val="lt1"/>
+          </a:fontRef>
+        </p:style>
+        <p:txBody>
+          <a:bodyPr rtlCol="0" anchor="ctr"/>
+          <a:lstStyle/>
+          <a:p>
+            <a:pPr algn="ctr"/>
+          </a:p>
+        </p:txBody>
+      </p:sp>
+      <p:sp>
+        <p:nvSpPr>
+          <p:cNvPr id="5" name="TextBox 4"/>
+          <p:cNvSpPr txBox="1"/>
+          <p:nvPr/>
+        </p:nvSpPr>
+        <p:spPr>
+          <a:xfrm>
+            <a:off x="8351215" y="6400800"/>
+            <a:ext cx="3657600" cy="274320"/>
+          </a:xfrm>
+          <a:prstGeom prst="rect">
+            <a:avLst/>
+          </a:prstGeom>
+          <a:noFill/>
+        </p:spPr>
+        <p:txBody>
+          <a:bodyPr wrap="square" anchor="t" lIns="0" rIns="0" tIns="0" bIns="0">
+            <a:spAutoFit/>
+          </a:bodyPr>
+          <a:lstStyle/>
+          <a:p>
+            <a:pPr algn="r">
+              <a:lnSpc>
+                <a:spcPct val="100000"/>
+              </a:lnSpc>
+              <a:spcBef>
+                <a:spcPts val="0"/>
+              </a:spcBef>
+              <a:spcAft>
+                <a:spcPts val="600"/>
+              </a:spcAft>
+            </a:pPr>
+            <a:r>
+              <a:rPr sz="950" b="1" i="0">
+                <a:solidFill>
+                  <a:srgbClr val="5B667A"/>
+                </a:solidFill>
+                <a:latin typeface="Calibri"/>
+                <a:cs typeface="Calibri"/>
+              </a:rPr>
+              <a:t>CIBERSEGURIDAD</a:t>
+            </a:r>
+            <a:r>
+              <a:rPr sz="950" b="0" i="0">
+                <a:solidFill>
+                  <a:srgbClr val="5B667A"/>
+                </a:solidFill>
+                <a:latin typeface="Calibri"/>
+                <a:cs typeface="Calibri"/>
+              </a:rPr>
+              <a:t>  ·  3.º Bachillerato Tecnológico</a:t>
+            </a:r>
+          </a:p>
+        </p:txBody>
+      </p:sp>
+      <p:sp>
+        <p:nvSpPr>
+          <p:cNvPr id="21" name="Texto 21"/>
+          <p:cNvSpPr txBox="1"/>
+          <p:nvPr/>
+        </p:nvSpPr>
+        <p:spPr>
+          <a:xfrm>
+            <a:off x="868680" y="1371600"/>
+            <a:ext cx="10424160" cy="685800"/>
+          </a:xfrm>
+          <a:prstGeom prst="rect">
+            <a:avLst/>
+          </a:prstGeom>
+          <a:noFill/>
+        </p:spPr>
+        <p:txBody>
+          <a:bodyPr wrap="square" anchor="t" lIns="0" rIns="0" tIns="0" bIns="0">
+            <a:noAutofit/>
+          </a:bodyPr>
+          <a:lstStyle/>
+          <a:p>
+            <a:pPr algn="l">
+              <a:lnSpc>
+                <a:spcPct val="114000"/>
+              </a:lnSpc>
+              <a:spcBef>
+                <a:spcPts val="0"/>
+              </a:spcBef>
+              <a:spcAft>
+                <a:spcPts val="600"/>
+              </a:spcAft>
+            </a:pPr>
+            <a:r>
+              <a:rPr lang="es-UY" sz="1700" b="1" i="0" dirty="0">
+                <a:solidFill>
+                  <a:srgbClr val="2B3A6E"/>
+                </a:solidFill>
+                <a:latin typeface="Calibri"/>
+                <a:cs typeface="Calibri"/>
+              </a:rPr>
+              <a:t xml:space="preserve">La idea. </a:t>
+            </a:r>
+            <a:r>
+              <a:rPr lang="es-UY" sz="1700" b="0" i="0" dirty="0">
+                <a:solidFill>
+                  <a:srgbClr val="222222"/>
+                </a:solidFill>
+                <a:latin typeface="Calibri"/>
+                <a:cs typeface="Calibri"/>
+              </a:rPr>
+              <a:t xml:space="preserve">Un licuado se hace fácil con frutas, pero a partir del licuado no se pueden recuperar las frutas. Eso es un hash.</a:t>
+            </a:r>
+          </a:p>
+        </p:txBody>
+      </p:sp>
+      <p:sp>
+        <p:nvSpPr>
+          <p:cNvPr id="22" name="Tarjeta 22"/>
+          <p:cNvSpPr/>
+          <p:nvPr/>
+        </p:nvSpPr>
+        <p:spPr>
+          <a:xfrm>
+            <a:off x="868680" y="2514600"/>
+            <a:ext cx="3218688" cy="2240280"/>
+          </a:xfrm>
+          <a:prstGeom prst="roundRect">
+            <a:avLst>
+              <a:gd name="adj" fmla="val 5000"/>
+            </a:avLst>
+          </a:prstGeom>
+          <a:solidFill>
+            <a:srgbClr val="F3F4F7"/>
+          </a:solidFill>
+          <a:ln w="9525">
+            <a:solidFill>
+              <a:srgbClr val="D7DDE7"/>
+            </a:solidFill>
+          </a:ln>
+          <a:effectLst/>
+        </p:spPr>
+        <p:style>
+          <a:lnRef idx="1">
+            <a:schemeClr val="accent1"/>
+          </a:lnRef>
+          <a:fillRef idx="3">
+            <a:schemeClr val="accent1"/>
+          </a:fillRef>
+          <a:effectRef idx="2">
+            <a:schemeClr val="accent1"/>
+          </a:effectRef>
+          <a:fontRef idx="minor">
+            <a:schemeClr val="lt1"/>
+          </a:fontRef>
+        </p:style>
+        <p:txBody>
+          <a:bodyPr rtlCol="0" anchor="t" wrap="square" lIns="164592" rIns="146304" tIns="164592" bIns="91440">
+            <a:noAutofit/>
+          </a:bodyPr>
+          <a:lstStyle/>
+          <a:p>
+            <a:pPr algn="l">
+              <a:lnSpc>
+                <a:spcPct val="110000"/>
+              </a:lnSpc>
+              <a:spcBef>
+                <a:spcPts val="0"/>
+              </a:spcBef>
+              <a:spcAft>
+                <a:spcPts val="600"/>
+              </a:spcAft>
+            </a:pPr>
+            <a:r>
+              <a:rPr lang="es-UY" sz="1500" b="0" i="0" dirty="0">
+                <a:solidFill>
+                  <a:srgbClr val="222222"/>
+                </a:solidFill>
+                <a:latin typeface="Calibri"/>
+                <a:cs typeface="Calibri"/>
+              </a:rPr>
+              <a:t xml:space="preserve">Las contraseñas se anotan tal cual en un cuaderno.</a:t>
+            </a:r>
+          </a:p>
+          <a:p>
+            <a:pPr algn="l">
+              <a:lnSpc>
+                <a:spcPct val="110000"/>
+              </a:lnSpc>
+              <a:spcBef>
+                <a:spcPts val="0"/>
+              </a:spcBef>
+              <a:spcAft>
+                <a:spcPts val="600"/>
+              </a:spcAft>
+            </a:pPr>
+            <a:r>
+              <a:rPr lang="es-UY" sz="1500" b="0" i="0" dirty="0">
+                <a:solidFill>
+                  <a:srgbClr val="222222"/>
+                </a:solidFill>
+                <a:latin typeface="Calibri"/>
+                <a:cs typeface="Calibri"/>
+              </a:rPr>
+              <a:t xml:space="preserve">Quien roba el cuaderno las lee todas, sin ningún esfuerzo.</a:t>
+            </a:r>
+          </a:p>
+        </p:txBody>
+      </p:sp>
+      <p:sp>
+        <p:nvSpPr>
+          <p:cNvPr id="23" name="Etiqueta 23"/>
+          <p:cNvSpPr/>
+          <p:nvPr/>
+        </p:nvSpPr>
+        <p:spPr>
+          <a:xfrm>
+            <a:off x="2350008" y="2240280"/>
+            <a:ext cx="1737360" cy="256032"/>
+          </a:xfrm>
+          <a:prstGeom prst="roundRect">
+            <a:avLst>
+              <a:gd name="adj" fmla="val 50000"/>
+            </a:avLst>
+          </a:prstGeom>
+          <a:solidFill>
+            <a:srgbClr val="B0362F"/>
+          </a:solidFill>
+          <a:ln>
+            <a:noFill/>
+          </a:ln>
+          <a:effectLst/>
+        </p:spPr>
+        <p:style>
+          <a:lnRef idx="1">
+            <a:schemeClr val="accent1"/>
+          </a:lnRef>
+          <a:fillRef idx="3">
+            <a:schemeClr val="accent1"/>
+          </a:fillRef>
+          <a:effectRef idx="2">
+            <a:schemeClr val="accent1"/>
+          </a:effectRef>
+          <a:fontRef idx="minor">
+            <a:schemeClr val="lt1"/>
+          </a:fontRef>
+        </p:style>
+        <p:txBody>
+          <a:bodyPr rtlCol="0" anchor="ctr" tIns="0" bIns="0"/>
+          <a:lstStyle/>
+          <a:p>
+            <a:pPr algn="ctr"/>
+            <a:r>
+              <a:rPr lang="es-UY" sz="1000" b="1" i="0" dirty="0">
+                <a:solidFill>
+                  <a:srgbClr val="FFFFFF"/>
+                </a:solidFill>
+                <a:latin typeface="Calibri"/>
+                <a:cs typeface="Calibri"/>
+              </a:rPr>
+              <a:t xml:space="preserve">TEXTO PLANO</a:t>
+            </a:r>
+          </a:p>
+        </p:txBody>
+      </p:sp>
+      <p:sp>
+        <p:nvSpPr>
+          <p:cNvPr id="24" name="Flecha 24"/>
+          <p:cNvSpPr/>
+          <p:nvPr/>
+        </p:nvSpPr>
+        <p:spPr>
+          <a:xfrm>
+            <a:off x="4206240" y="3497580"/>
+            <a:ext cx="146304" cy="274320"/>
+          </a:xfrm>
+          <a:prstGeom prst="chevron">
+            <a:avLst/>
+          </a:prstGeom>
+          <a:solidFill>
+            <a:srgbClr val="C2CAD6"/>
+          </a:solidFill>
+          <a:ln>
+            <a:noFill/>
+          </a:ln>
+          <a:effectLst/>
+        </p:spPr>
+        <p:style>
+          <a:lnRef idx="1">
+            <a:schemeClr val="accent1"/>
+          </a:lnRef>
+          <a:fillRef idx="3">
+            <a:schemeClr val="accent1"/>
+          </a:fillRef>
+          <a:effectRef idx="2">
+            <a:schemeClr val="accent1"/>
+          </a:effectRef>
+          <a:fontRef idx="minor">
+            <a:schemeClr val="lt1"/>
+          </a:fontRef>
+        </p:style>
+      </p:sp>
+      <p:sp>
+        <p:nvSpPr>
+          <p:cNvPr id="25" name="Tarjeta 25"/>
+          <p:cNvSpPr/>
+          <p:nvPr/>
+        </p:nvSpPr>
+        <p:spPr>
+          <a:xfrm>
+            <a:off x="4471416" y="2514600"/>
+            <a:ext cx="3218688" cy="2240280"/>
+          </a:xfrm>
+          <a:prstGeom prst="roundRect">
+            <a:avLst>
+              <a:gd name="adj" fmla="val 5000"/>
+            </a:avLst>
+          </a:prstGeom>
+          <a:solidFill>
+            <a:srgbClr val="F3F4F7"/>
+          </a:solidFill>
+          <a:ln w="9525">
+            <a:solidFill>
+              <a:srgbClr val="D7DDE7"/>
+            </a:solidFill>
+          </a:ln>
+          <a:effectLst/>
+        </p:spPr>
+        <p:style>
+          <a:lnRef idx="1">
+            <a:schemeClr val="accent1"/>
+          </a:lnRef>
+          <a:fillRef idx="3">
+            <a:schemeClr val="accent1"/>
+          </a:fillRef>
+          <a:effectRef idx="2">
+            <a:schemeClr val="accent1"/>
+          </a:effectRef>
+          <a:fontRef idx="minor">
+            <a:schemeClr val="lt1"/>
+          </a:fontRef>
+        </p:style>
+        <p:txBody>
+          <a:bodyPr rtlCol="0" anchor="t" wrap="square" lIns="164592" rIns="146304" tIns="164592" bIns="91440">
+            <a:noAutofit/>
+          </a:bodyPr>
+          <a:lstStyle/>
+          <a:p>
+            <a:pPr algn="l">
+              <a:lnSpc>
+                <a:spcPct val="110000"/>
+              </a:lnSpc>
+              <a:spcBef>
+                <a:spcPts val="0"/>
+              </a:spcBef>
+              <a:spcAft>
+                <a:spcPts val="600"/>
+              </a:spcAft>
+            </a:pPr>
+            <a:r>
+              <a:rPr lang="es-UY" sz="1500" b="0" i="0" dirty="0">
+                <a:solidFill>
+                  <a:srgbClr val="222222"/>
+                </a:solidFill>
+                <a:latin typeface="Calibri"/>
+                <a:cs typeface="Calibri"/>
+              </a:rPr>
+              <a:t xml:space="preserve">Cada contraseña se guarda como «licuado», pero es instantáneo y siempre sale igual.</a:t>
+            </a:r>
+          </a:p>
+          <a:p>
+            <a:pPr algn="l">
+              <a:lnSpc>
+                <a:spcPct val="110000"/>
+              </a:lnSpc>
+              <a:spcBef>
+                <a:spcPts val="0"/>
+              </a:spcBef>
+              <a:spcAft>
+                <a:spcPts val="600"/>
+              </a:spcAft>
+            </a:pPr>
+            <a:r>
+              <a:rPr lang="es-UY" sz="1500" b="0" i="0" dirty="0">
+                <a:solidFill>
+                  <a:srgbClr val="222222"/>
+                </a:solidFill>
+                <a:latin typeface="Calibri"/>
+                <a:cs typeface="Calibri"/>
+              </a:rPr>
+              <a:t xml:space="preserve">El atacante usa un catálogo con los licuados de millones de contraseñas comunes y busca coincidencias.</a:t>
+            </a:r>
+          </a:p>
+        </p:txBody>
+      </p:sp>
+      <p:sp>
+        <p:nvSpPr>
+          <p:cNvPr id="26" name="Etiqueta 26"/>
+          <p:cNvSpPr/>
+          <p:nvPr/>
+        </p:nvSpPr>
+        <p:spPr>
+          <a:xfrm>
+            <a:off x="5952744" y="2240280"/>
+            <a:ext cx="1737360" cy="256032"/>
+          </a:xfrm>
+          <a:prstGeom prst="roundRect">
+            <a:avLst>
+              <a:gd name="adj" fmla="val 50000"/>
+            </a:avLst>
+          </a:prstGeom>
+          <a:solidFill>
+            <a:srgbClr val="B0362F"/>
+          </a:solidFill>
+          <a:ln>
+            <a:noFill/>
+          </a:ln>
+          <a:effectLst/>
+        </p:spPr>
+        <p:style>
+          <a:lnRef idx="1">
+            <a:schemeClr val="accent1"/>
+          </a:lnRef>
+          <a:fillRef idx="3">
+            <a:schemeClr val="accent1"/>
+          </a:fillRef>
+          <a:effectRef idx="2">
+            <a:schemeClr val="accent1"/>
+          </a:effectRef>
+          <a:fontRef idx="minor">
+            <a:schemeClr val="lt1"/>
+          </a:fontRef>
+        </p:style>
+        <p:txBody>
+          <a:bodyPr rtlCol="0" anchor="ctr" tIns="0" bIns="0"/>
+          <a:lstStyle/>
+          <a:p>
+            <a:pPr algn="ctr"/>
+            <a:r>
+              <a:rPr lang="es-UY" sz="1000" b="1" i="0" dirty="0">
+                <a:solidFill>
+                  <a:srgbClr val="FFFFFF"/>
+                </a:solidFill>
+                <a:latin typeface="Calibri"/>
+                <a:cs typeface="Calibri"/>
+              </a:rPr>
+              <a:t xml:space="preserve">MD5</a:t>
+            </a:r>
+          </a:p>
+        </p:txBody>
+      </p:sp>
+      <p:sp>
+        <p:nvSpPr>
+          <p:cNvPr id="27" name="Flecha 27"/>
+          <p:cNvSpPr/>
+          <p:nvPr/>
+        </p:nvSpPr>
+        <p:spPr>
+          <a:xfrm>
+            <a:off x="7808976" y="3497580"/>
+            <a:ext cx="146304" cy="274320"/>
+          </a:xfrm>
+          <a:prstGeom prst="chevron">
+            <a:avLst/>
+          </a:prstGeom>
+          <a:solidFill>
+            <a:srgbClr val="C2CAD6"/>
+          </a:solidFill>
+          <a:ln>
+            <a:noFill/>
+          </a:ln>
+          <a:effectLst/>
+        </p:spPr>
+        <p:style>
+          <a:lnRef idx="1">
+            <a:schemeClr val="accent1"/>
+          </a:lnRef>
+          <a:fillRef idx="3">
+            <a:schemeClr val="accent1"/>
+          </a:fillRef>
+          <a:effectRef idx="2">
+            <a:schemeClr val="accent1"/>
+          </a:effectRef>
+          <a:fontRef idx="minor">
+            <a:schemeClr val="lt1"/>
+          </a:fontRef>
+        </p:style>
+      </p:sp>
+      <p:sp>
+        <p:nvSpPr>
+          <p:cNvPr id="28" name="Tarjeta 28"/>
+          <p:cNvSpPr/>
+          <p:nvPr/>
+        </p:nvSpPr>
+        <p:spPr>
+          <a:xfrm>
+            <a:off x="8074152" y="2514600"/>
+            <a:ext cx="3218688" cy="2240280"/>
+          </a:xfrm>
+          <a:prstGeom prst="roundRect">
+            <a:avLst>
+              <a:gd name="adj" fmla="val 5000"/>
+            </a:avLst>
+          </a:prstGeom>
+          <a:solidFill>
+            <a:srgbClr val="F3F4F7"/>
+          </a:solidFill>
+          <a:ln w="9525">
+            <a:solidFill>
+              <a:srgbClr val="D7DDE7"/>
+            </a:solidFill>
+          </a:ln>
+          <a:effectLst/>
+        </p:spPr>
+        <p:style>
+          <a:lnRef idx="1">
+            <a:schemeClr val="accent1"/>
+          </a:lnRef>
+          <a:fillRef idx="3">
+            <a:schemeClr val="accent1"/>
+          </a:fillRef>
+          <a:effectRef idx="2">
+            <a:schemeClr val="accent1"/>
+          </a:effectRef>
+          <a:fontRef idx="minor">
+            <a:schemeClr val="lt1"/>
+          </a:fontRef>
+        </p:style>
+        <p:txBody>
+          <a:bodyPr rtlCol="0" anchor="t" wrap="square" lIns="164592" rIns="146304" tIns="164592" bIns="91440">
+            <a:noAutofit/>
+          </a:bodyPr>
+          <a:lstStyle/>
+          <a:p>
+            <a:pPr algn="l">
+              <a:lnSpc>
+                <a:spcPct val="110000"/>
+              </a:lnSpc>
+              <a:spcBef>
+                <a:spcPts val="0"/>
+              </a:spcBef>
+              <a:spcAft>
+                <a:spcPts val="600"/>
+              </a:spcAft>
+            </a:pPr>
+            <a:r>
+              <a:rPr lang="es-UY" sz="1500" b="0" i="0" dirty="0">
+                <a:solidFill>
+                  <a:srgbClr val="222222"/>
+                </a:solidFill>
+                <a:latin typeface="Calibri"/>
+                <a:cs typeface="Calibri"/>
+              </a:rPr>
+              <a:t xml:space="preserve">El licuado se prepara despacio y con un ingrediente distinto para cada persona (la sal).</a:t>
+            </a:r>
+          </a:p>
+          <a:p>
+            <a:pPr algn="l">
+              <a:lnSpc>
+                <a:spcPct val="110000"/>
+              </a:lnSpc>
+              <a:spcBef>
+                <a:spcPts val="0"/>
+              </a:spcBef>
+              <a:spcAft>
+                <a:spcPts val="600"/>
+              </a:spcAft>
+            </a:pPr>
+            <a:r>
+              <a:rPr lang="es-UY" sz="1500" b="0" i="0" dirty="0">
+                <a:solidFill>
+                  <a:srgbClr val="222222"/>
+                </a:solidFill>
+                <a:latin typeface="Calibri"/>
+                <a:cs typeface="Calibri"/>
+              </a:rPr>
+              <a:t xml:space="preserve">El catálogo ya no sirve, y probar contraseña por contraseña lleva demasiado tiempo.</a:t>
+            </a:r>
+          </a:p>
+        </p:txBody>
+      </p:sp>
+      <p:sp>
+        <p:nvSpPr>
+          <p:cNvPr id="29" name="Etiqueta 29"/>
+          <p:cNvSpPr/>
+          <p:nvPr/>
+        </p:nvSpPr>
+        <p:spPr>
+          <a:xfrm>
+            <a:off x="9555480" y="2240280"/>
+            <a:ext cx="1737360" cy="256032"/>
+          </a:xfrm>
+          <a:prstGeom prst="roundRect">
+            <a:avLst>
+              <a:gd name="adj" fmla="val 50000"/>
+            </a:avLst>
+          </a:prstGeom>
+          <a:solidFill>
+            <a:srgbClr val="1E6B3E"/>
+          </a:solidFill>
+          <a:ln>
+            <a:noFill/>
+          </a:ln>
+          <a:effectLst/>
+        </p:spPr>
+        <p:style>
+          <a:lnRef idx="1">
+            <a:schemeClr val="accent1"/>
+          </a:lnRef>
+          <a:fillRef idx="3">
+            <a:schemeClr val="accent1"/>
+          </a:fillRef>
+          <a:effectRef idx="2">
+            <a:schemeClr val="accent1"/>
+          </a:effectRef>
+          <a:fontRef idx="minor">
+            <a:schemeClr val="lt1"/>
+          </a:fontRef>
+        </p:style>
+        <p:txBody>
+          <a:bodyPr rtlCol="0" anchor="ctr" tIns="0" bIns="0"/>
+          <a:lstStyle/>
+          <a:p>
+            <a:pPr algn="ctr"/>
+            <a:r>
+              <a:rPr lang="es-UY" sz="1000" b="1" i="0" dirty="0">
+                <a:solidFill>
+                  <a:srgbClr val="FFFFFF"/>
+                </a:solidFill>
+                <a:latin typeface="Calibri"/>
+                <a:cs typeface="Calibri"/>
+              </a:rPr>
+              <a:t xml:space="preserve">PASSWORD_HASH</a:t>
+            </a:r>
+          </a:p>
+        </p:txBody>
+      </p:sp>
+      <p:sp>
+        <p:nvSpPr>
+          <p:cNvPr id="30" name="Tarjeta 30"/>
+          <p:cNvSpPr/>
+          <p:nvPr/>
+        </p:nvSpPr>
+        <p:spPr>
+          <a:xfrm>
+            <a:off x="868680" y="5074920"/>
+            <a:ext cx="10424160" cy="566928"/>
+          </a:xfrm>
+          <a:prstGeom prst="roundRect">
+            <a:avLst>
+              <a:gd name="adj" fmla="val 5000"/>
+            </a:avLst>
+          </a:prstGeom>
+          <a:solidFill>
+            <a:srgbClr val="FFFFFF"/>
+          </a:solidFill>
+          <a:ln w="9525">
+            <a:solidFill>
+              <a:srgbClr val="C2CAD6"/>
+            </a:solidFill>
+          </a:ln>
+          <a:effectLst/>
+        </p:spPr>
+        <p:style>
+          <a:lnRef idx="1">
+            <a:schemeClr val="accent1"/>
+          </a:lnRef>
+          <a:fillRef idx="3">
+            <a:schemeClr val="accent1"/>
+          </a:fillRef>
+          <a:effectRef idx="2">
+            <a:schemeClr val="accent1"/>
+          </a:effectRef>
+          <a:fontRef idx="minor">
+            <a:schemeClr val="lt1"/>
+          </a:fontRef>
+        </p:style>
+        <p:txBody>
+          <a:bodyPr rtlCol="0" anchor="ctr" wrap="square" lIns="164592" rIns="146304" tIns="164592" bIns="91440">
+            <a:noAutofit/>
+          </a:bodyPr>
+          <a:lstStyle/>
+          <a:p>
+            <a:pPr algn="l">
+              <a:lnSpc>
+                <a:spcPct val="105000"/>
+              </a:lnSpc>
+              <a:spcBef>
+                <a:spcPts val="0"/>
+              </a:spcBef>
+              <a:spcAft>
+                <a:spcPts val="0"/>
+              </a:spcAft>
+            </a:pPr>
+            <a:r>
+              <a:rPr lang="es-UY" sz="1500" b="1" i="0" dirty="0">
+                <a:solidFill>
+                  <a:srgbClr val="2B3A6E"/>
+                </a:solidFill>
+                <a:latin typeface="Calibri"/>
+                <a:cs typeface="Calibri"/>
+              </a:rPr>
+              <a:t xml:space="preserve">En la aplicación. </a:t>
+            </a:r>
+            <a:r>
+              <a:rPr lang="es-UY" sz="1500" b="0" i="0" dirty="0">
+                <a:solidFill>
+                  <a:srgbClr val="222222"/>
+                </a:solidFill>
+                <a:latin typeface="Calibri"/>
+                <a:cs typeface="Calibri"/>
+              </a:rPr>
+              <a:t xml:space="preserve">al iniciar sesión se licúa lo que la persona escribe y se compara con lo guardado: password_verify.</a:t>
+            </a:r>
+          </a:p>
+        </p:txBody>
+      </p:sp>
+    </p:spTree>
+  </p:cSld>
+  <p:clrMapOvr>
+    <a:masterClrMapping/>
+  </p:clrMapOvr>
+</p:sld>
+</file>
+
+<file path=ppt/slides/slide25.xml><?xml version="1.0" encoding="utf-8"?>
+<p:sld xmlns:a="http://schemas.openxmlformats.org/drawingml/2006/main" xmlns:p="http://schemas.openxmlformats.org/presentationml/2006/main" xmlns:r="http://schemas.openxmlformats.org/officeDocument/2006/relationships">
+  <p:cSld>
+    <p:spTree>
+      <p:nvGrpSpPr>
+        <p:cNvPr id="1" name=""/>
+        <p:cNvGrpSpPr/>
+        <p:nvPr/>
+      </p:nvGrpSpPr>
+      <p:grpSpPr/>
+      <p:sp>
+        <p:nvSpPr>
+          <p:cNvPr id="2" name="Rectangle 1"/>
+          <p:cNvSpPr/>
+          <p:nvPr/>
+        </p:nvSpPr>
+        <p:spPr>
+          <a:xfrm>
+            <a:off x="0" y="0"/>
+            <a:ext cx="292608" cy="6858000"/>
+          </a:xfrm>
+          <a:prstGeom prst="rect">
+            <a:avLst/>
+          </a:prstGeom>
+          <a:pattFill prst="ltUpDiag">
+            <a:fgClr>
+              <a:srgbClr val="C2CAD6"/>
+            </a:fgClr>
+            <a:bgClr>
+              <a:srgbClr val="FFFFFF"/>
+            </a:bgClr>
+          </a:pattFill>
+          <a:ln>
+            <a:noFill/>
+          </a:ln>
+          <a:effectLst/>
+        </p:spPr>
+        <p:style>
+          <a:lnRef idx="1">
+            <a:schemeClr val="accent1"/>
+          </a:lnRef>
+          <a:fillRef idx="3">
+            <a:schemeClr val="accent1"/>
+          </a:fillRef>
+          <a:effectRef idx="2">
+            <a:schemeClr val="accent1"/>
+          </a:effectRef>
+          <a:fontRef idx="minor">
+            <a:schemeClr val="lt1"/>
+          </a:fontRef>
+        </p:style>
+        <p:txBody>
+          <a:bodyPr rtlCol="0" anchor="ctr"/>
+          <a:lstStyle/>
+          <a:p>
+            <a:pPr algn="ctr"/>
+          </a:p>
+        </p:txBody>
+      </p:sp>
+      <p:sp>
+        <p:nvSpPr>
+          <p:cNvPr id="3" name="TextBox 2"/>
+          <p:cNvSpPr txBox="1"/>
+          <p:nvPr/>
+        </p:nvSpPr>
+        <p:spPr>
+          <a:xfrm>
+            <a:off x="822960" y="420624"/>
+            <a:ext cx="10424160" cy="822960"/>
+          </a:xfrm>
+          <a:prstGeom prst="rect">
+            <a:avLst/>
+          </a:prstGeom>
+          <a:noFill/>
+        </p:spPr>
+        <p:txBody>
+          <a:bodyPr wrap="square" anchor="t" lIns="0" rIns="0" tIns="0" bIns="0">
+            <a:spAutoFit/>
+          </a:bodyPr>
+          <a:lstStyle/>
+          <a:p>
+            <a:pPr algn="l">
+              <a:lnSpc>
+                <a:spcPct val="100000"/>
+              </a:lnSpc>
+              <a:spcBef>
+                <a:spcPts val="0"/>
+              </a:spcBef>
+              <a:spcAft>
+                <a:spcPts val="600"/>
+              </a:spcAft>
+            </a:pPr>
+            <a:r>
+              <a:rPr sz="2900" b="0" i="0">
+                <a:solidFill>
+                  <a:srgbClr val="2B3A6E"/>
+                </a:solidFill>
+                <a:latin typeface="Calibri"/>
+                <a:cs typeface="Calibri"/>
+              </a:rPr>
+              <a:t>Los cinco ejemplos cotidianos</a:t>
+            </a:r>
+          </a:p>
+        </p:txBody>
+      </p:sp>
+      <p:sp>
+        <p:nvSpPr>
+          <p:cNvPr id="4" name="Rectangle 3"/>
+          <p:cNvSpPr/>
+          <p:nvPr/>
+        </p:nvSpPr>
+        <p:spPr>
+          <a:xfrm>
+            <a:off x="822960" y="6327648"/>
+            <a:ext cx="10561320" cy="30480"/>
+          </a:xfrm>
+          <a:prstGeom prst="rect">
+            <a:avLst/>
+          </a:prstGeom>
+          <a:solidFill>
+            <a:srgbClr val="2B3A6E"/>
+          </a:solidFill>
+          <a:ln>
+            <a:noFill/>
+          </a:ln>
+          <a:effectLst/>
+        </p:spPr>
+        <p:style>
+          <a:lnRef idx="1">
+            <a:schemeClr val="accent1"/>
+          </a:lnRef>
+          <a:fillRef idx="3">
+            <a:schemeClr val="accent1"/>
+          </a:fillRef>
+          <a:effectRef idx="2">
+            <a:schemeClr val="accent1"/>
+          </a:effectRef>
+          <a:fontRef idx="minor">
+            <a:schemeClr val="lt1"/>
+          </a:fontRef>
+        </p:style>
+        <p:txBody>
+          <a:bodyPr rtlCol="0" anchor="ctr"/>
+          <a:lstStyle/>
+          <a:p>
+            <a:pPr algn="ctr"/>
+          </a:p>
+        </p:txBody>
+      </p:sp>
+      <p:sp>
+        <p:nvSpPr>
+          <p:cNvPr id="5" name="TextBox 4"/>
+          <p:cNvSpPr txBox="1"/>
+          <p:nvPr/>
+        </p:nvSpPr>
+        <p:spPr>
+          <a:xfrm>
+            <a:off x="8351215" y="6400800"/>
+            <a:ext cx="3657600" cy="274320"/>
+          </a:xfrm>
+          <a:prstGeom prst="rect">
+            <a:avLst/>
+          </a:prstGeom>
+          <a:noFill/>
+        </p:spPr>
+        <p:txBody>
+          <a:bodyPr wrap="square" anchor="t" lIns="0" rIns="0" tIns="0" bIns="0">
+            <a:spAutoFit/>
+          </a:bodyPr>
+          <a:lstStyle/>
+          <a:p>
+            <a:pPr algn="r">
+              <a:lnSpc>
+                <a:spcPct val="100000"/>
+              </a:lnSpc>
+              <a:spcBef>
+                <a:spcPts val="0"/>
+              </a:spcBef>
+              <a:spcAft>
+                <a:spcPts val="600"/>
+              </a:spcAft>
+            </a:pPr>
+            <a:r>
+              <a:rPr sz="950" b="1" i="0">
+                <a:solidFill>
+                  <a:srgbClr val="5B667A"/>
+                </a:solidFill>
+                <a:latin typeface="Calibri"/>
+                <a:cs typeface="Calibri"/>
+              </a:rPr>
+              <a:t>CIBERSEGURIDAD</a:t>
+            </a:r>
+            <a:r>
+              <a:rPr sz="950" b="0" i="0">
+                <a:solidFill>
+                  <a:srgbClr val="5B667A"/>
+                </a:solidFill>
+                <a:latin typeface="Calibri"/>
+                <a:cs typeface="Calibri"/>
+              </a:rPr>
+              <a:t>  ·  3.º Bachillerato Tecnológico</a:t>
+            </a:r>
+          </a:p>
+        </p:txBody>
+      </p:sp>
+      <p:graphicFrame>
+        <p:nvGraphicFramePr>
+          <p:cNvPr id="21" name="Table 5"/>
+          <p:cNvGraphicFramePr>
+            <a:graphicFrameLocks noGrp="1"/>
+          </p:cNvGraphicFramePr>
+          <p:nvPr/>
+        </p:nvGraphicFramePr>
+        <p:xfrm>
+          <a:off x="868680" y="1371600"/>
+          <a:ext cx="10424160" cy="3246120"/>
+        </p:xfrm>
+        <a:graphic>
+          <a:graphicData uri="http://schemas.openxmlformats.org/drawingml/2006/table">
+            <a:tbl>
+              <a:tblPr firstRow="1">
+                <a:tableStyleId>{5C22544A-7EE6-4342-B048-85BDC9FD1C3A}</a:tableStyleId>
+              </a:tblPr>
+              <a:tblGrid>
+                <a:gridCol w="2377440"/>
+                <a:gridCol w="4480560"/>
+                <a:gridCol w="3566160"/>
+              </a:tblGrid>
+              <a:tr h="411480">
+                <a:tc>
+                  <a:txBody>
+                    <a:bodyPr/>
+                    <a:lstStyle/>
+                    <a:p>
+                      <a:pPr algn="l"/>
+                      <a:r>
+                        <a:rPr sz="1300" b="1">
+                          <a:solidFill>
+                            <a:srgbClr val="FFFFFF"/>
+                          </a:solidFill>
+                          <a:latin typeface="Calibri"/>
+                          <a:cs typeface="Calibri"/>
+                        </a:rPr>
+                        <a:t>Falla</a:t>
+                      </a:r>
+                    </a:p>
+                  </a:txBody>
+                  <a:tcPr marL="109728" marR="91440" marT="36576" marB="36576" anchor="ctr">
+                    <a:solidFill>
+                      <a:srgbClr val="2B3A6E"/>
+                    </a:solidFill>
+                  </a:tcPr>
+                </a:tc>
+                <a:tc>
+                  <a:txBody>
+                    <a:bodyPr/>
+                    <a:lstStyle/>
+                    <a:p>
+                      <a:pPr algn="l"/>
+                      <a:r>
+                        <a:rPr sz="1300" b="1">
+                          <a:solidFill>
+                            <a:srgbClr val="FFFFFF"/>
+                          </a:solidFill>
+                          <a:latin typeface="Calibri"/>
+                          <a:cs typeface="Calibri"/>
+                        </a:rPr>
+                        <a:t>Ejemplo cotidiano</a:t>
+                      </a:r>
+                    </a:p>
+                  </a:txBody>
+                  <a:tcPr marL="109728" marR="91440" marT="36576" marB="36576" anchor="ctr">
+                    <a:solidFill>
+                      <a:srgbClr val="2B3A6E"/>
+                    </a:solidFill>
+                  </a:tcPr>
+                </a:tc>
+                <a:tc>
+                  <a:txBody>
+                    <a:bodyPr/>
+                    <a:lstStyle/>
+                    <a:p>
+                      <a:pPr algn="l"/>
+                      <a:r>
+                        <a:rPr sz="1300" b="1">
+                          <a:solidFill>
+                            <a:srgbClr val="FFFFFF"/>
+                          </a:solidFill>
+                          <a:latin typeface="Calibri"/>
+                          <a:cs typeface="Calibri"/>
+                        </a:rPr>
+                        <a:t>Cómo se cierra</a:t>
+                      </a:r>
+                    </a:p>
+                  </a:txBody>
+                  <a:tcPr marL="109728" marR="91440" marT="36576" marB="36576" anchor="ctr">
+                    <a:solidFill>
+                      <a:srgbClr val="2B3A6E"/>
+                    </a:solidFill>
+                  </a:tcPr>
+                </a:tc>
+              </a:tr>
+              <a:tr h="566928">
+                <a:tc>
+                  <a:txBody>
+                    <a:bodyPr/>
+                    <a:lstStyle/>
+                    <a:p>
+                      <a:pPr algn="l"/>
+                      <a:r>
+                        <a:rPr sz="1300" b="0">
+                          <a:solidFill>
+                            <a:srgbClr val="222222"/>
+                          </a:solidFill>
+                          <a:latin typeface="Calibri"/>
+                          <a:cs typeface="Calibri"/>
+                        </a:rPr>
+                        <a:t>Inyección SQL</a:t>
+                      </a:r>
+                    </a:p>
+                  </a:txBody>
+                  <a:tcPr marL="109728" marR="91440" marT="36576" marB="36576" anchor="ctr">
+                    <a:solidFill>
+                      <a:srgbClr val="FFFFFF"/>
+                    </a:solidFill>
+                  </a:tcPr>
+                </a:tc>
+                <a:tc>
+                  <a:txBody>
+                    <a:bodyPr/>
+                    <a:lstStyle/>
+                    <a:p>
+                      <a:pPr algn="l"/>
+                      <a:r>
+                        <a:rPr sz="1300" b="0">
+                          <a:solidFill>
+                            <a:srgbClr val="222222"/>
+                          </a:solidFill>
+                          <a:latin typeface="Calibri"/>
+                          <a:cs typeface="Calibri"/>
+                        </a:rPr>
+                        <a:t>El portero que cumple la orden con lo que agregó el visitante</a:t>
+                      </a:r>
+                    </a:p>
+                  </a:txBody>
+                  <a:tcPr marL="109728" marR="91440" marT="36576" marB="36576" anchor="ctr">
+                    <a:solidFill>
+                      <a:srgbClr val="FFFFFF"/>
+                    </a:solidFill>
+                  </a:tcPr>
+                </a:tc>
+                <a:tc>
+                  <a:txBody>
+                    <a:bodyPr/>
+                    <a:lstStyle/>
+                    <a:p>
+                      <a:pPr algn="l"/>
+                      <a:r>
+                        <a:rPr sz="1300" b="1">
+                          <a:solidFill>
+                            <a:srgbClr val="222222"/>
+                          </a:solidFill>
+                          <a:latin typeface="Calibri"/>
+                          <a:cs typeface="Calibri"/>
+                        </a:rPr>
+                        <a:t>Casilla aparte para el dato</a:t>
+                      </a:r>
+                    </a:p>
+                  </a:txBody>
+                  <a:tcPr marL="109728" marR="91440" marT="36576" marB="36576" anchor="ctr">
+                    <a:solidFill>
+                      <a:srgbClr val="FFFFFF"/>
+                    </a:solidFill>
+                  </a:tcPr>
+                </a:tc>
+              </a:tr>
+              <a:tr h="566928">
+                <a:tc>
+                  <a:txBody>
+                    <a:bodyPr/>
+                    <a:lstStyle/>
+                    <a:p>
+                      <a:pPr algn="l"/>
+                      <a:r>
+                        <a:rPr sz="1300" b="0">
+                          <a:solidFill>
+                            <a:srgbClr val="222222"/>
+                          </a:solidFill>
+                          <a:latin typeface="Calibri"/>
+                          <a:cs typeface="Calibri"/>
+                        </a:rPr>
+                        <a:t>XSS</a:t>
+                      </a:r>
+                    </a:p>
+                  </a:txBody>
+                  <a:tcPr marL="109728" marR="91440" marT="36576" marB="36576" anchor="ctr">
+                    <a:solidFill>
+                      <a:srgbClr val="EFF2F7"/>
+                    </a:solidFill>
+                  </a:tcPr>
+                </a:tc>
+                <a:tc>
+                  <a:txBody>
+                    <a:bodyPr/>
+                    <a:lstStyle/>
+                    <a:p>
+                      <a:pPr algn="l"/>
+                      <a:r>
+                        <a:rPr sz="1300" b="0">
+                          <a:solidFill>
+                            <a:srgbClr val="222222"/>
+                          </a:solidFill>
+                          <a:latin typeface="Calibri"/>
+                          <a:cs typeface="Calibri"/>
+                        </a:rPr>
+                        <a:t>El actor que obedece los paréntesis de un saludo</a:t>
+                      </a:r>
+                    </a:p>
+                  </a:txBody>
+                  <a:tcPr marL="109728" marR="91440" marT="36576" marB="36576" anchor="ctr">
+                    <a:solidFill>
+                      <a:srgbClr val="EFF2F7"/>
+                    </a:solidFill>
+                  </a:tcPr>
+                </a:tc>
+                <a:tc>
+                  <a:txBody>
+                    <a:bodyPr/>
+                    <a:lstStyle/>
+                    <a:p>
+                      <a:pPr algn="l"/>
+                      <a:r>
+                        <a:rPr sz="1300" b="1">
+                          <a:solidFill>
+                            <a:srgbClr val="222222"/>
+                          </a:solidFill>
+                          <a:latin typeface="Calibri"/>
+                          <a:cs typeface="Calibri"/>
+                        </a:rPr>
+                        <a:t>Marcar los paréntesis como texto</a:t>
+                      </a:r>
+                    </a:p>
+                  </a:txBody>
+                  <a:tcPr marL="109728" marR="91440" marT="36576" marB="36576" anchor="ctr">
+                    <a:solidFill>
+                      <a:srgbClr val="EFF2F7"/>
+                    </a:solidFill>
+                  </a:tcPr>
+                </a:tc>
+              </a:tr>
+              <a:tr h="566928">
+                <a:tc>
+                  <a:txBody>
+                    <a:bodyPr/>
+                    <a:lstStyle/>
+                    <a:p>
+                      <a:pPr algn="l"/>
+                      <a:r>
+                        <a:rPr sz="1300" b="0">
+                          <a:solidFill>
+                            <a:srgbClr val="222222"/>
+                          </a:solidFill>
+                          <a:latin typeface="Calibri"/>
+                          <a:cs typeface="Calibri"/>
+                        </a:rPr>
+                        <a:t>IDOR</a:t>
+                      </a:r>
+                    </a:p>
+                  </a:txBody>
+                  <a:tcPr marL="109728" marR="91440" marT="36576" marB="36576" anchor="ctr">
+                    <a:solidFill>
+                      <a:srgbClr val="FFFFFF"/>
+                    </a:solidFill>
+                  </a:tcPr>
+                </a:tc>
+                <a:tc>
+                  <a:txBody>
+                    <a:bodyPr/>
+                    <a:lstStyle/>
+                    <a:p>
+                      <a:pPr algn="l"/>
+                      <a:r>
+                        <a:rPr sz="1300" b="0">
+                          <a:solidFill>
+                            <a:srgbClr val="222222"/>
+                          </a:solidFill>
+                          <a:latin typeface="Calibri"/>
+                          <a:cs typeface="Calibri"/>
+                        </a:rPr>
+                        <a:t>La bedelía que solo mira el carné</a:t>
+                      </a:r>
+                    </a:p>
+                  </a:txBody>
+                  <a:tcPr marL="109728" marR="91440" marT="36576" marB="36576" anchor="ctr">
+                    <a:solidFill>
+                      <a:srgbClr val="FFFFFF"/>
+                    </a:solidFill>
+                  </a:tcPr>
+                </a:tc>
+                <a:tc>
+                  <a:txBody>
+                    <a:bodyPr/>
+                    <a:lstStyle/>
+                    <a:p>
+                      <a:pPr algn="l"/>
+                      <a:r>
+                        <a:rPr sz="1300" b="1">
+                          <a:solidFill>
+                            <a:srgbClr val="222222"/>
+                          </a:solidFill>
+                          <a:latin typeface="Calibri"/>
+                          <a:cs typeface="Calibri"/>
+                        </a:rPr>
+                        <a:t>Controlar de quién es cada carpeta</a:t>
+                      </a:r>
+                    </a:p>
+                  </a:txBody>
+                  <a:tcPr marL="109728" marR="91440" marT="36576" marB="36576" anchor="ctr">
+                    <a:solidFill>
+                      <a:srgbClr val="FFFFFF"/>
+                    </a:solidFill>
+                  </a:tcPr>
+                </a:tc>
+              </a:tr>
+              <a:tr h="566928">
+                <a:tc>
+                  <a:txBody>
+                    <a:bodyPr/>
+                    <a:lstStyle/>
+                    <a:p>
+                      <a:pPr algn="l"/>
+                      <a:r>
+                        <a:rPr sz="1300" b="0">
+                          <a:solidFill>
+                            <a:srgbClr val="222222"/>
+                          </a:solidFill>
+                          <a:latin typeface="Calibri"/>
+                          <a:cs typeface="Calibri"/>
+                        </a:rPr>
+                        <a:t>Salto de directorio</a:t>
+                      </a:r>
+                    </a:p>
+                  </a:txBody>
+                  <a:tcPr marL="109728" marR="91440" marT="36576" marB="36576" anchor="ctr">
+                    <a:solidFill>
+                      <a:srgbClr val="EFF2F7"/>
+                    </a:solidFill>
+                  </a:tcPr>
+                </a:tc>
+                <a:tc>
+                  <a:txBody>
+                    <a:bodyPr/>
+                    <a:lstStyle/>
+                    <a:p>
+                      <a:pPr algn="l"/>
+                      <a:r>
+                        <a:rPr sz="1300" b="0">
+                          <a:solidFill>
+                            <a:srgbClr val="222222"/>
+                          </a:solidFill>
+                          <a:latin typeface="Calibri"/>
+                          <a:cs typeface="Calibri"/>
+                        </a:rPr>
+                        <a:t>La fotocopiadora que sigue el camino escrito en el pedido</a:t>
+                      </a:r>
+                    </a:p>
+                  </a:txBody>
+                  <a:tcPr marL="109728" marR="91440" marT="36576" marB="36576" anchor="ctr">
+                    <a:solidFill>
+                      <a:srgbClr val="EFF2F7"/>
+                    </a:solidFill>
+                  </a:tcPr>
+                </a:tc>
+                <a:tc>
+                  <a:txBody>
+                    <a:bodyPr/>
+                    <a:lstStyle/>
+                    <a:p>
+                      <a:pPr algn="l"/>
+                      <a:r>
+                        <a:rPr sz="1300" b="1">
+                          <a:solidFill>
+                            <a:srgbClr val="222222"/>
+                          </a:solidFill>
+                          <a:latin typeface="Calibri"/>
+                          <a:cs typeface="Calibri"/>
+                        </a:rPr>
+                        <a:t>Lista impresa de documentos permitidos</a:t>
+                      </a:r>
+                    </a:p>
+                  </a:txBody>
+                  <a:tcPr marL="109728" marR="91440" marT="36576" marB="36576" anchor="ctr">
+                    <a:solidFill>
+                      <a:srgbClr val="EFF2F7"/>
+                    </a:solidFill>
+                  </a:tcPr>
+                </a:tc>
+              </a:tr>
+              <a:tr h="566928">
+                <a:tc>
+                  <a:txBody>
+                    <a:bodyPr/>
+                    <a:lstStyle/>
+                    <a:p>
+                      <a:pPr algn="l"/>
+                      <a:r>
+                        <a:rPr sz="1300" b="0">
+                          <a:solidFill>
+                            <a:srgbClr val="222222"/>
+                          </a:solidFill>
+                          <a:latin typeface="Calibri"/>
+                          <a:cs typeface="Calibri"/>
+                        </a:rPr>
+                        <a:t>Contraseñas guardadas</a:t>
+                      </a:r>
+                    </a:p>
+                  </a:txBody>
+                  <a:tcPr marL="109728" marR="91440" marT="36576" marB="36576" anchor="ctr">
+                    <a:solidFill>
+                      <a:srgbClr val="FFFFFF"/>
+                    </a:solidFill>
+                  </a:tcPr>
+                </a:tc>
+                <a:tc>
+                  <a:txBody>
+                    <a:bodyPr/>
+                    <a:lstStyle/>
+                    <a:p>
+                      <a:pPr algn="l"/>
+                      <a:r>
+                        <a:rPr sz="1300" b="0">
+                          <a:solidFill>
+                            <a:srgbClr val="222222"/>
+                          </a:solidFill>
+                          <a:latin typeface="Calibri"/>
+                          <a:cs typeface="Calibri"/>
+                        </a:rPr>
+                        <a:t>El cuaderno y el licuado instantáneo</a:t>
+                      </a:r>
+                    </a:p>
+                  </a:txBody>
+                  <a:tcPr marL="109728" marR="91440" marT="36576" marB="36576" anchor="ctr">
+                    <a:solidFill>
+                      <a:srgbClr val="FFFFFF"/>
+                    </a:solidFill>
+                  </a:tcPr>
+                </a:tc>
+                <a:tc>
+                  <a:txBody>
+                    <a:bodyPr/>
+                    <a:lstStyle/>
+                    <a:p>
+                      <a:pPr algn="l"/>
+                      <a:r>
+                        <a:rPr sz="1300" b="1">
+                          <a:solidFill>
+                            <a:srgbClr val="222222"/>
+                          </a:solidFill>
+                          <a:latin typeface="Calibri"/>
+                          <a:cs typeface="Calibri"/>
+                        </a:rPr>
+                        <a:t>Licuado lento con un ingrediente por persona</a:t>
+                      </a:r>
+                    </a:p>
+                  </a:txBody>
+                  <a:tcPr marL="109728" marR="91440" marT="36576" marB="36576" anchor="ctr">
+                    <a:solidFill>
+                      <a:srgbClr val="FFFFFF"/>
+                    </a:solidFill>
+                  </a:tcPr>
+                </a:tc>
+              </a:tr>
+            </a:tbl>
+          </a:graphicData>
+        </a:graphic>
+      </p:graphicFrame>
+      <p:sp>
+        <p:nvSpPr>
+          <p:cNvPr id="22" name="Texto 22"/>
+          <p:cNvSpPr txBox="1"/>
+          <p:nvPr/>
+        </p:nvSpPr>
+        <p:spPr>
+          <a:xfrm>
+            <a:off x="868680" y="4983480"/>
+            <a:ext cx="10424160" cy="548640"/>
+          </a:xfrm>
+          <a:prstGeom prst="rect">
+            <a:avLst/>
+          </a:prstGeom>
+          <a:noFill/>
+        </p:spPr>
+        <p:txBody>
+          <a:bodyPr wrap="square" anchor="t" lIns="0" rIns="0" tIns="0" bIns="0">
+            <a:noAutofit/>
+          </a:bodyPr>
+          <a:lstStyle/>
+          <a:p>
+            <a:pPr algn="l">
+              <a:lnSpc>
+                <a:spcPct val="114000"/>
+              </a:lnSpc>
+              <a:spcBef>
+                <a:spcPts val="0"/>
+              </a:spcBef>
+              <a:spcAft>
+                <a:spcPts val="600"/>
+              </a:spcAft>
+            </a:pPr>
+            <a:r>
+              <a:rPr lang="es-UY" sz="1600" b="1" i="0" dirty="0">
+                <a:solidFill>
+                  <a:srgbClr val="2B3A6E"/>
+                </a:solidFill>
+                <a:latin typeface="Calibri"/>
+                <a:cs typeface="Calibri"/>
+              </a:rPr>
+              <a:t xml:space="preserve">En los cinco casos se confió en lo que llegaba de afuera: un dato se tomó como orden, o se entregó algo sin verificar a quién.</a:t>
             </a:r>
           </a:p>
         </p:txBody>
